--- a/docs/flitunion-seller-catalog.pptx
+++ b/docs/flitunion-seller-catalog.pptx
@@ -1144,104 +1144,24 @@
       </p:grpSpPr>
       <p:sp>
         <p:nvSpPr>
-          <p:cNvPr id="2" name="Text 0"/>
+          <p:cNvPr id="2" name="Shape 0"/>
           <p:cNvSpPr/>
           <p:nvPr/>
         </p:nvSpPr>
         <p:spPr>
           <a:xfrm>
-            <a:off x="0" y="201168"/>
-            <a:ext cx="12191695" cy="274320"/>
-          </a:xfrm>
-          <a:prstGeom prst="rect">
-            <a:avLst/>
-          </a:prstGeom>
-          <a:noFill/>
-          <a:ln/>
-        </p:spPr>
-        <p:txBody>
-          <a:bodyPr wrap="square" rtlCol="0" anchor="ctr"/>
-          <a:lstStyle/>
-          <a:p>
-            <a:pPr algn="ctr" indent="0" marL="0">
-              <a:buNone/>
-            </a:pPr>
-            <a:r>
-              <a:rPr lang="en-US" sz="1600" b="1" spc="100" kern="0" dirty="0">
-                <a:solidFill>
-                  <a:srgbClr val="3182F6"/>
-                </a:solidFill>
-                <a:latin typeface="Malgun Gothic" pitchFamily="34" charset="0"/>
-                <a:ea typeface="Malgun Gothic" pitchFamily="34" charset="-122"/>
-                <a:cs typeface="Malgun Gothic" pitchFamily="34" charset="-120"/>
-              </a:rPr>
-              <a:t>플릿 유니온</a:t>
-            </a:r>
-            <a:endParaRPr lang="en-US" sz="1600" dirty="0"/>
-          </a:p>
-        </p:txBody>
-      </p:sp>
-      <p:sp>
-        <p:nvSpPr>
-          <p:cNvPr id="3" name="Text 1"/>
-          <p:cNvSpPr/>
-          <p:nvPr/>
-        </p:nvSpPr>
-        <p:spPr>
-          <a:xfrm>
-            <a:off x="0" y="457200"/>
-            <a:ext cx="12191695" cy="457200"/>
-          </a:xfrm>
-          <a:prstGeom prst="rect">
-            <a:avLst/>
-          </a:prstGeom>
-          <a:noFill/>
-          <a:ln/>
-        </p:spPr>
-        <p:txBody>
-          <a:bodyPr wrap="square" rtlCol="0" anchor="ctr"/>
-          <a:lstStyle/>
-          <a:p>
-            <a:pPr algn="ctr" indent="0" marL="0">
-              <a:buNone/>
-            </a:pPr>
-            <a:r>
-              <a:rPr lang="en-US" sz="2800" b="1" dirty="0">
-                <a:solidFill>
-                  <a:srgbClr val="0B1F44"/>
-                </a:solidFill>
-                <a:latin typeface="Malgun Gothic" pitchFamily="34" charset="0"/>
-                <a:ea typeface="Malgun Gothic" pitchFamily="34" charset="-122"/>
-                <a:cs typeface="Malgun Gothic" pitchFamily="34" charset="-120"/>
-              </a:rPr>
-              <a:t>플리마켓 셀러 품목</a:t>
-            </a:r>
-            <a:endParaRPr lang="en-US" sz="2800" dirty="0"/>
-          </a:p>
-        </p:txBody>
-      </p:sp>
-      <p:sp>
-        <p:nvSpPr>
-          <p:cNvPr id="4" name="Shape 2"/>
-          <p:cNvSpPr/>
-          <p:nvPr/>
-        </p:nvSpPr>
-        <p:spPr>
-          <a:xfrm>
-            <a:off x="3809848" y="932688"/>
-            <a:ext cx="4572000" cy="310896"/>
-          </a:xfrm>
-          <a:prstGeom prst="roundRect">
-            <a:avLst>
-              <a:gd name="adj" fmla="val 50000"/>
-            </a:avLst>
+            <a:off x="0" y="0"/>
+            <a:ext cx="12191695" cy="68580"/>
+          </a:xfrm>
+          <a:prstGeom prst="rect">
+            <a:avLst/>
           </a:prstGeom>
           <a:solidFill>
-            <a:srgbClr val="EAF2FF"/>
+            <a:srgbClr val="0B1F44"/>
           </a:solidFill>
           <a:ln w="12700">
             <a:solidFill>
-              <a:srgbClr val="EAF2FF"/>
+              <a:srgbClr val="0B1F44"/>
             </a:solidFill>
             <a:prstDash val="solid"/>
           </a:ln>
@@ -1249,14 +1169,156 @@
       </p:sp>
       <p:sp>
         <p:nvSpPr>
+          <p:cNvPr id="3" name="Shape 1"/>
+          <p:cNvSpPr/>
+          <p:nvPr/>
+        </p:nvSpPr>
+        <p:spPr>
+          <a:xfrm>
+            <a:off x="566928" y="457200"/>
+            <a:ext cx="50292" cy="420624"/>
+          </a:xfrm>
+          <a:prstGeom prst="rect">
+            <a:avLst/>
+          </a:prstGeom>
+          <a:solidFill>
+            <a:srgbClr val="3182F6"/>
+          </a:solidFill>
+          <a:ln w="12700">
+            <a:solidFill>
+              <a:srgbClr val="3182F6"/>
+            </a:solidFill>
+            <a:prstDash val="solid"/>
+          </a:ln>
+        </p:spPr>
+      </p:sp>
+      <p:sp>
+        <p:nvSpPr>
+          <p:cNvPr id="4" name="Text 2"/>
+          <p:cNvSpPr txBox="1"/>
+          <p:nvPr/>
+        </p:nvSpPr>
+        <p:spPr>
+          <a:xfrm>
+            <a:off x="749808" y="384048"/>
+            <a:ext cx="3657600" cy="201168"/>
+          </a:xfrm>
+          <a:prstGeom prst="rect">
+            <a:avLst/>
+          </a:prstGeom>
+          <a:noFill/>
+          <a:ln/>
+        </p:spPr>
+        <p:txBody>
+          <a:bodyPr wrap="square" rtlCol="0" anchor="ctr"/>
+          <a:lstStyle/>
+          <a:p>
+            <a:pPr algn="l" indent="0" marL="0">
+              <a:buNone/>
+            </a:pPr>
+            <a:r>
+              <a:rPr lang="en-US" sz="850" b="1" spc="240" kern="0" dirty="0">
+                <a:solidFill>
+                  <a:srgbClr val="3182F6"/>
+                </a:solidFill>
+                <a:latin typeface="Arial" pitchFamily="34" charset="0"/>
+                <a:ea typeface="Arial" pitchFamily="34" charset="-122"/>
+                <a:cs typeface="Arial" pitchFamily="34" charset="-120"/>
+              </a:rPr>
+              <a:t>FLIT UNION</a:t>
+            </a:r>
+            <a:endParaRPr lang="en-US" sz="850" dirty="0"/>
+          </a:p>
+        </p:txBody>
+      </p:sp>
+      <p:sp>
+        <p:nvSpPr>
           <p:cNvPr id="5" name="Text 3"/>
           <p:cNvSpPr txBox="1"/>
           <p:nvPr/>
         </p:nvSpPr>
         <p:spPr>
           <a:xfrm>
-            <a:off x="3809848" y="932688"/>
-            <a:ext cx="4572000" cy="310896"/>
+            <a:off x="749808" y="548640"/>
+            <a:ext cx="6583680" cy="365760"/>
+          </a:xfrm>
+          <a:prstGeom prst="rect">
+            <a:avLst/>
+          </a:prstGeom>
+          <a:noFill/>
+          <a:ln/>
+        </p:spPr>
+        <p:txBody>
+          <a:bodyPr wrap="square" rtlCol="0" anchor="t"/>
+          <a:lstStyle/>
+          <a:p>
+            <a:pPr algn="l" indent="0" marL="0">
+              <a:buNone/>
+            </a:pPr>
+            <a:r>
+              <a:rPr lang="en-US" sz="2200" b="1" dirty="0">
+                <a:solidFill>
+                  <a:srgbClr val="0B1F44"/>
+                </a:solidFill>
+                <a:latin typeface="Malgun Gothic" pitchFamily="34" charset="0"/>
+                <a:ea typeface="Malgun Gothic" pitchFamily="34" charset="-122"/>
+                <a:cs typeface="Malgun Gothic" pitchFamily="34" charset="-120"/>
+              </a:rPr>
+              <a:t>플리마켓 셀러 품목</a:t>
+            </a:r>
+            <a:endParaRPr lang="en-US" sz="2200" dirty="0"/>
+          </a:p>
+        </p:txBody>
+      </p:sp>
+      <p:sp>
+        <p:nvSpPr>
+          <p:cNvPr id="6" name="Text 4"/>
+          <p:cNvSpPr txBox="1"/>
+          <p:nvPr/>
+        </p:nvSpPr>
+        <p:spPr>
+          <a:xfrm>
+            <a:off x="6869887" y="603504"/>
+            <a:ext cx="4754880" cy="274320"/>
+          </a:xfrm>
+          <a:prstGeom prst="rect">
+            <a:avLst/>
+          </a:prstGeom>
+          <a:noFill/>
+          <a:ln/>
+        </p:spPr>
+        <p:txBody>
+          <a:bodyPr wrap="square" rtlCol="0" anchor="t"/>
+          <a:lstStyle/>
+          <a:p>
+            <a:pPr algn="r" indent="0" marL="0">
+              <a:buNone/>
+            </a:pPr>
+            <a:r>
+              <a:rPr lang="en-US" sz="950" dirty="0">
+                <a:solidFill>
+                  <a:srgbClr val="5A6B85"/>
+                </a:solidFill>
+                <a:latin typeface="Malgun Gothic" pitchFamily="34" charset="0"/>
+                <a:ea typeface="Malgun Gothic" pitchFamily="34" charset="-122"/>
+                <a:cs typeface="Malgun Gothic" pitchFamily="34" charset="-120"/>
+              </a:rPr>
+              <a:t>보유 셀러가 많은 순 30종</a:t>
+            </a:r>
+            <a:endParaRPr lang="en-US" sz="950" dirty="0"/>
+          </a:p>
+        </p:txBody>
+      </p:sp>
+      <p:sp>
+        <p:nvSpPr>
+          <p:cNvPr id="7" name="Text 5"/>
+          <p:cNvSpPr txBox="1"/>
+          <p:nvPr/>
+        </p:nvSpPr>
+        <p:spPr>
+          <a:xfrm>
+            <a:off x="6869887" y="384048"/>
+            <a:ext cx="4754880" cy="219456"/>
           </a:xfrm>
           <a:prstGeom prst="rect">
             <a:avLst/>
@@ -1268,7 +1330,7 @@
           <a:bodyPr wrap="square" rtlCol="0" anchor="ctr"/>
           <a:lstStyle/>
           <a:p>
-            <a:pPr algn="ctr" indent="0" marL="0">
+            <a:pPr algn="r" indent="0" marL="0">
               <a:buNone/>
             </a:pPr>
             <a:r>
@@ -1276,19 +1338,85 @@
                 <a:solidFill>
                   <a:srgbClr val="0B1F44"/>
                 </a:solidFill>
-                <a:latin typeface="Malgun Gothic" pitchFamily="34" charset="0"/>
-                <a:ea typeface="Malgun Gothic" pitchFamily="34" charset="-122"/>
-                <a:cs typeface="Malgun Gothic" pitchFamily="34" charset="-120"/>
-              </a:rPr>
-              <a:t>· 보유 셀러가 많은 순 · 1 ~ 9 ·</a:t>
+                <a:latin typeface="Arial" pitchFamily="34" charset="0"/>
+                <a:ea typeface="Arial" pitchFamily="34" charset="-122"/>
+                <a:cs typeface="Arial" pitchFamily="34" charset="-120"/>
+              </a:rPr>
+              <a:t>01</a:t>
+            </a:r>
+            <a:pPr algn="r" indent="0" marL="0">
+              <a:buNone/>
+            </a:pPr>
+            <a:r>
+              <a:rPr lang="en-US" sz="900" dirty="0">
+                <a:solidFill>
+                  <a:srgbClr val="A3B0C4"/>
+                </a:solidFill>
+                <a:latin typeface="Arial" pitchFamily="34" charset="0"/>
+                <a:ea typeface="Arial" pitchFamily="34" charset="-122"/>
+                <a:cs typeface="Arial" pitchFamily="34" charset="-120"/>
+              </a:rPr>
+              <a:t> / 04</a:t>
             </a:r>
             <a:endParaRPr lang="en-US" sz="1100" dirty="0"/>
           </a:p>
         </p:txBody>
+      </p:sp>
+      <p:sp>
+        <p:nvSpPr>
+          <p:cNvPr id="8" name="Shape 6"/>
+          <p:cNvSpPr/>
+          <p:nvPr/>
+        </p:nvSpPr>
+        <p:spPr>
+          <a:xfrm>
+            <a:off x="566928" y="1152144"/>
+            <a:ext cx="11057839" cy="10973"/>
+          </a:xfrm>
+          <a:prstGeom prst="rect">
+            <a:avLst/>
+          </a:prstGeom>
+          <a:solidFill>
+            <a:srgbClr val="E4EBF5"/>
+          </a:solidFill>
+          <a:ln w="12700">
+            <a:solidFill>
+              <a:srgbClr val="E4EBF5"/>
+            </a:solidFill>
+            <a:prstDash val="solid"/>
+          </a:ln>
+        </p:spPr>
+      </p:sp>
+      <p:sp>
+        <p:nvSpPr>
+          <p:cNvPr id="9" name="Shape 7"/>
+          <p:cNvSpPr/>
+          <p:nvPr/>
+        </p:nvSpPr>
+        <p:spPr>
+          <a:xfrm>
+            <a:off x="566928" y="1426464"/>
+            <a:ext cx="3527450" cy="1530096"/>
+          </a:xfrm>
+          <a:prstGeom prst="roundRect">
+            <a:avLst>
+              <a:gd name="adj" fmla="val 2988"/>
+            </a:avLst>
+          </a:prstGeom>
+          <a:solidFill>
+            <a:srgbClr val="FBFCFE"/>
+          </a:solidFill>
+          <a:ln w="9525">
+            <a:solidFill>
+              <a:srgbClr val="E4EBF5"/>
+            </a:solidFill>
+            <a:prstDash val="solid"/>
+          </a:ln>
+        </p:spPr>
       </p:sp>
       <p:pic>
         <p:nvPicPr>
-          <p:cNvPr id="6" name="Image 0" descr="/home/user/Flitunion/docs/photos/seller-items/dessert.jpg">    </p:cNvPr>
+          <p:cNvPr id="10" name="Image 0" descr="/home/user/Flitunion/docs/photos/seller-items/dessert.jpg">    </p:cNvPr>
           <p:cNvPicPr>
             <a:picLocks noChangeAspect="1"/>
           </p:cNvPicPr>
@@ -1302,8 +1430,8 @@
         </p:blipFill>
         <p:spPr>
           <a:xfrm>
-            <a:off x="457200" y="1443228"/>
-            <a:ext cx="1417320" cy="1417320"/>
+            <a:off x="685800" y="1545336"/>
+            <a:ext cx="1292352" cy="1292352"/>
           </a:xfrm>
           <a:prstGeom prst="rect">
             <a:avLst/>
@@ -1312,14 +1440,53 @@
       </p:pic>
       <p:sp>
         <p:nvSpPr>
-          <p:cNvPr id="7" name="Text 4"/>
-          <p:cNvSpPr txBox="1"/>
-          <p:nvPr/>
-        </p:nvSpPr>
-        <p:spPr>
-          <a:xfrm>
-            <a:off x="2020824" y="1443228"/>
-            <a:ext cx="2012594" cy="292608"/>
+          <p:cNvPr id="11" name="Text 8"/>
+          <p:cNvSpPr txBox="1"/>
+          <p:nvPr/>
+        </p:nvSpPr>
+        <p:spPr>
+          <a:xfrm>
+            <a:off x="2142744" y="1563624"/>
+            <a:ext cx="1805330" cy="164592"/>
+          </a:xfrm>
+          <a:prstGeom prst="rect">
+            <a:avLst/>
+          </a:prstGeom>
+          <a:noFill/>
+          <a:ln/>
+        </p:spPr>
+        <p:txBody>
+          <a:bodyPr wrap="square" rtlCol="0" anchor="ctr"/>
+          <a:lstStyle/>
+          <a:p>
+            <a:pPr algn="l" indent="0" marL="0">
+              <a:buNone/>
+            </a:pPr>
+            <a:r>
+              <a:rPr lang="en-US" sz="750" b="1" spc="100" kern="0" dirty="0">
+                <a:solidFill>
+                  <a:srgbClr val="3182F6"/>
+                </a:solidFill>
+                <a:latin typeface="Arial" pitchFamily="34" charset="0"/>
+                <a:ea typeface="Arial" pitchFamily="34" charset="-122"/>
+                <a:cs typeface="Arial" pitchFamily="34" charset="-120"/>
+              </a:rPr>
+              <a:t>01</a:t>
+            </a:r>
+            <a:endParaRPr lang="en-US" sz="750" dirty="0"/>
+          </a:p>
+        </p:txBody>
+      </p:sp>
+      <p:sp>
+        <p:nvSpPr>
+          <p:cNvPr id="12" name="Text 9"/>
+          <p:cNvSpPr txBox="1"/>
+          <p:nvPr/>
+        </p:nvSpPr>
+        <p:spPr>
+          <a:xfrm>
+            <a:off x="2142744" y="1728216"/>
+            <a:ext cx="1805330" cy="274320"/>
           </a:xfrm>
           <a:prstGeom prst="rect">
             <a:avLst/>
@@ -1335,9 +1502,9 @@
               <a:buNone/>
             </a:pPr>
             <a:r>
-              <a:rPr lang="en-US" sz="1300" b="1" dirty="0">
-                <a:solidFill>
-                  <a:srgbClr val="0F172A"/>
+              <a:rPr lang="en-US" sz="1250" b="1" dirty="0">
+                <a:solidFill>
+                  <a:srgbClr val="101828"/>
                 </a:solidFill>
                 <a:latin typeface="Malgun Gothic" pitchFamily="34" charset="0"/>
                 <a:ea typeface="Malgun Gothic" pitchFamily="34" charset="-122"/>
@@ -1345,20 +1512,34 @@
               </a:rPr>
               <a:t>디저트 · 먹거리</a:t>
             </a:r>
-            <a:endParaRPr lang="en-US" sz="1300" dirty="0"/>
-          </a:p>
-        </p:txBody>
-      </p:sp>
-      <p:sp>
-        <p:nvSpPr>
-          <p:cNvPr id="8" name="Text 5"/>
-          <p:cNvSpPr txBox="1"/>
-          <p:nvPr/>
-        </p:nvSpPr>
-        <p:spPr>
-          <a:xfrm>
-            <a:off x="2020824" y="1735836"/>
-            <a:ext cx="2012594" cy="1124712"/>
+            <a:pPr algn="l" indent="0" marL="0">
+              <a:buNone/>
+            </a:pPr>
+            <a:r>
+              <a:rPr lang="en-US" sz="800" b="1" dirty="0">
+                <a:solidFill>
+                  <a:srgbClr val="3182F6"/>
+                </a:solidFill>
+                <a:latin typeface="Malgun Gothic" pitchFamily="34" charset="0"/>
+                <a:ea typeface="Malgun Gothic" pitchFamily="34" charset="-122"/>
+                <a:cs typeface="Malgun Gothic" pitchFamily="34" charset="-120"/>
+              </a:rPr>
+              <a:t>   23곳</a:t>
+            </a:r>
+            <a:endParaRPr lang="en-US" sz="1250" dirty="0"/>
+          </a:p>
+        </p:txBody>
+      </p:sp>
+      <p:sp>
+        <p:nvSpPr>
+          <p:cNvPr id="13" name="Text 10"/>
+          <p:cNvSpPr txBox="1"/>
+          <p:nvPr/>
+        </p:nvSpPr>
+        <p:spPr>
+          <a:xfrm>
+            <a:off x="2142744" y="2020824"/>
+            <a:ext cx="1805330" cy="816864"/>
           </a:xfrm>
           <a:prstGeom prst="rect">
             <a:avLst/>
@@ -1372,28 +1553,55 @@
           <a:p>
             <a:pPr algn="l" indent="0" marL="0">
               <a:lnSpc>
-                <a:spcPct val="120000"/>
+                <a:spcPct val="122000"/>
               </a:lnSpc>
               <a:buNone/>
             </a:pPr>
             <a:r>
               <a:rPr lang="en-US" sz="800" dirty="0">
                 <a:solidFill>
-                  <a:srgbClr val="475569"/>
-                </a:solidFill>
-                <a:latin typeface="Malgun Gothic" pitchFamily="34" charset="0"/>
-                <a:ea typeface="Malgun Gothic" pitchFamily="34" charset="-122"/>
-                <a:cs typeface="Malgun Gothic" pitchFamily="34" charset="-120"/>
-              </a:rPr>
-              <a:t>23곳 — 마카롱, 쿠키, 케이크, 잼, 밀크티, 솜사탕, 아이스크림. 대부분 완제품이라 전기가 필요 없음</a:t>
+                  <a:srgbClr val="5A6B85"/>
+                </a:solidFill>
+                <a:latin typeface="Malgun Gothic" pitchFamily="34" charset="0"/>
+                <a:ea typeface="Malgun Gothic" pitchFamily="34" charset="-122"/>
+                <a:cs typeface="Malgun Gothic" pitchFamily="34" charset="-120"/>
+              </a:rPr>
+              <a:t>마카롱, 쿠키, 케이크, 잼, 밀크티, 솜사탕, 아이스크림. 대부분 완제품이라 전기가 필요 없음</a:t>
             </a:r>
             <a:endParaRPr lang="en-US" sz="800" dirty="0"/>
           </a:p>
         </p:txBody>
+      </p:sp>
+      <p:sp>
+        <p:nvSpPr>
+          <p:cNvPr id="14" name="Shape 11"/>
+          <p:cNvSpPr/>
+          <p:nvPr/>
+        </p:nvSpPr>
+        <p:spPr>
+          <a:xfrm>
+            <a:off x="4332122" y="1426464"/>
+            <a:ext cx="3527450" cy="1530096"/>
+          </a:xfrm>
+          <a:prstGeom prst="roundRect">
+            <a:avLst>
+              <a:gd name="adj" fmla="val 2988"/>
+            </a:avLst>
+          </a:prstGeom>
+          <a:solidFill>
+            <a:srgbClr val="FBFCFE"/>
+          </a:solidFill>
+          <a:ln w="9525">
+            <a:solidFill>
+              <a:srgbClr val="E4EBF5"/>
+            </a:solidFill>
+            <a:prstDash val="solid"/>
+          </a:ln>
+        </p:spPr>
       </p:sp>
       <p:pic>
         <p:nvPicPr>
-          <p:cNvPr id="9" name="Image 1" descr="/home/user/Flitunion/docs/photos/seller-items/goods.jpg">    </p:cNvPr>
+          <p:cNvPr id="15" name="Image 1" descr="/home/user/Flitunion/docs/photos/seller-items/goods.jpg">    </p:cNvPr>
           <p:cNvPicPr>
             <a:picLocks noChangeAspect="1"/>
           </p:cNvPicPr>
@@ -1407,8 +1615,8 @@
         </p:blipFill>
         <p:spPr>
           <a:xfrm>
-            <a:off x="4307738" y="1443228"/>
-            <a:ext cx="1417320" cy="1417320"/>
+            <a:off x="4450994" y="1545336"/>
+            <a:ext cx="1292352" cy="1292352"/>
           </a:xfrm>
           <a:prstGeom prst="rect">
             <a:avLst/>
@@ -1417,14 +1625,53 @@
       </p:pic>
       <p:sp>
         <p:nvSpPr>
-          <p:cNvPr id="10" name="Text 6"/>
-          <p:cNvSpPr txBox="1"/>
-          <p:nvPr/>
-        </p:nvSpPr>
-        <p:spPr>
-          <a:xfrm>
-            <a:off x="5871362" y="1443228"/>
-            <a:ext cx="2012594" cy="292608"/>
+          <p:cNvPr id="16" name="Text 12"/>
+          <p:cNvSpPr txBox="1"/>
+          <p:nvPr/>
+        </p:nvSpPr>
+        <p:spPr>
+          <a:xfrm>
+            <a:off x="5907938" y="1563624"/>
+            <a:ext cx="1805330" cy="164592"/>
+          </a:xfrm>
+          <a:prstGeom prst="rect">
+            <a:avLst/>
+          </a:prstGeom>
+          <a:noFill/>
+          <a:ln/>
+        </p:spPr>
+        <p:txBody>
+          <a:bodyPr wrap="square" rtlCol="0" anchor="ctr"/>
+          <a:lstStyle/>
+          <a:p>
+            <a:pPr algn="l" indent="0" marL="0">
+              <a:buNone/>
+            </a:pPr>
+            <a:r>
+              <a:rPr lang="en-US" sz="750" b="1" spc="100" kern="0" dirty="0">
+                <a:solidFill>
+                  <a:srgbClr val="3182F6"/>
+                </a:solidFill>
+                <a:latin typeface="Arial" pitchFamily="34" charset="0"/>
+                <a:ea typeface="Arial" pitchFamily="34" charset="-122"/>
+                <a:cs typeface="Arial" pitchFamily="34" charset="-120"/>
+              </a:rPr>
+              <a:t>02</a:t>
+            </a:r>
+            <a:endParaRPr lang="en-US" sz="750" dirty="0"/>
+          </a:p>
+        </p:txBody>
+      </p:sp>
+      <p:sp>
+        <p:nvSpPr>
+          <p:cNvPr id="17" name="Text 13"/>
+          <p:cNvSpPr txBox="1"/>
+          <p:nvPr/>
+        </p:nvSpPr>
+        <p:spPr>
+          <a:xfrm>
+            <a:off x="5907938" y="1728216"/>
+            <a:ext cx="1805330" cy="274320"/>
           </a:xfrm>
           <a:prstGeom prst="rect">
             <a:avLst/>
@@ -1440,9 +1687,9 @@
               <a:buNone/>
             </a:pPr>
             <a:r>
-              <a:rPr lang="en-US" sz="1300" b="1" dirty="0">
-                <a:solidFill>
-                  <a:srgbClr val="0F172A"/>
+              <a:rPr lang="en-US" sz="1250" b="1" dirty="0">
+                <a:solidFill>
+                  <a:srgbClr val="101828"/>
                 </a:solidFill>
                 <a:latin typeface="Malgun Gothic" pitchFamily="34" charset="0"/>
                 <a:ea typeface="Malgun Gothic" pitchFamily="34" charset="-122"/>
@@ -1450,20 +1697,34 @@
               </a:rPr>
               <a:t>잡화 · 소품</a:t>
             </a:r>
-            <a:endParaRPr lang="en-US" sz="1300" dirty="0"/>
-          </a:p>
-        </p:txBody>
-      </p:sp>
-      <p:sp>
-        <p:nvSpPr>
-          <p:cNvPr id="11" name="Text 7"/>
-          <p:cNvSpPr txBox="1"/>
-          <p:nvPr/>
-        </p:nvSpPr>
-        <p:spPr>
-          <a:xfrm>
-            <a:off x="5871362" y="1735836"/>
-            <a:ext cx="2012594" cy="1124712"/>
+            <a:pPr algn="l" indent="0" marL="0">
+              <a:buNone/>
+            </a:pPr>
+            <a:r>
+              <a:rPr lang="en-US" sz="800" b="1" dirty="0">
+                <a:solidFill>
+                  <a:srgbClr val="3182F6"/>
+                </a:solidFill>
+                <a:latin typeface="Malgun Gothic" pitchFamily="34" charset="0"/>
+                <a:ea typeface="Malgun Gothic" pitchFamily="34" charset="-122"/>
+                <a:cs typeface="Malgun Gothic" pitchFamily="34" charset="-120"/>
+              </a:rPr>
+              <a:t>   15곳</a:t>
+            </a:r>
+            <a:endParaRPr lang="en-US" sz="1250" dirty="0"/>
+          </a:p>
+        </p:txBody>
+      </p:sp>
+      <p:sp>
+        <p:nvSpPr>
+          <p:cNvPr id="18" name="Text 14"/>
+          <p:cNvSpPr txBox="1"/>
+          <p:nvPr/>
+        </p:nvSpPr>
+        <p:spPr>
+          <a:xfrm>
+            <a:off x="5907938" y="2020824"/>
+            <a:ext cx="1805330" cy="816864"/>
           </a:xfrm>
           <a:prstGeom prst="rect">
             <a:avLst/>
@@ -1477,28 +1738,55 @@
           <a:p>
             <a:pPr algn="l" indent="0" marL="0">
               <a:lnSpc>
-                <a:spcPct val="120000"/>
+                <a:spcPct val="122000"/>
               </a:lnSpc>
               <a:buNone/>
             </a:pPr>
             <a:r>
               <a:rPr lang="en-US" sz="800" dirty="0">
                 <a:solidFill>
-                  <a:srgbClr val="475569"/>
-                </a:solidFill>
-                <a:latin typeface="Malgun Gothic" pitchFamily="34" charset="0"/>
-                <a:ea typeface="Malgun Gothic" pitchFamily="34" charset="-122"/>
-                <a:cs typeface="Malgun Gothic" pitchFamily="34" charset="-120"/>
-              </a:rPr>
-              <a:t>15곳 — 파우치, 미니백, 데코 소품, 문구, 굿즈, 지비츠</a:t>
+                  <a:srgbClr val="5A6B85"/>
+                </a:solidFill>
+                <a:latin typeface="Malgun Gothic" pitchFamily="34" charset="0"/>
+                <a:ea typeface="Malgun Gothic" pitchFamily="34" charset="-122"/>
+                <a:cs typeface="Malgun Gothic" pitchFamily="34" charset="-120"/>
+              </a:rPr>
+              <a:t>파우치, 미니백, 데코 소품, 문구, 굿즈, 지비츠</a:t>
             </a:r>
             <a:endParaRPr lang="en-US" sz="800" dirty="0"/>
           </a:p>
         </p:txBody>
+      </p:sp>
+      <p:sp>
+        <p:nvSpPr>
+          <p:cNvPr id="19" name="Shape 15"/>
+          <p:cNvSpPr/>
+          <p:nvPr/>
+        </p:nvSpPr>
+        <p:spPr>
+          <a:xfrm>
+            <a:off x="8097317" y="1426464"/>
+            <a:ext cx="3527450" cy="1530096"/>
+          </a:xfrm>
+          <a:prstGeom prst="roundRect">
+            <a:avLst>
+              <a:gd name="adj" fmla="val 2988"/>
+            </a:avLst>
+          </a:prstGeom>
+          <a:solidFill>
+            <a:srgbClr val="FBFCFE"/>
+          </a:solidFill>
+          <a:ln w="9525">
+            <a:solidFill>
+              <a:srgbClr val="E4EBF5"/>
+            </a:solidFill>
+            <a:prstDash val="solid"/>
+          </a:ln>
+        </p:spPr>
       </p:sp>
       <p:pic>
         <p:nvPicPr>
-          <p:cNvPr id="12" name="Image 2" descr="/home/user/Flitunion/docs/photos/seller-items/handmade.jpg">    </p:cNvPr>
+          <p:cNvPr id="20" name="Image 2" descr="/home/user/Flitunion/docs/photos/seller-items/handmade.jpg">    </p:cNvPr>
           <p:cNvPicPr>
             <a:picLocks noChangeAspect="1"/>
           </p:cNvPicPr>
@@ -1512,8 +1800,8 @@
         </p:blipFill>
         <p:spPr>
           <a:xfrm>
-            <a:off x="8158277" y="1443228"/>
-            <a:ext cx="1417320" cy="1417320"/>
+            <a:off x="8216189" y="1545336"/>
+            <a:ext cx="1292352" cy="1292352"/>
           </a:xfrm>
           <a:prstGeom prst="rect">
             <a:avLst/>
@@ -1522,14 +1810,53 @@
       </p:pic>
       <p:sp>
         <p:nvSpPr>
-          <p:cNvPr id="13" name="Text 8"/>
-          <p:cNvSpPr txBox="1"/>
-          <p:nvPr/>
-        </p:nvSpPr>
-        <p:spPr>
-          <a:xfrm>
-            <a:off x="9721901" y="1443228"/>
-            <a:ext cx="2012594" cy="292608"/>
+          <p:cNvPr id="21" name="Text 16"/>
+          <p:cNvSpPr txBox="1"/>
+          <p:nvPr/>
+        </p:nvSpPr>
+        <p:spPr>
+          <a:xfrm>
+            <a:off x="9673133" y="1563624"/>
+            <a:ext cx="1805330" cy="164592"/>
+          </a:xfrm>
+          <a:prstGeom prst="rect">
+            <a:avLst/>
+          </a:prstGeom>
+          <a:noFill/>
+          <a:ln/>
+        </p:spPr>
+        <p:txBody>
+          <a:bodyPr wrap="square" rtlCol="0" anchor="ctr"/>
+          <a:lstStyle/>
+          <a:p>
+            <a:pPr algn="l" indent="0" marL="0">
+              <a:buNone/>
+            </a:pPr>
+            <a:r>
+              <a:rPr lang="en-US" sz="750" b="1" spc="100" kern="0" dirty="0">
+                <a:solidFill>
+                  <a:srgbClr val="3182F6"/>
+                </a:solidFill>
+                <a:latin typeface="Arial" pitchFamily="34" charset="0"/>
+                <a:ea typeface="Arial" pitchFamily="34" charset="-122"/>
+                <a:cs typeface="Arial" pitchFamily="34" charset="-120"/>
+              </a:rPr>
+              <a:t>03</a:t>
+            </a:r>
+            <a:endParaRPr lang="en-US" sz="750" dirty="0"/>
+          </a:p>
+        </p:txBody>
+      </p:sp>
+      <p:sp>
+        <p:nvSpPr>
+          <p:cNvPr id="22" name="Text 17"/>
+          <p:cNvSpPr txBox="1"/>
+          <p:nvPr/>
+        </p:nvSpPr>
+        <p:spPr>
+          <a:xfrm>
+            <a:off x="9673133" y="1728216"/>
+            <a:ext cx="1805330" cy="274320"/>
           </a:xfrm>
           <a:prstGeom prst="rect">
             <a:avLst/>
@@ -1545,9 +1872,9 @@
               <a:buNone/>
             </a:pPr>
             <a:r>
-              <a:rPr lang="en-US" sz="1300" b="1" dirty="0">
-                <a:solidFill>
-                  <a:srgbClr val="0F172A"/>
+              <a:rPr lang="en-US" sz="1250" b="1" dirty="0">
+                <a:solidFill>
+                  <a:srgbClr val="101828"/>
                 </a:solidFill>
                 <a:latin typeface="Malgun Gothic" pitchFamily="34" charset="0"/>
                 <a:ea typeface="Malgun Gothic" pitchFamily="34" charset="-122"/>
@@ -1555,20 +1882,34 @@
               </a:rPr>
               <a:t>핸드메이드 공방</a:t>
             </a:r>
-            <a:endParaRPr lang="en-US" sz="1300" dirty="0"/>
-          </a:p>
-        </p:txBody>
-      </p:sp>
-      <p:sp>
-        <p:nvSpPr>
-          <p:cNvPr id="14" name="Text 9"/>
-          <p:cNvSpPr txBox="1"/>
-          <p:nvPr/>
-        </p:nvSpPr>
-        <p:spPr>
-          <a:xfrm>
-            <a:off x="9721901" y="1735836"/>
-            <a:ext cx="2012594" cy="1124712"/>
+            <a:pPr algn="l" indent="0" marL="0">
+              <a:buNone/>
+            </a:pPr>
+            <a:r>
+              <a:rPr lang="en-US" sz="800" b="1" dirty="0">
+                <a:solidFill>
+                  <a:srgbClr val="3182F6"/>
+                </a:solidFill>
+                <a:latin typeface="Malgun Gothic" pitchFamily="34" charset="0"/>
+                <a:ea typeface="Malgun Gothic" pitchFamily="34" charset="-122"/>
+                <a:cs typeface="Malgun Gothic" pitchFamily="34" charset="-120"/>
+              </a:rPr>
+              <a:t>   14곳</a:t>
+            </a:r>
+            <a:endParaRPr lang="en-US" sz="1250" dirty="0"/>
+          </a:p>
+        </p:txBody>
+      </p:sp>
+      <p:sp>
+        <p:nvSpPr>
+          <p:cNvPr id="23" name="Text 18"/>
+          <p:cNvSpPr txBox="1"/>
+          <p:nvPr/>
+        </p:nvSpPr>
+        <p:spPr>
+          <a:xfrm>
+            <a:off x="9673133" y="2020824"/>
+            <a:ext cx="1805330" cy="816864"/>
           </a:xfrm>
           <a:prstGeom prst="rect">
             <a:avLst/>
@@ -1582,28 +1923,55 @@
           <a:p>
             <a:pPr algn="l" indent="0" marL="0">
               <a:lnSpc>
-                <a:spcPct val="120000"/>
+                <a:spcPct val="122000"/>
               </a:lnSpc>
               <a:buNone/>
             </a:pPr>
             <a:r>
               <a:rPr lang="en-US" sz="800" dirty="0">
                 <a:solidFill>
-                  <a:srgbClr val="475569"/>
-                </a:solidFill>
-                <a:latin typeface="Malgun Gothic" pitchFamily="34" charset="0"/>
-                <a:ea typeface="Malgun Gothic" pitchFamily="34" charset="-122"/>
-                <a:cs typeface="Malgun Gothic" pitchFamily="34" charset="-120"/>
-              </a:rPr>
-              <a:t>14곳 — 품목을 특정하지 않고 공방 단위로 참가하는 셀러. 행사 성격에 맞춰 품목 조율 가능</a:t>
+                  <a:srgbClr val="5A6B85"/>
+                </a:solidFill>
+                <a:latin typeface="Malgun Gothic" pitchFamily="34" charset="0"/>
+                <a:ea typeface="Malgun Gothic" pitchFamily="34" charset="-122"/>
+                <a:cs typeface="Malgun Gothic" pitchFamily="34" charset="-120"/>
+              </a:rPr>
+              <a:t>품목을 특정하지 않고 공방 단위로 참가하는 셀러. 행사 성격에 맞춰 품목 조율 가능</a:t>
             </a:r>
             <a:endParaRPr lang="en-US" sz="800" dirty="0"/>
           </a:p>
         </p:txBody>
+      </p:sp>
+      <p:sp>
+        <p:nvSpPr>
+          <p:cNvPr id="24" name="Shape 19"/>
+          <p:cNvSpPr/>
+          <p:nvPr/>
+        </p:nvSpPr>
+        <p:spPr>
+          <a:xfrm>
+            <a:off x="566928" y="3139440"/>
+            <a:ext cx="3527450" cy="1530096"/>
+          </a:xfrm>
+          <a:prstGeom prst="roundRect">
+            <a:avLst>
+              <a:gd name="adj" fmla="val 2988"/>
+            </a:avLst>
+          </a:prstGeom>
+          <a:solidFill>
+            <a:srgbClr val="FBFCFE"/>
+          </a:solidFill>
+          <a:ln w="9525">
+            <a:solidFill>
+              <a:srgbClr val="E4EBF5"/>
+            </a:solidFill>
+            <a:prstDash val="solid"/>
+          </a:ln>
+        </p:spPr>
       </p:sp>
       <p:pic>
         <p:nvPicPr>
-          <p:cNvPr id="15" name="Image 3" descr="/home/user/Flitunion/docs/photos/seller-items/flower.jpg">    </p:cNvPr>
+          <p:cNvPr id="25" name="Image 3" descr="/home/user/Flitunion/docs/photos/seller-items/flower.jpg">    </p:cNvPr>
           <p:cNvPicPr>
             <a:picLocks noChangeAspect="1"/>
           </p:cNvPicPr>
@@ -1617,8 +1985,8 @@
         </p:blipFill>
         <p:spPr>
           <a:xfrm>
-            <a:off x="457200" y="3204972"/>
-            <a:ext cx="1417320" cy="1417320"/>
+            <a:off x="685800" y="3258312"/>
+            <a:ext cx="1292352" cy="1292352"/>
           </a:xfrm>
           <a:prstGeom prst="rect">
             <a:avLst/>
@@ -1627,14 +1995,53 @@
       </p:pic>
       <p:sp>
         <p:nvSpPr>
-          <p:cNvPr id="16" name="Text 10"/>
-          <p:cNvSpPr txBox="1"/>
-          <p:nvPr/>
-        </p:nvSpPr>
-        <p:spPr>
-          <a:xfrm>
-            <a:off x="2020824" y="3204972"/>
-            <a:ext cx="2012594" cy="292608"/>
+          <p:cNvPr id="26" name="Text 20"/>
+          <p:cNvSpPr txBox="1"/>
+          <p:nvPr/>
+        </p:nvSpPr>
+        <p:spPr>
+          <a:xfrm>
+            <a:off x="2142744" y="3276600"/>
+            <a:ext cx="1805330" cy="164592"/>
+          </a:xfrm>
+          <a:prstGeom prst="rect">
+            <a:avLst/>
+          </a:prstGeom>
+          <a:noFill/>
+          <a:ln/>
+        </p:spPr>
+        <p:txBody>
+          <a:bodyPr wrap="square" rtlCol="0" anchor="ctr"/>
+          <a:lstStyle/>
+          <a:p>
+            <a:pPr algn="l" indent="0" marL="0">
+              <a:buNone/>
+            </a:pPr>
+            <a:r>
+              <a:rPr lang="en-US" sz="750" b="1" spc="100" kern="0" dirty="0">
+                <a:solidFill>
+                  <a:srgbClr val="3182F6"/>
+                </a:solidFill>
+                <a:latin typeface="Arial" pitchFamily="34" charset="0"/>
+                <a:ea typeface="Arial" pitchFamily="34" charset="-122"/>
+                <a:cs typeface="Arial" pitchFamily="34" charset="-120"/>
+              </a:rPr>
+              <a:t>04</a:t>
+            </a:r>
+            <a:endParaRPr lang="en-US" sz="750" dirty="0"/>
+          </a:p>
+        </p:txBody>
+      </p:sp>
+      <p:sp>
+        <p:nvSpPr>
+          <p:cNvPr id="27" name="Text 21"/>
+          <p:cNvSpPr txBox="1"/>
+          <p:nvPr/>
+        </p:nvSpPr>
+        <p:spPr>
+          <a:xfrm>
+            <a:off x="2142744" y="3441192"/>
+            <a:ext cx="1805330" cy="274320"/>
           </a:xfrm>
           <a:prstGeom prst="rect">
             <a:avLst/>
@@ -1650,9 +2057,9 @@
               <a:buNone/>
             </a:pPr>
             <a:r>
-              <a:rPr lang="en-US" sz="1300" b="1" dirty="0">
-                <a:solidFill>
-                  <a:srgbClr val="0F172A"/>
+              <a:rPr lang="en-US" sz="1250" b="1" dirty="0">
+                <a:solidFill>
+                  <a:srgbClr val="101828"/>
                 </a:solidFill>
                 <a:latin typeface="Malgun Gothic" pitchFamily="34" charset="0"/>
                 <a:ea typeface="Malgun Gothic" pitchFamily="34" charset="-122"/>
@@ -1660,20 +2067,34 @@
               </a:rPr>
               <a:t>플라워 · 식물</a:t>
             </a:r>
-            <a:endParaRPr lang="en-US" sz="1300" dirty="0"/>
-          </a:p>
-        </p:txBody>
-      </p:sp>
-      <p:sp>
-        <p:nvSpPr>
-          <p:cNvPr id="17" name="Text 11"/>
-          <p:cNvSpPr txBox="1"/>
-          <p:nvPr/>
-        </p:nvSpPr>
-        <p:spPr>
-          <a:xfrm>
-            <a:off x="2020824" y="3497580"/>
-            <a:ext cx="2012594" cy="1124712"/>
+            <a:pPr algn="l" indent="0" marL="0">
+              <a:buNone/>
+            </a:pPr>
+            <a:r>
+              <a:rPr lang="en-US" sz="800" b="1" dirty="0">
+                <a:solidFill>
+                  <a:srgbClr val="3182F6"/>
+                </a:solidFill>
+                <a:latin typeface="Malgun Gothic" pitchFamily="34" charset="0"/>
+                <a:ea typeface="Malgun Gothic" pitchFamily="34" charset="-122"/>
+                <a:cs typeface="Malgun Gothic" pitchFamily="34" charset="-120"/>
+              </a:rPr>
+              <a:t>   12곳</a:t>
+            </a:r>
+            <a:endParaRPr lang="en-US" sz="1250" dirty="0"/>
+          </a:p>
+        </p:txBody>
+      </p:sp>
+      <p:sp>
+        <p:nvSpPr>
+          <p:cNvPr id="28" name="Text 22"/>
+          <p:cNvSpPr txBox="1"/>
+          <p:nvPr/>
+        </p:nvSpPr>
+        <p:spPr>
+          <a:xfrm>
+            <a:off x="2142744" y="3733800"/>
+            <a:ext cx="1805330" cy="816864"/>
           </a:xfrm>
           <a:prstGeom prst="rect">
             <a:avLst/>
@@ -1687,28 +2108,55 @@
           <a:p>
             <a:pPr algn="l" indent="0" marL="0">
               <a:lnSpc>
-                <a:spcPct val="120000"/>
+                <a:spcPct val="122000"/>
               </a:lnSpc>
               <a:buNone/>
             </a:pPr>
             <a:r>
               <a:rPr lang="en-US" sz="800" dirty="0">
                 <a:solidFill>
-                  <a:srgbClr val="475569"/>
-                </a:solidFill>
-                <a:latin typeface="Malgun Gothic" pitchFamily="34" charset="0"/>
-                <a:ea typeface="Malgun Gothic" pitchFamily="34" charset="-122"/>
-                <a:cs typeface="Malgun Gothic" pitchFamily="34" charset="-120"/>
-              </a:rPr>
-              <a:t>12곳 — 생화, 프리저브드, 실크플라워, 다육식물, 가드닝 소품</a:t>
+                  <a:srgbClr val="5A6B85"/>
+                </a:solidFill>
+                <a:latin typeface="Malgun Gothic" pitchFamily="34" charset="0"/>
+                <a:ea typeface="Malgun Gothic" pitchFamily="34" charset="-122"/>
+                <a:cs typeface="Malgun Gothic" pitchFamily="34" charset="-120"/>
+              </a:rPr>
+              <a:t>생화, 프리저브드, 실크플라워, 다육식물, 가드닝 소품</a:t>
             </a:r>
             <a:endParaRPr lang="en-US" sz="800" dirty="0"/>
           </a:p>
         </p:txBody>
+      </p:sp>
+      <p:sp>
+        <p:nvSpPr>
+          <p:cNvPr id="29" name="Shape 23"/>
+          <p:cNvSpPr/>
+          <p:nvPr/>
+        </p:nvSpPr>
+        <p:spPr>
+          <a:xfrm>
+            <a:off x="4332122" y="3139440"/>
+            <a:ext cx="3527450" cy="1530096"/>
+          </a:xfrm>
+          <a:prstGeom prst="roundRect">
+            <a:avLst>
+              <a:gd name="adj" fmla="val 2988"/>
+            </a:avLst>
+          </a:prstGeom>
+          <a:solidFill>
+            <a:srgbClr val="FBFCFE"/>
+          </a:solidFill>
+          <a:ln w="9525">
+            <a:solidFill>
+              <a:srgbClr val="E4EBF5"/>
+            </a:solidFill>
+            <a:prstDash val="solid"/>
+          </a:ln>
+        </p:spPr>
       </p:sp>
       <p:pic>
         <p:nvPicPr>
-          <p:cNvPr id="18" name="Image 4" descr="/home/user/Flitunion/docs/photos/seller-items/tarot.jpg">    </p:cNvPr>
+          <p:cNvPr id="30" name="Image 4" descr="/home/user/Flitunion/docs/photos/seller-items/tarot.jpg">    </p:cNvPr>
           <p:cNvPicPr>
             <a:picLocks noChangeAspect="1"/>
           </p:cNvPicPr>
@@ -1722,8 +2170,8 @@
         </p:blipFill>
         <p:spPr>
           <a:xfrm>
-            <a:off x="4307738" y="3204972"/>
-            <a:ext cx="1417320" cy="1417320"/>
+            <a:off x="4450994" y="3258312"/>
+            <a:ext cx="1292352" cy="1292352"/>
           </a:xfrm>
           <a:prstGeom prst="rect">
             <a:avLst/>
@@ -1732,14 +2180,53 @@
       </p:pic>
       <p:sp>
         <p:nvSpPr>
-          <p:cNvPr id="19" name="Text 12"/>
-          <p:cNvSpPr txBox="1"/>
-          <p:nvPr/>
-        </p:nvSpPr>
-        <p:spPr>
-          <a:xfrm>
-            <a:off x="5871362" y="3204972"/>
-            <a:ext cx="2012594" cy="292608"/>
+          <p:cNvPr id="31" name="Text 24"/>
+          <p:cNvSpPr txBox="1"/>
+          <p:nvPr/>
+        </p:nvSpPr>
+        <p:spPr>
+          <a:xfrm>
+            <a:off x="5907938" y="3276600"/>
+            <a:ext cx="1805330" cy="164592"/>
+          </a:xfrm>
+          <a:prstGeom prst="rect">
+            <a:avLst/>
+          </a:prstGeom>
+          <a:noFill/>
+          <a:ln/>
+        </p:spPr>
+        <p:txBody>
+          <a:bodyPr wrap="square" rtlCol="0" anchor="ctr"/>
+          <a:lstStyle/>
+          <a:p>
+            <a:pPr algn="l" indent="0" marL="0">
+              <a:buNone/>
+            </a:pPr>
+            <a:r>
+              <a:rPr lang="en-US" sz="750" b="1" spc="100" kern="0" dirty="0">
+                <a:solidFill>
+                  <a:srgbClr val="3182F6"/>
+                </a:solidFill>
+                <a:latin typeface="Arial" pitchFamily="34" charset="0"/>
+                <a:ea typeface="Arial" pitchFamily="34" charset="-122"/>
+                <a:cs typeface="Arial" pitchFamily="34" charset="-120"/>
+              </a:rPr>
+              <a:t>05</a:t>
+            </a:r>
+            <a:endParaRPr lang="en-US" sz="750" dirty="0"/>
+          </a:p>
+        </p:txBody>
+      </p:sp>
+      <p:sp>
+        <p:nvSpPr>
+          <p:cNvPr id="32" name="Text 25"/>
+          <p:cNvSpPr txBox="1"/>
+          <p:nvPr/>
+        </p:nvSpPr>
+        <p:spPr>
+          <a:xfrm>
+            <a:off x="5907938" y="3441192"/>
+            <a:ext cx="1805330" cy="274320"/>
           </a:xfrm>
           <a:prstGeom prst="rect">
             <a:avLst/>
@@ -1755,9 +2242,9 @@
               <a:buNone/>
             </a:pPr>
             <a:r>
-              <a:rPr lang="en-US" sz="1300" b="1" dirty="0">
-                <a:solidFill>
-                  <a:srgbClr val="0F172A"/>
+              <a:rPr lang="en-US" sz="1250" b="1" dirty="0">
+                <a:solidFill>
+                  <a:srgbClr val="101828"/>
                 </a:solidFill>
                 <a:latin typeface="Malgun Gothic" pitchFamily="34" charset="0"/>
                 <a:ea typeface="Malgun Gothic" pitchFamily="34" charset="-122"/>
@@ -1765,20 +2252,34 @@
               </a:rPr>
               <a:t>타로 · 사주</a:t>
             </a:r>
-            <a:endParaRPr lang="en-US" sz="1300" dirty="0"/>
-          </a:p>
-        </p:txBody>
-      </p:sp>
-      <p:sp>
-        <p:nvSpPr>
-          <p:cNvPr id="20" name="Text 13"/>
-          <p:cNvSpPr txBox="1"/>
-          <p:nvPr/>
-        </p:nvSpPr>
-        <p:spPr>
-          <a:xfrm>
-            <a:off x="5871362" y="3497580"/>
-            <a:ext cx="2012594" cy="1124712"/>
+            <a:pPr algn="l" indent="0" marL="0">
+              <a:buNone/>
+            </a:pPr>
+            <a:r>
+              <a:rPr lang="en-US" sz="800" b="1" dirty="0">
+                <a:solidFill>
+                  <a:srgbClr val="3182F6"/>
+                </a:solidFill>
+                <a:latin typeface="Malgun Gothic" pitchFamily="34" charset="0"/>
+                <a:ea typeface="Malgun Gothic" pitchFamily="34" charset="-122"/>
+                <a:cs typeface="Malgun Gothic" pitchFamily="34" charset="-120"/>
+              </a:rPr>
+              <a:t>   11곳</a:t>
+            </a:r>
+            <a:endParaRPr lang="en-US" sz="1250" dirty="0"/>
+          </a:p>
+        </p:txBody>
+      </p:sp>
+      <p:sp>
+        <p:nvSpPr>
+          <p:cNvPr id="33" name="Text 26"/>
+          <p:cNvSpPr txBox="1"/>
+          <p:nvPr/>
+        </p:nvSpPr>
+        <p:spPr>
+          <a:xfrm>
+            <a:off x="5907938" y="3733800"/>
+            <a:ext cx="1805330" cy="816864"/>
           </a:xfrm>
           <a:prstGeom prst="rect">
             <a:avLst/>
@@ -1792,28 +2293,55 @@
           <a:p>
             <a:pPr algn="l" indent="0" marL="0">
               <a:lnSpc>
-                <a:spcPct val="120000"/>
+                <a:spcPct val="122000"/>
               </a:lnSpc>
               <a:buNone/>
             </a:pPr>
             <a:r>
               <a:rPr lang="en-US" sz="800" dirty="0">
                 <a:solidFill>
-                  <a:srgbClr val="475569"/>
-                </a:solidFill>
-                <a:latin typeface="Malgun Gothic" pitchFamily="34" charset="0"/>
-                <a:ea typeface="Malgun Gothic" pitchFamily="34" charset="-122"/>
-                <a:cs typeface="Malgun Gothic" pitchFamily="34" charset="-120"/>
-              </a:rPr>
-              <a:t>11곳 — 타로, 신점, 심리상담. 포화 품목이라 행사당 1~2곳으로 제한 배치</a:t>
+                  <a:srgbClr val="5A6B85"/>
+                </a:solidFill>
+                <a:latin typeface="Malgun Gothic" pitchFamily="34" charset="0"/>
+                <a:ea typeface="Malgun Gothic" pitchFamily="34" charset="-122"/>
+                <a:cs typeface="Malgun Gothic" pitchFamily="34" charset="-120"/>
+              </a:rPr>
+              <a:t>타로, 신점, 심리상담. 포화 품목이라 행사당 1~2곳으로 제한 배치</a:t>
             </a:r>
             <a:endParaRPr lang="en-US" sz="800" dirty="0"/>
           </a:p>
         </p:txBody>
+      </p:sp>
+      <p:sp>
+        <p:nvSpPr>
+          <p:cNvPr id="34" name="Shape 27"/>
+          <p:cNvSpPr/>
+          <p:nvPr/>
+        </p:nvSpPr>
+        <p:spPr>
+          <a:xfrm>
+            <a:off x="8097317" y="3139440"/>
+            <a:ext cx="3527450" cy="1530096"/>
+          </a:xfrm>
+          <a:prstGeom prst="roundRect">
+            <a:avLst>
+              <a:gd name="adj" fmla="val 2988"/>
+            </a:avLst>
+          </a:prstGeom>
+          <a:solidFill>
+            <a:srgbClr val="FBFCFE"/>
+          </a:solidFill>
+          <a:ln w="9525">
+            <a:solidFill>
+              <a:srgbClr val="E4EBF5"/>
+            </a:solidFill>
+            <a:prstDash val="solid"/>
+          </a:ln>
+        </p:spPr>
       </p:sp>
       <p:pic>
         <p:nvPicPr>
-          <p:cNvPr id="21" name="Image 5" descr="/home/user/Flitunion/docs/photos/seller-items/pet.jpg">    </p:cNvPr>
+          <p:cNvPr id="35" name="Image 5" descr="/home/user/Flitunion/docs/photos/seller-items/pet.jpg">    </p:cNvPr>
           <p:cNvPicPr>
             <a:picLocks noChangeAspect="1"/>
           </p:cNvPicPr>
@@ -1827,8 +2355,8 @@
         </p:blipFill>
         <p:spPr>
           <a:xfrm>
-            <a:off x="8158277" y="3204972"/>
-            <a:ext cx="1417320" cy="1417320"/>
+            <a:off x="8216189" y="3258312"/>
+            <a:ext cx="1292352" cy="1292352"/>
           </a:xfrm>
           <a:prstGeom prst="rect">
             <a:avLst/>
@@ -1837,14 +2365,53 @@
       </p:pic>
       <p:sp>
         <p:nvSpPr>
-          <p:cNvPr id="22" name="Text 14"/>
-          <p:cNvSpPr txBox="1"/>
-          <p:nvPr/>
-        </p:nvSpPr>
-        <p:spPr>
-          <a:xfrm>
-            <a:off x="9721901" y="3204972"/>
-            <a:ext cx="2012594" cy="292608"/>
+          <p:cNvPr id="36" name="Text 28"/>
+          <p:cNvSpPr txBox="1"/>
+          <p:nvPr/>
+        </p:nvSpPr>
+        <p:spPr>
+          <a:xfrm>
+            <a:off x="9673133" y="3276600"/>
+            <a:ext cx="1805330" cy="164592"/>
+          </a:xfrm>
+          <a:prstGeom prst="rect">
+            <a:avLst/>
+          </a:prstGeom>
+          <a:noFill/>
+          <a:ln/>
+        </p:spPr>
+        <p:txBody>
+          <a:bodyPr wrap="square" rtlCol="0" anchor="ctr"/>
+          <a:lstStyle/>
+          <a:p>
+            <a:pPr algn="l" indent="0" marL="0">
+              <a:buNone/>
+            </a:pPr>
+            <a:r>
+              <a:rPr lang="en-US" sz="750" b="1" spc="100" kern="0" dirty="0">
+                <a:solidFill>
+                  <a:srgbClr val="3182F6"/>
+                </a:solidFill>
+                <a:latin typeface="Arial" pitchFamily="34" charset="0"/>
+                <a:ea typeface="Arial" pitchFamily="34" charset="-122"/>
+                <a:cs typeface="Arial" pitchFamily="34" charset="-120"/>
+              </a:rPr>
+              <a:t>06</a:t>
+            </a:r>
+            <a:endParaRPr lang="en-US" sz="750" dirty="0"/>
+          </a:p>
+        </p:txBody>
+      </p:sp>
+      <p:sp>
+        <p:nvSpPr>
+          <p:cNvPr id="37" name="Text 29"/>
+          <p:cNvSpPr txBox="1"/>
+          <p:nvPr/>
+        </p:nvSpPr>
+        <p:spPr>
+          <a:xfrm>
+            <a:off x="9673133" y="3441192"/>
+            <a:ext cx="1805330" cy="274320"/>
           </a:xfrm>
           <a:prstGeom prst="rect">
             <a:avLst/>
@@ -1860,9 +2427,9 @@
               <a:buNone/>
             </a:pPr>
             <a:r>
-              <a:rPr lang="en-US" sz="1300" b="1" dirty="0">
-                <a:solidFill>
-                  <a:srgbClr val="0F172A"/>
+              <a:rPr lang="en-US" sz="1250" b="1" dirty="0">
+                <a:solidFill>
+                  <a:srgbClr val="101828"/>
                 </a:solidFill>
                 <a:latin typeface="Malgun Gothic" pitchFamily="34" charset="0"/>
                 <a:ea typeface="Malgun Gothic" pitchFamily="34" charset="-122"/>
@@ -1870,20 +2437,34 @@
               </a:rPr>
               <a:t>반려동물</a:t>
             </a:r>
-            <a:endParaRPr lang="en-US" sz="1300" dirty="0"/>
-          </a:p>
-        </p:txBody>
-      </p:sp>
-      <p:sp>
-        <p:nvSpPr>
-          <p:cNvPr id="23" name="Text 15"/>
-          <p:cNvSpPr txBox="1"/>
-          <p:nvPr/>
-        </p:nvSpPr>
-        <p:spPr>
-          <a:xfrm>
-            <a:off x="9721901" y="3497580"/>
-            <a:ext cx="2012594" cy="1124712"/>
+            <a:pPr algn="l" indent="0" marL="0">
+              <a:buNone/>
+            </a:pPr>
+            <a:r>
+              <a:rPr lang="en-US" sz="800" b="1" dirty="0">
+                <a:solidFill>
+                  <a:srgbClr val="3182F6"/>
+                </a:solidFill>
+                <a:latin typeface="Malgun Gothic" pitchFamily="34" charset="0"/>
+                <a:ea typeface="Malgun Gothic" pitchFamily="34" charset="-122"/>
+                <a:cs typeface="Malgun Gothic" pitchFamily="34" charset="-120"/>
+              </a:rPr>
+              <a:t>   11곳</a:t>
+            </a:r>
+            <a:endParaRPr lang="en-US" sz="1250" dirty="0"/>
+          </a:p>
+        </p:txBody>
+      </p:sp>
+      <p:sp>
+        <p:nvSpPr>
+          <p:cNvPr id="38" name="Text 30"/>
+          <p:cNvSpPr txBox="1"/>
+          <p:nvPr/>
+        </p:nvSpPr>
+        <p:spPr>
+          <a:xfrm>
+            <a:off x="9673133" y="3733800"/>
+            <a:ext cx="1805330" cy="816864"/>
           </a:xfrm>
           <a:prstGeom prst="rect">
             <a:avLst/>
@@ -1897,28 +2478,55 @@
           <a:p>
             <a:pPr algn="l" indent="0" marL="0">
               <a:lnSpc>
-                <a:spcPct val="120000"/>
+                <a:spcPct val="122000"/>
               </a:lnSpc>
               <a:buNone/>
             </a:pPr>
             <a:r>
               <a:rPr lang="en-US" sz="800" dirty="0">
                 <a:solidFill>
-                  <a:srgbClr val="475569"/>
-                </a:solidFill>
-                <a:latin typeface="Malgun Gothic" pitchFamily="34" charset="0"/>
-                <a:ea typeface="Malgun Gothic" pitchFamily="34" charset="-122"/>
-                <a:cs typeface="Malgun Gothic" pitchFamily="34" charset="-120"/>
-              </a:rPr>
-              <a:t>11곳 — 수제 간식, 수제 사료, 하네스, 맞춤 인형. 반려동물 동반 행사 전용</a:t>
+                  <a:srgbClr val="5A6B85"/>
+                </a:solidFill>
+                <a:latin typeface="Malgun Gothic" pitchFamily="34" charset="0"/>
+                <a:ea typeface="Malgun Gothic" pitchFamily="34" charset="-122"/>
+                <a:cs typeface="Malgun Gothic" pitchFamily="34" charset="-120"/>
+              </a:rPr>
+              <a:t>수제 간식, 수제 사료, 하네스, 맞춤 인형. 반려동물 동반 행사 전용</a:t>
             </a:r>
             <a:endParaRPr lang="en-US" sz="800" dirty="0"/>
           </a:p>
         </p:txBody>
+      </p:sp>
+      <p:sp>
+        <p:nvSpPr>
+          <p:cNvPr id="39" name="Shape 31"/>
+          <p:cNvSpPr/>
+          <p:nvPr/>
+        </p:nvSpPr>
+        <p:spPr>
+          <a:xfrm>
+            <a:off x="566928" y="4852416"/>
+            <a:ext cx="3527450" cy="1530096"/>
+          </a:xfrm>
+          <a:prstGeom prst="roundRect">
+            <a:avLst>
+              <a:gd name="adj" fmla="val 2988"/>
+            </a:avLst>
+          </a:prstGeom>
+          <a:solidFill>
+            <a:srgbClr val="FBFCFE"/>
+          </a:solidFill>
+          <a:ln w="9525">
+            <a:solidFill>
+              <a:srgbClr val="E4EBF5"/>
+            </a:solidFill>
+            <a:prstDash val="solid"/>
+          </a:ln>
+        </p:spPr>
       </p:sp>
       <p:pic>
         <p:nvPicPr>
-          <p:cNvPr id="24" name="Image 6" descr="/home/user/Flitunion/docs/photos/seller-items/clothing.jpg">    </p:cNvPr>
+          <p:cNvPr id="40" name="Image 6" descr="/home/user/Flitunion/docs/photos/seller-items/clothing.jpg">    </p:cNvPr>
           <p:cNvPicPr>
             <a:picLocks noChangeAspect="1"/>
           </p:cNvPicPr>
@@ -1932,8 +2540,8 @@
         </p:blipFill>
         <p:spPr>
           <a:xfrm>
-            <a:off x="457200" y="4966716"/>
-            <a:ext cx="1417320" cy="1417320"/>
+            <a:off x="685800" y="4971288"/>
+            <a:ext cx="1292352" cy="1292352"/>
           </a:xfrm>
           <a:prstGeom prst="rect">
             <a:avLst/>
@@ -1942,14 +2550,53 @@
       </p:pic>
       <p:sp>
         <p:nvSpPr>
-          <p:cNvPr id="25" name="Text 16"/>
-          <p:cNvSpPr txBox="1"/>
-          <p:nvPr/>
-        </p:nvSpPr>
-        <p:spPr>
-          <a:xfrm>
-            <a:off x="2020824" y="4966716"/>
-            <a:ext cx="2012594" cy="292608"/>
+          <p:cNvPr id="41" name="Text 32"/>
+          <p:cNvSpPr txBox="1"/>
+          <p:nvPr/>
+        </p:nvSpPr>
+        <p:spPr>
+          <a:xfrm>
+            <a:off x="2142744" y="4989576"/>
+            <a:ext cx="1805330" cy="164592"/>
+          </a:xfrm>
+          <a:prstGeom prst="rect">
+            <a:avLst/>
+          </a:prstGeom>
+          <a:noFill/>
+          <a:ln/>
+        </p:spPr>
+        <p:txBody>
+          <a:bodyPr wrap="square" rtlCol="0" anchor="ctr"/>
+          <a:lstStyle/>
+          <a:p>
+            <a:pPr algn="l" indent="0" marL="0">
+              <a:buNone/>
+            </a:pPr>
+            <a:r>
+              <a:rPr lang="en-US" sz="750" b="1" spc="100" kern="0" dirty="0">
+                <a:solidFill>
+                  <a:srgbClr val="3182F6"/>
+                </a:solidFill>
+                <a:latin typeface="Arial" pitchFamily="34" charset="0"/>
+                <a:ea typeface="Arial" pitchFamily="34" charset="-122"/>
+                <a:cs typeface="Arial" pitchFamily="34" charset="-120"/>
+              </a:rPr>
+              <a:t>07</a:t>
+            </a:r>
+            <a:endParaRPr lang="en-US" sz="750" dirty="0"/>
+          </a:p>
+        </p:txBody>
+      </p:sp>
+      <p:sp>
+        <p:nvSpPr>
+          <p:cNvPr id="42" name="Text 33"/>
+          <p:cNvSpPr txBox="1"/>
+          <p:nvPr/>
+        </p:nvSpPr>
+        <p:spPr>
+          <a:xfrm>
+            <a:off x="2142744" y="5154168"/>
+            <a:ext cx="1805330" cy="274320"/>
           </a:xfrm>
           <a:prstGeom prst="rect">
             <a:avLst/>
@@ -1965,9 +2612,9 @@
               <a:buNone/>
             </a:pPr>
             <a:r>
-              <a:rPr lang="en-US" sz="1300" b="1" dirty="0">
-                <a:solidFill>
-                  <a:srgbClr val="0F172A"/>
+              <a:rPr lang="en-US" sz="1250" b="1" dirty="0">
+                <a:solidFill>
+                  <a:srgbClr val="101828"/>
                 </a:solidFill>
                 <a:latin typeface="Malgun Gothic" pitchFamily="34" charset="0"/>
                 <a:ea typeface="Malgun Gothic" pitchFamily="34" charset="-122"/>
@@ -1975,20 +2622,34 @@
               </a:rPr>
               <a:t>의류 · 한복</a:t>
             </a:r>
-            <a:endParaRPr lang="en-US" sz="1300" dirty="0"/>
-          </a:p>
-        </p:txBody>
-      </p:sp>
-      <p:sp>
-        <p:nvSpPr>
-          <p:cNvPr id="26" name="Text 17"/>
-          <p:cNvSpPr txBox="1"/>
-          <p:nvPr/>
-        </p:nvSpPr>
-        <p:spPr>
-          <a:xfrm>
-            <a:off x="2020824" y="5259324"/>
-            <a:ext cx="2012594" cy="1124712"/>
+            <a:pPr algn="l" indent="0" marL="0">
+              <a:buNone/>
+            </a:pPr>
+            <a:r>
+              <a:rPr lang="en-US" sz="800" b="1" dirty="0">
+                <a:solidFill>
+                  <a:srgbClr val="3182F6"/>
+                </a:solidFill>
+                <a:latin typeface="Malgun Gothic" pitchFamily="34" charset="0"/>
+                <a:ea typeface="Malgun Gothic" pitchFamily="34" charset="-122"/>
+                <a:cs typeface="Malgun Gothic" pitchFamily="34" charset="-120"/>
+              </a:rPr>
+              <a:t>   10곳</a:t>
+            </a:r>
+            <a:endParaRPr lang="en-US" sz="1250" dirty="0"/>
+          </a:p>
+        </p:txBody>
+      </p:sp>
+      <p:sp>
+        <p:nvSpPr>
+          <p:cNvPr id="43" name="Text 34"/>
+          <p:cNvSpPr txBox="1"/>
+          <p:nvPr/>
+        </p:nvSpPr>
+        <p:spPr>
+          <a:xfrm>
+            <a:off x="2142744" y="5446776"/>
+            <a:ext cx="1805330" cy="816864"/>
           </a:xfrm>
           <a:prstGeom prst="rect">
             <a:avLst/>
@@ -2002,28 +2663,55 @@
           <a:p>
             <a:pPr algn="l" indent="0" marL="0">
               <a:lnSpc>
-                <a:spcPct val="120000"/>
+                <a:spcPct val="122000"/>
               </a:lnSpc>
               <a:buNone/>
             </a:pPr>
             <a:r>
               <a:rPr lang="en-US" sz="800" dirty="0">
                 <a:solidFill>
-                  <a:srgbClr val="475569"/>
-                </a:solidFill>
-                <a:latin typeface="Malgun Gothic" pitchFamily="34" charset="0"/>
-                <a:ea typeface="Malgun Gothic" pitchFamily="34" charset="-122"/>
-                <a:cs typeface="Malgun Gothic" pitchFamily="34" charset="-120"/>
-              </a:rPr>
-              <a:t>10곳 — 생활한복, 컨템포러리 한복, 여성 의류, 빅사이즈(66 이상), 직수입 빈티지</a:t>
+                  <a:srgbClr val="5A6B85"/>
+                </a:solidFill>
+                <a:latin typeface="Malgun Gothic" pitchFamily="34" charset="0"/>
+                <a:ea typeface="Malgun Gothic" pitchFamily="34" charset="-122"/>
+                <a:cs typeface="Malgun Gothic" pitchFamily="34" charset="-120"/>
+              </a:rPr>
+              <a:t>생활한복, 컨템포러리 한복, 여성 의류, 빅사이즈(66 이상), 직수입 빈티지</a:t>
             </a:r>
             <a:endParaRPr lang="en-US" sz="800" dirty="0"/>
           </a:p>
         </p:txBody>
+      </p:sp>
+      <p:sp>
+        <p:nvSpPr>
+          <p:cNvPr id="44" name="Shape 35"/>
+          <p:cNvSpPr/>
+          <p:nvPr/>
+        </p:nvSpPr>
+        <p:spPr>
+          <a:xfrm>
+            <a:off x="4332122" y="4852416"/>
+            <a:ext cx="3527450" cy="1530096"/>
+          </a:xfrm>
+          <a:prstGeom prst="roundRect">
+            <a:avLst>
+              <a:gd name="adj" fmla="val 2988"/>
+            </a:avLst>
+          </a:prstGeom>
+          <a:solidFill>
+            <a:srgbClr val="FBFCFE"/>
+          </a:solidFill>
+          <a:ln w="9525">
+            <a:solidFill>
+              <a:srgbClr val="E4EBF5"/>
+            </a:solidFill>
+            <a:prstDash val="solid"/>
+          </a:ln>
+        </p:spPr>
       </p:sp>
       <p:pic>
         <p:nvPicPr>
-          <p:cNvPr id="27" name="Image 7" descr="/home/user/Flitunion/docs/photos/seller-items/accessory.jpg">    </p:cNvPr>
+          <p:cNvPr id="45" name="Image 7" descr="/home/user/Flitunion/docs/photos/seller-items/accessory.jpg">    </p:cNvPr>
           <p:cNvPicPr>
             <a:picLocks noChangeAspect="1"/>
           </p:cNvPicPr>
@@ -2037,8 +2725,8 @@
         </p:blipFill>
         <p:spPr>
           <a:xfrm>
-            <a:off x="4307738" y="4966716"/>
-            <a:ext cx="1417320" cy="1417320"/>
+            <a:off x="4450994" y="4971288"/>
+            <a:ext cx="1292352" cy="1292352"/>
           </a:xfrm>
           <a:prstGeom prst="rect">
             <a:avLst/>
@@ -2047,14 +2735,53 @@
       </p:pic>
       <p:sp>
         <p:nvSpPr>
-          <p:cNvPr id="28" name="Text 18"/>
-          <p:cNvSpPr txBox="1"/>
-          <p:nvPr/>
-        </p:nvSpPr>
-        <p:spPr>
-          <a:xfrm>
-            <a:off x="5871362" y="4966716"/>
-            <a:ext cx="2012594" cy="292608"/>
+          <p:cNvPr id="46" name="Text 36"/>
+          <p:cNvSpPr txBox="1"/>
+          <p:nvPr/>
+        </p:nvSpPr>
+        <p:spPr>
+          <a:xfrm>
+            <a:off x="5907938" y="4989576"/>
+            <a:ext cx="1805330" cy="164592"/>
+          </a:xfrm>
+          <a:prstGeom prst="rect">
+            <a:avLst/>
+          </a:prstGeom>
+          <a:noFill/>
+          <a:ln/>
+        </p:spPr>
+        <p:txBody>
+          <a:bodyPr wrap="square" rtlCol="0" anchor="ctr"/>
+          <a:lstStyle/>
+          <a:p>
+            <a:pPr algn="l" indent="0" marL="0">
+              <a:buNone/>
+            </a:pPr>
+            <a:r>
+              <a:rPr lang="en-US" sz="750" b="1" spc="100" kern="0" dirty="0">
+                <a:solidFill>
+                  <a:srgbClr val="3182F6"/>
+                </a:solidFill>
+                <a:latin typeface="Arial" pitchFamily="34" charset="0"/>
+                <a:ea typeface="Arial" pitchFamily="34" charset="-122"/>
+                <a:cs typeface="Arial" pitchFamily="34" charset="-120"/>
+              </a:rPr>
+              <a:t>08</a:t>
+            </a:r>
+            <a:endParaRPr lang="en-US" sz="750" dirty="0"/>
+          </a:p>
+        </p:txBody>
+      </p:sp>
+      <p:sp>
+        <p:nvSpPr>
+          <p:cNvPr id="47" name="Text 37"/>
+          <p:cNvSpPr txBox="1"/>
+          <p:nvPr/>
+        </p:nvSpPr>
+        <p:spPr>
+          <a:xfrm>
+            <a:off x="5907938" y="5154168"/>
+            <a:ext cx="1805330" cy="274320"/>
           </a:xfrm>
           <a:prstGeom prst="rect">
             <a:avLst/>
@@ -2070,9 +2797,9 @@
               <a:buNone/>
             </a:pPr>
             <a:r>
-              <a:rPr lang="en-US" sz="1300" b="1" dirty="0">
-                <a:solidFill>
-                  <a:srgbClr val="0F172A"/>
+              <a:rPr lang="en-US" sz="1250" b="1" dirty="0">
+                <a:solidFill>
+                  <a:srgbClr val="101828"/>
                 </a:solidFill>
                 <a:latin typeface="Malgun Gothic" pitchFamily="34" charset="0"/>
                 <a:ea typeface="Malgun Gothic" pitchFamily="34" charset="-122"/>
@@ -2080,20 +2807,34 @@
               </a:rPr>
               <a:t>악세사리 · 주얼리</a:t>
             </a:r>
-            <a:endParaRPr lang="en-US" sz="1300" dirty="0"/>
-          </a:p>
-        </p:txBody>
-      </p:sp>
-      <p:sp>
-        <p:nvSpPr>
-          <p:cNvPr id="29" name="Text 19"/>
-          <p:cNvSpPr txBox="1"/>
-          <p:nvPr/>
-        </p:nvSpPr>
-        <p:spPr>
-          <a:xfrm>
-            <a:off x="5871362" y="5259324"/>
-            <a:ext cx="2012594" cy="1124712"/>
+            <a:pPr algn="l" indent="0" marL="0">
+              <a:buNone/>
+            </a:pPr>
+            <a:r>
+              <a:rPr lang="en-US" sz="800" b="1" dirty="0">
+                <a:solidFill>
+                  <a:srgbClr val="3182F6"/>
+                </a:solidFill>
+                <a:latin typeface="Malgun Gothic" pitchFamily="34" charset="0"/>
+                <a:ea typeface="Malgun Gothic" pitchFamily="34" charset="-122"/>
+                <a:cs typeface="Malgun Gothic" pitchFamily="34" charset="-120"/>
+              </a:rPr>
+              <a:t>   8곳</a:t>
+            </a:r>
+            <a:endParaRPr lang="en-US" sz="1250" dirty="0"/>
+          </a:p>
+        </p:txBody>
+      </p:sp>
+      <p:sp>
+        <p:nvSpPr>
+          <p:cNvPr id="48" name="Text 38"/>
+          <p:cNvSpPr txBox="1"/>
+          <p:nvPr/>
+        </p:nvSpPr>
+        <p:spPr>
+          <a:xfrm>
+            <a:off x="5907938" y="5446776"/>
+            <a:ext cx="1805330" cy="816864"/>
           </a:xfrm>
           <a:prstGeom prst="rect">
             <a:avLst/>
@@ -2107,28 +2848,55 @@
           <a:p>
             <a:pPr algn="l" indent="0" marL="0">
               <a:lnSpc>
-                <a:spcPct val="120000"/>
+                <a:spcPct val="122000"/>
               </a:lnSpc>
               <a:buNone/>
             </a:pPr>
             <a:r>
               <a:rPr lang="en-US" sz="800" dirty="0">
                 <a:solidFill>
-                  <a:srgbClr val="475569"/>
-                </a:solidFill>
-                <a:latin typeface="Malgun Gothic" pitchFamily="34" charset="0"/>
-                <a:ea typeface="Malgun Gothic" pitchFamily="34" charset="-122"/>
-                <a:cs typeface="Malgun Gothic" pitchFamily="34" charset="-120"/>
-              </a:rPr>
-              <a:t>8곳 — 은세공, 원석 주얼리, 비녀, 블링 악세사리, 스마트폰 악세사리</a:t>
+                  <a:srgbClr val="5A6B85"/>
+                </a:solidFill>
+                <a:latin typeface="Malgun Gothic" pitchFamily="34" charset="0"/>
+                <a:ea typeface="Malgun Gothic" pitchFamily="34" charset="-122"/>
+                <a:cs typeface="Malgun Gothic" pitchFamily="34" charset="-120"/>
+              </a:rPr>
+              <a:t>은세공, 원석 주얼리, 비녀, 블링 악세사리, 스마트폰 악세사리</a:t>
             </a:r>
             <a:endParaRPr lang="en-US" sz="800" dirty="0"/>
           </a:p>
         </p:txBody>
+      </p:sp>
+      <p:sp>
+        <p:nvSpPr>
+          <p:cNvPr id="49" name="Shape 39"/>
+          <p:cNvSpPr/>
+          <p:nvPr/>
+        </p:nvSpPr>
+        <p:spPr>
+          <a:xfrm>
+            <a:off x="8097317" y="4852416"/>
+            <a:ext cx="3527450" cy="1530096"/>
+          </a:xfrm>
+          <a:prstGeom prst="roundRect">
+            <a:avLst>
+              <a:gd name="adj" fmla="val 2988"/>
+            </a:avLst>
+          </a:prstGeom>
+          <a:solidFill>
+            <a:srgbClr val="FBFCFE"/>
+          </a:solidFill>
+          <a:ln w="9525">
+            <a:solidFill>
+              <a:srgbClr val="E4EBF5"/>
+            </a:solidFill>
+            <a:prstDash val="solid"/>
+          </a:ln>
+        </p:spPr>
       </p:sp>
       <p:pic>
         <p:nvPicPr>
-          <p:cNvPr id="30" name="Image 8" descr="/home/user/Flitunion/docs/photos/seller-items/keyring.jpg">    </p:cNvPr>
+          <p:cNvPr id="50" name="Image 8" descr="/home/user/Flitunion/docs/photos/seller-items/keyring.jpg">    </p:cNvPr>
           <p:cNvPicPr>
             <a:picLocks noChangeAspect="1"/>
           </p:cNvPicPr>
@@ -2142,8 +2910,8 @@
         </p:blipFill>
         <p:spPr>
           <a:xfrm>
-            <a:off x="8158277" y="4966716"/>
-            <a:ext cx="1417320" cy="1417320"/>
+            <a:off x="8216189" y="4971288"/>
+            <a:ext cx="1292352" cy="1292352"/>
           </a:xfrm>
           <a:prstGeom prst="rect">
             <a:avLst/>
@@ -2152,14 +2920,53 @@
       </p:pic>
       <p:sp>
         <p:nvSpPr>
-          <p:cNvPr id="31" name="Text 20"/>
-          <p:cNvSpPr txBox="1"/>
-          <p:nvPr/>
-        </p:nvSpPr>
-        <p:spPr>
-          <a:xfrm>
-            <a:off x="9721901" y="4966716"/>
-            <a:ext cx="2012594" cy="292608"/>
+          <p:cNvPr id="51" name="Text 40"/>
+          <p:cNvSpPr txBox="1"/>
+          <p:nvPr/>
+        </p:nvSpPr>
+        <p:spPr>
+          <a:xfrm>
+            <a:off x="9673133" y="4989576"/>
+            <a:ext cx="1805330" cy="164592"/>
+          </a:xfrm>
+          <a:prstGeom prst="rect">
+            <a:avLst/>
+          </a:prstGeom>
+          <a:noFill/>
+          <a:ln/>
+        </p:spPr>
+        <p:txBody>
+          <a:bodyPr wrap="square" rtlCol="0" anchor="ctr"/>
+          <a:lstStyle/>
+          <a:p>
+            <a:pPr algn="l" indent="0" marL="0">
+              <a:buNone/>
+            </a:pPr>
+            <a:r>
+              <a:rPr lang="en-US" sz="750" b="1" spc="100" kern="0" dirty="0">
+                <a:solidFill>
+                  <a:srgbClr val="3182F6"/>
+                </a:solidFill>
+                <a:latin typeface="Arial" pitchFamily="34" charset="0"/>
+                <a:ea typeface="Arial" pitchFamily="34" charset="-122"/>
+                <a:cs typeface="Arial" pitchFamily="34" charset="-120"/>
+              </a:rPr>
+              <a:t>09</a:t>
+            </a:r>
+            <a:endParaRPr lang="en-US" sz="750" dirty="0"/>
+          </a:p>
+        </p:txBody>
+      </p:sp>
+      <p:sp>
+        <p:nvSpPr>
+          <p:cNvPr id="52" name="Text 41"/>
+          <p:cNvSpPr txBox="1"/>
+          <p:nvPr/>
+        </p:nvSpPr>
+        <p:spPr>
+          <a:xfrm>
+            <a:off x="9673133" y="5154168"/>
+            <a:ext cx="1805330" cy="274320"/>
           </a:xfrm>
           <a:prstGeom prst="rect">
             <a:avLst/>
@@ -2175,9 +2982,9 @@
               <a:buNone/>
             </a:pPr>
             <a:r>
-              <a:rPr lang="en-US" sz="1300" b="1" dirty="0">
-                <a:solidFill>
-                  <a:srgbClr val="0F172A"/>
+              <a:rPr lang="en-US" sz="1250" b="1" dirty="0">
+                <a:solidFill>
+                  <a:srgbClr val="101828"/>
                 </a:solidFill>
                 <a:latin typeface="Malgun Gothic" pitchFamily="34" charset="0"/>
                 <a:ea typeface="Malgun Gothic" pitchFamily="34" charset="-122"/>
@@ -2185,20 +2992,34 @@
               </a:rPr>
               <a:t>키링 · 그립톡</a:t>
             </a:r>
-            <a:endParaRPr lang="en-US" sz="1300" dirty="0"/>
-          </a:p>
-        </p:txBody>
-      </p:sp>
-      <p:sp>
-        <p:nvSpPr>
-          <p:cNvPr id="32" name="Text 21"/>
-          <p:cNvSpPr txBox="1"/>
-          <p:nvPr/>
-        </p:nvSpPr>
-        <p:spPr>
-          <a:xfrm>
-            <a:off x="9721901" y="5259324"/>
-            <a:ext cx="2012594" cy="1124712"/>
+            <a:pPr algn="l" indent="0" marL="0">
+              <a:buNone/>
+            </a:pPr>
+            <a:r>
+              <a:rPr lang="en-US" sz="800" b="1" dirty="0">
+                <a:solidFill>
+                  <a:srgbClr val="3182F6"/>
+                </a:solidFill>
+                <a:latin typeface="Malgun Gothic" pitchFamily="34" charset="0"/>
+                <a:ea typeface="Malgun Gothic" pitchFamily="34" charset="-122"/>
+                <a:cs typeface="Malgun Gothic" pitchFamily="34" charset="-120"/>
+              </a:rPr>
+              <a:t>   8곳</a:t>
+            </a:r>
+            <a:endParaRPr lang="en-US" sz="1250" dirty="0"/>
+          </a:p>
+        </p:txBody>
+      </p:sp>
+      <p:sp>
+        <p:nvSpPr>
+          <p:cNvPr id="53" name="Text 42"/>
+          <p:cNvSpPr txBox="1"/>
+          <p:nvPr/>
+        </p:nvSpPr>
+        <p:spPr>
+          <a:xfrm>
+            <a:off x="9673133" y="5446776"/>
+            <a:ext cx="1805330" cy="816864"/>
           </a:xfrm>
           <a:prstGeom prst="rect">
             <a:avLst/>
@@ -2212,20 +3033,20 @@
           <a:p>
             <a:pPr algn="l" indent="0" marL="0">
               <a:lnSpc>
-                <a:spcPct val="120000"/>
+                <a:spcPct val="122000"/>
               </a:lnSpc>
               <a:buNone/>
             </a:pPr>
             <a:r>
               <a:rPr lang="en-US" sz="800" dirty="0">
                 <a:solidFill>
-                  <a:srgbClr val="475569"/>
-                </a:solidFill>
-                <a:latin typeface="Malgun Gothic" pitchFamily="34" charset="0"/>
-                <a:ea typeface="Malgun Gothic" pitchFamily="34" charset="-122"/>
-                <a:cs typeface="Malgun Gothic" pitchFamily="34" charset="-120"/>
-              </a:rPr>
-              <a:t>8곳 — 레진 그립톡, 폰 비즈키링, 매듭 키링, 인형 키링, 지비츠</a:t>
+                  <a:srgbClr val="5A6B85"/>
+                </a:solidFill>
+                <a:latin typeface="Malgun Gothic" pitchFamily="34" charset="0"/>
+                <a:ea typeface="Malgun Gothic" pitchFamily="34" charset="-122"/>
+                <a:cs typeface="Malgun Gothic" pitchFamily="34" charset="-120"/>
+              </a:rPr>
+              <a:t>레진 그립톡, 폰 비즈키링, 매듭 키링, 인형 키링, 지비츠</a:t>
             </a:r>
             <a:endParaRPr lang="en-US" sz="800" dirty="0"/>
           </a:p>
@@ -2233,14 +3054,39 @@
       </p:sp>
       <p:sp>
         <p:nvSpPr>
-          <p:cNvPr id="33" name="Text 22"/>
-          <p:cNvSpPr txBox="1"/>
-          <p:nvPr/>
-        </p:nvSpPr>
-        <p:spPr>
-          <a:xfrm>
-            <a:off x="457200" y="6492240"/>
-            <a:ext cx="10637215" cy="274320"/>
+          <p:cNvPr id="54" name="Shape 43"/>
+          <p:cNvSpPr/>
+          <p:nvPr/>
+        </p:nvSpPr>
+        <p:spPr>
+          <a:xfrm>
+            <a:off x="566928" y="6400800"/>
+            <a:ext cx="11057839" cy="10973"/>
+          </a:xfrm>
+          <a:prstGeom prst="rect">
+            <a:avLst/>
+          </a:prstGeom>
+          <a:solidFill>
+            <a:srgbClr val="E4EBF5"/>
+          </a:solidFill>
+          <a:ln w="12700">
+            <a:solidFill>
+              <a:srgbClr val="E4EBF5"/>
+            </a:solidFill>
+            <a:prstDash val="solid"/>
+          </a:ln>
+        </p:spPr>
+      </p:sp>
+      <p:sp>
+        <p:nvSpPr>
+          <p:cNvPr id="55" name="Text 44"/>
+          <p:cNvSpPr txBox="1"/>
+          <p:nvPr/>
+        </p:nvSpPr>
+        <p:spPr>
+          <a:xfrm>
+            <a:off x="566928" y="6492240"/>
+            <a:ext cx="10234879" cy="256032"/>
           </a:xfrm>
           <a:prstGeom prst="rect">
             <a:avLst/>
@@ -2258,13 +3104,13 @@
             <a:r>
               <a:rPr lang="en-US" sz="750" dirty="0">
                 <a:solidFill>
-                  <a:srgbClr val="94A3B8"/>
-                </a:solidFill>
-                <a:latin typeface="Malgun Gothic" pitchFamily="34" charset="0"/>
-                <a:ea typeface="Malgun Gothic" pitchFamily="34" charset="-122"/>
-                <a:cs typeface="Malgun Gothic" pitchFamily="34" charset="-120"/>
-              </a:rPr>
-              <a:t>플릿 유니온 · www.flitunion.com   |   사진은 품목 이해를 돕기 위한 예시 이미지입니다 (자유 이용 라이선스). 실제 참여 셀러의 상품 사진이 아닙니다.</a:t>
+                  <a:srgbClr val="A3B0C4"/>
+                </a:solidFill>
+                <a:latin typeface="Malgun Gothic" pitchFamily="34" charset="0"/>
+                <a:ea typeface="Malgun Gothic" pitchFamily="34" charset="-122"/>
+                <a:cs typeface="Malgun Gothic" pitchFamily="34" charset="-120"/>
+              </a:rPr>
+              <a:t>사진은 품목 이해를 돕기 위한 예시 이미지입니다 (자유 이용 라이선스). 실제 참여 셀러의 상품 사진이 아닙니다.</a:t>
             </a:r>
             <a:endParaRPr lang="en-US" sz="750" dirty="0"/>
           </a:p>
@@ -2272,14 +3118,14 @@
       </p:sp>
       <p:sp>
         <p:nvSpPr>
-          <p:cNvPr id="34" name="Text 23"/>
-          <p:cNvSpPr txBox="1"/>
-          <p:nvPr/>
-        </p:nvSpPr>
-        <p:spPr>
-          <a:xfrm>
-            <a:off x="457200" y="6492240"/>
-            <a:ext cx="11277295" cy="274320"/>
+          <p:cNvPr id="56" name="Text 45"/>
+          <p:cNvSpPr txBox="1"/>
+          <p:nvPr/>
+        </p:nvSpPr>
+        <p:spPr>
+          <a:xfrm>
+            <a:off x="566928" y="6492240"/>
+            <a:ext cx="11057839" cy="256032"/>
           </a:xfrm>
           <a:prstGeom prst="rect">
             <a:avLst/>
@@ -2295,15 +3141,15 @@
               <a:buNone/>
             </a:pPr>
             <a:r>
-              <a:rPr lang="en-US" sz="750" dirty="0">
-                <a:solidFill>
-                  <a:srgbClr val="94A3B8"/>
-                </a:solidFill>
-                <a:latin typeface="Malgun Gothic" pitchFamily="34" charset="0"/>
-                <a:ea typeface="Malgun Gothic" pitchFamily="34" charset="-122"/>
-                <a:cs typeface="Malgun Gothic" pitchFamily="34" charset="-120"/>
-              </a:rPr>
-              <a:t>1 / 4</a:t>
+              <a:rPr lang="en-US" sz="750" b="1" spc="160" kern="0" dirty="0">
+                <a:solidFill>
+                  <a:srgbClr val="A3B0C4"/>
+                </a:solidFill>
+                <a:latin typeface="Arial" pitchFamily="34" charset="0"/>
+                <a:ea typeface="Arial" pitchFamily="34" charset="-122"/>
+                <a:cs typeface="Arial" pitchFamily="34" charset="-120"/>
+              </a:rPr>
+              <a:t>FLIT UNION</a:t>
             </a:r>
             <a:endParaRPr lang="en-US" sz="750" dirty="0"/>
           </a:p>
@@ -2343,104 +3189,24 @@
       </p:grpSpPr>
       <p:sp>
         <p:nvSpPr>
-          <p:cNvPr id="2" name="Text 0"/>
+          <p:cNvPr id="2" name="Shape 0"/>
           <p:cNvSpPr/>
           <p:nvPr/>
         </p:nvSpPr>
         <p:spPr>
           <a:xfrm>
-            <a:off x="0" y="201168"/>
-            <a:ext cx="12191695" cy="274320"/>
-          </a:xfrm>
-          <a:prstGeom prst="rect">
-            <a:avLst/>
-          </a:prstGeom>
-          <a:noFill/>
-          <a:ln/>
-        </p:spPr>
-        <p:txBody>
-          <a:bodyPr wrap="square" rtlCol="0" anchor="ctr"/>
-          <a:lstStyle/>
-          <a:p>
-            <a:pPr algn="ctr" indent="0" marL="0">
-              <a:buNone/>
-            </a:pPr>
-            <a:r>
-              <a:rPr lang="en-US" sz="1600" b="1" spc="100" kern="0" dirty="0">
-                <a:solidFill>
-                  <a:srgbClr val="3182F6"/>
-                </a:solidFill>
-                <a:latin typeface="Malgun Gothic" pitchFamily="34" charset="0"/>
-                <a:ea typeface="Malgun Gothic" pitchFamily="34" charset="-122"/>
-                <a:cs typeface="Malgun Gothic" pitchFamily="34" charset="-120"/>
-              </a:rPr>
-              <a:t>플릿 유니온</a:t>
-            </a:r>
-            <a:endParaRPr lang="en-US" sz="1600" dirty="0"/>
-          </a:p>
-        </p:txBody>
-      </p:sp>
-      <p:sp>
-        <p:nvSpPr>
-          <p:cNvPr id="3" name="Text 1"/>
-          <p:cNvSpPr/>
-          <p:nvPr/>
-        </p:nvSpPr>
-        <p:spPr>
-          <a:xfrm>
-            <a:off x="0" y="457200"/>
-            <a:ext cx="12191695" cy="457200"/>
-          </a:xfrm>
-          <a:prstGeom prst="rect">
-            <a:avLst/>
-          </a:prstGeom>
-          <a:noFill/>
-          <a:ln/>
-        </p:spPr>
-        <p:txBody>
-          <a:bodyPr wrap="square" rtlCol="0" anchor="ctr"/>
-          <a:lstStyle/>
-          <a:p>
-            <a:pPr algn="ctr" indent="0" marL="0">
-              <a:buNone/>
-            </a:pPr>
-            <a:r>
-              <a:rPr lang="en-US" sz="2800" b="1" dirty="0">
-                <a:solidFill>
-                  <a:srgbClr val="0B1F44"/>
-                </a:solidFill>
-                <a:latin typeface="Malgun Gothic" pitchFamily="34" charset="0"/>
-                <a:ea typeface="Malgun Gothic" pitchFamily="34" charset="-122"/>
-                <a:cs typeface="Malgun Gothic" pitchFamily="34" charset="-120"/>
-              </a:rPr>
-              <a:t>플리마켓 셀러 품목</a:t>
-            </a:r>
-            <a:endParaRPr lang="en-US" sz="2800" dirty="0"/>
-          </a:p>
-        </p:txBody>
-      </p:sp>
-      <p:sp>
-        <p:nvSpPr>
-          <p:cNvPr id="4" name="Shape 2"/>
-          <p:cNvSpPr/>
-          <p:nvPr/>
-        </p:nvSpPr>
-        <p:spPr>
-          <a:xfrm>
-            <a:off x="3809848" y="932688"/>
-            <a:ext cx="4572000" cy="310896"/>
-          </a:xfrm>
-          <a:prstGeom prst="roundRect">
-            <a:avLst>
-              <a:gd name="adj" fmla="val 50000"/>
-            </a:avLst>
+            <a:off x="0" y="0"/>
+            <a:ext cx="12191695" cy="68580"/>
+          </a:xfrm>
+          <a:prstGeom prst="rect">
+            <a:avLst/>
           </a:prstGeom>
           <a:solidFill>
-            <a:srgbClr val="EAF2FF"/>
+            <a:srgbClr val="0B1F44"/>
           </a:solidFill>
           <a:ln w="12700">
             <a:solidFill>
-              <a:srgbClr val="EAF2FF"/>
+              <a:srgbClr val="0B1F44"/>
             </a:solidFill>
             <a:prstDash val="solid"/>
           </a:ln>
@@ -2448,14 +3214,156 @@
       </p:sp>
       <p:sp>
         <p:nvSpPr>
+          <p:cNvPr id="3" name="Shape 1"/>
+          <p:cNvSpPr/>
+          <p:nvPr/>
+        </p:nvSpPr>
+        <p:spPr>
+          <a:xfrm>
+            <a:off x="566928" y="457200"/>
+            <a:ext cx="50292" cy="420624"/>
+          </a:xfrm>
+          <a:prstGeom prst="rect">
+            <a:avLst/>
+          </a:prstGeom>
+          <a:solidFill>
+            <a:srgbClr val="3182F6"/>
+          </a:solidFill>
+          <a:ln w="12700">
+            <a:solidFill>
+              <a:srgbClr val="3182F6"/>
+            </a:solidFill>
+            <a:prstDash val="solid"/>
+          </a:ln>
+        </p:spPr>
+      </p:sp>
+      <p:sp>
+        <p:nvSpPr>
+          <p:cNvPr id="4" name="Text 2"/>
+          <p:cNvSpPr txBox="1"/>
+          <p:nvPr/>
+        </p:nvSpPr>
+        <p:spPr>
+          <a:xfrm>
+            <a:off x="749808" y="384048"/>
+            <a:ext cx="3657600" cy="201168"/>
+          </a:xfrm>
+          <a:prstGeom prst="rect">
+            <a:avLst/>
+          </a:prstGeom>
+          <a:noFill/>
+          <a:ln/>
+        </p:spPr>
+        <p:txBody>
+          <a:bodyPr wrap="square" rtlCol="0" anchor="ctr"/>
+          <a:lstStyle/>
+          <a:p>
+            <a:pPr algn="l" indent="0" marL="0">
+              <a:buNone/>
+            </a:pPr>
+            <a:r>
+              <a:rPr lang="en-US" sz="850" b="1" spc="240" kern="0" dirty="0">
+                <a:solidFill>
+                  <a:srgbClr val="3182F6"/>
+                </a:solidFill>
+                <a:latin typeface="Arial" pitchFamily="34" charset="0"/>
+                <a:ea typeface="Arial" pitchFamily="34" charset="-122"/>
+                <a:cs typeface="Arial" pitchFamily="34" charset="-120"/>
+              </a:rPr>
+              <a:t>FLIT UNION</a:t>
+            </a:r>
+            <a:endParaRPr lang="en-US" sz="850" dirty="0"/>
+          </a:p>
+        </p:txBody>
+      </p:sp>
+      <p:sp>
+        <p:nvSpPr>
           <p:cNvPr id="5" name="Text 3"/>
           <p:cNvSpPr txBox="1"/>
           <p:nvPr/>
         </p:nvSpPr>
         <p:spPr>
           <a:xfrm>
-            <a:off x="3809848" y="932688"/>
-            <a:ext cx="4572000" cy="310896"/>
+            <a:off x="749808" y="548640"/>
+            <a:ext cx="6583680" cy="365760"/>
+          </a:xfrm>
+          <a:prstGeom prst="rect">
+            <a:avLst/>
+          </a:prstGeom>
+          <a:noFill/>
+          <a:ln/>
+        </p:spPr>
+        <p:txBody>
+          <a:bodyPr wrap="square" rtlCol="0" anchor="t"/>
+          <a:lstStyle/>
+          <a:p>
+            <a:pPr algn="l" indent="0" marL="0">
+              <a:buNone/>
+            </a:pPr>
+            <a:r>
+              <a:rPr lang="en-US" sz="2200" b="1" dirty="0">
+                <a:solidFill>
+                  <a:srgbClr val="0B1F44"/>
+                </a:solidFill>
+                <a:latin typeface="Malgun Gothic" pitchFamily="34" charset="0"/>
+                <a:ea typeface="Malgun Gothic" pitchFamily="34" charset="-122"/>
+                <a:cs typeface="Malgun Gothic" pitchFamily="34" charset="-120"/>
+              </a:rPr>
+              <a:t>플리마켓 셀러 품목</a:t>
+            </a:r>
+            <a:endParaRPr lang="en-US" sz="2200" dirty="0"/>
+          </a:p>
+        </p:txBody>
+      </p:sp>
+      <p:sp>
+        <p:nvSpPr>
+          <p:cNvPr id="6" name="Text 4"/>
+          <p:cNvSpPr txBox="1"/>
+          <p:nvPr/>
+        </p:nvSpPr>
+        <p:spPr>
+          <a:xfrm>
+            <a:off x="6869887" y="603504"/>
+            <a:ext cx="4754880" cy="274320"/>
+          </a:xfrm>
+          <a:prstGeom prst="rect">
+            <a:avLst/>
+          </a:prstGeom>
+          <a:noFill/>
+          <a:ln/>
+        </p:spPr>
+        <p:txBody>
+          <a:bodyPr wrap="square" rtlCol="0" anchor="t"/>
+          <a:lstStyle/>
+          <a:p>
+            <a:pPr algn="r" indent="0" marL="0">
+              <a:buNone/>
+            </a:pPr>
+            <a:r>
+              <a:rPr lang="en-US" sz="950" dirty="0">
+                <a:solidFill>
+                  <a:srgbClr val="5A6B85"/>
+                </a:solidFill>
+                <a:latin typeface="Malgun Gothic" pitchFamily="34" charset="0"/>
+                <a:ea typeface="Malgun Gothic" pitchFamily="34" charset="-122"/>
+                <a:cs typeface="Malgun Gothic" pitchFamily="34" charset="-120"/>
+              </a:rPr>
+              <a:t>보유 셀러가 많은 순 30종</a:t>
+            </a:r>
+            <a:endParaRPr lang="en-US" sz="950" dirty="0"/>
+          </a:p>
+        </p:txBody>
+      </p:sp>
+      <p:sp>
+        <p:nvSpPr>
+          <p:cNvPr id="7" name="Text 5"/>
+          <p:cNvSpPr txBox="1"/>
+          <p:nvPr/>
+        </p:nvSpPr>
+        <p:spPr>
+          <a:xfrm>
+            <a:off x="6869887" y="384048"/>
+            <a:ext cx="4754880" cy="219456"/>
           </a:xfrm>
           <a:prstGeom prst="rect">
             <a:avLst/>
@@ -2467,7 +3375,7 @@
           <a:bodyPr wrap="square" rtlCol="0" anchor="ctr"/>
           <a:lstStyle/>
           <a:p>
-            <a:pPr algn="ctr" indent="0" marL="0">
+            <a:pPr algn="r" indent="0" marL="0">
               <a:buNone/>
             </a:pPr>
             <a:r>
@@ -2475,19 +3383,85 @@
                 <a:solidFill>
                   <a:srgbClr val="0B1F44"/>
                 </a:solidFill>
-                <a:latin typeface="Malgun Gothic" pitchFamily="34" charset="0"/>
-                <a:ea typeface="Malgun Gothic" pitchFamily="34" charset="-122"/>
-                <a:cs typeface="Malgun Gothic" pitchFamily="34" charset="-120"/>
-              </a:rPr>
-              <a:t>· 10 ~ 18 ·</a:t>
+                <a:latin typeface="Arial" pitchFamily="34" charset="0"/>
+                <a:ea typeface="Arial" pitchFamily="34" charset="-122"/>
+                <a:cs typeface="Arial" pitchFamily="34" charset="-120"/>
+              </a:rPr>
+              <a:t>02</a:t>
+            </a:r>
+            <a:pPr algn="r" indent="0" marL="0">
+              <a:buNone/>
+            </a:pPr>
+            <a:r>
+              <a:rPr lang="en-US" sz="900" dirty="0">
+                <a:solidFill>
+                  <a:srgbClr val="A3B0C4"/>
+                </a:solidFill>
+                <a:latin typeface="Arial" pitchFamily="34" charset="0"/>
+                <a:ea typeface="Arial" pitchFamily="34" charset="-122"/>
+                <a:cs typeface="Arial" pitchFamily="34" charset="-120"/>
+              </a:rPr>
+              <a:t> / 04</a:t>
             </a:r>
             <a:endParaRPr lang="en-US" sz="1100" dirty="0"/>
           </a:p>
         </p:txBody>
+      </p:sp>
+      <p:sp>
+        <p:nvSpPr>
+          <p:cNvPr id="8" name="Shape 6"/>
+          <p:cNvSpPr/>
+          <p:nvPr/>
+        </p:nvSpPr>
+        <p:spPr>
+          <a:xfrm>
+            <a:off x="566928" y="1152144"/>
+            <a:ext cx="11057839" cy="10973"/>
+          </a:xfrm>
+          <a:prstGeom prst="rect">
+            <a:avLst/>
+          </a:prstGeom>
+          <a:solidFill>
+            <a:srgbClr val="E4EBF5"/>
+          </a:solidFill>
+          <a:ln w="12700">
+            <a:solidFill>
+              <a:srgbClr val="E4EBF5"/>
+            </a:solidFill>
+            <a:prstDash val="solid"/>
+          </a:ln>
+        </p:spPr>
+      </p:sp>
+      <p:sp>
+        <p:nvSpPr>
+          <p:cNvPr id="9" name="Shape 7"/>
+          <p:cNvSpPr/>
+          <p:nvPr/>
+        </p:nvSpPr>
+        <p:spPr>
+          <a:xfrm>
+            <a:off x="566928" y="1426464"/>
+            <a:ext cx="3527450" cy="1530096"/>
+          </a:xfrm>
+          <a:prstGeom prst="roundRect">
+            <a:avLst>
+              <a:gd name="adj" fmla="val 2988"/>
+            </a:avLst>
+          </a:prstGeom>
+          <a:solidFill>
+            <a:srgbClr val="FBFCFE"/>
+          </a:solidFill>
+          <a:ln w="9525">
+            <a:solidFill>
+              <a:srgbClr val="E4EBF5"/>
+            </a:solidFill>
+            <a:prstDash val="solid"/>
+          </a:ln>
+        </p:spPr>
       </p:sp>
       <p:pic>
         <p:nvPicPr>
-          <p:cNvPr id="6" name="Image 0" descr="/home/user/Flitunion/docs/photos/seller-items/doll.jpg">    </p:cNvPr>
+          <p:cNvPr id="10" name="Image 0" descr="/home/user/Flitunion/docs/photos/seller-items/doll.jpg">    </p:cNvPr>
           <p:cNvPicPr>
             <a:picLocks noChangeAspect="1"/>
           </p:cNvPicPr>
@@ -2501,8 +3475,8 @@
         </p:blipFill>
         <p:spPr>
           <a:xfrm>
-            <a:off x="457200" y="1443228"/>
-            <a:ext cx="1417320" cy="1417320"/>
+            <a:off x="685800" y="1545336"/>
+            <a:ext cx="1292352" cy="1292352"/>
           </a:xfrm>
           <a:prstGeom prst="rect">
             <a:avLst/>
@@ -2511,14 +3485,53 @@
       </p:pic>
       <p:sp>
         <p:nvSpPr>
-          <p:cNvPr id="7" name="Text 4"/>
-          <p:cNvSpPr txBox="1"/>
-          <p:nvPr/>
-        </p:nvSpPr>
-        <p:spPr>
-          <a:xfrm>
-            <a:off x="2020824" y="1443228"/>
-            <a:ext cx="2012594" cy="292608"/>
+          <p:cNvPr id="11" name="Text 8"/>
+          <p:cNvSpPr txBox="1"/>
+          <p:nvPr/>
+        </p:nvSpPr>
+        <p:spPr>
+          <a:xfrm>
+            <a:off x="2142744" y="1563624"/>
+            <a:ext cx="1805330" cy="164592"/>
+          </a:xfrm>
+          <a:prstGeom prst="rect">
+            <a:avLst/>
+          </a:prstGeom>
+          <a:noFill/>
+          <a:ln/>
+        </p:spPr>
+        <p:txBody>
+          <a:bodyPr wrap="square" rtlCol="0" anchor="ctr"/>
+          <a:lstStyle/>
+          <a:p>
+            <a:pPr algn="l" indent="0" marL="0">
+              <a:buNone/>
+            </a:pPr>
+            <a:r>
+              <a:rPr lang="en-US" sz="750" b="1" spc="100" kern="0" dirty="0">
+                <a:solidFill>
+                  <a:srgbClr val="3182F6"/>
+                </a:solidFill>
+                <a:latin typeface="Arial" pitchFamily="34" charset="0"/>
+                <a:ea typeface="Arial" pitchFamily="34" charset="-122"/>
+                <a:cs typeface="Arial" pitchFamily="34" charset="-120"/>
+              </a:rPr>
+              <a:t>10</a:t>
+            </a:r>
+            <a:endParaRPr lang="en-US" sz="750" dirty="0"/>
+          </a:p>
+        </p:txBody>
+      </p:sp>
+      <p:sp>
+        <p:nvSpPr>
+          <p:cNvPr id="12" name="Text 9"/>
+          <p:cNvSpPr txBox="1"/>
+          <p:nvPr/>
+        </p:nvSpPr>
+        <p:spPr>
+          <a:xfrm>
+            <a:off x="2142744" y="1728216"/>
+            <a:ext cx="1805330" cy="274320"/>
           </a:xfrm>
           <a:prstGeom prst="rect">
             <a:avLst/>
@@ -2534,9 +3547,9 @@
               <a:buNone/>
             </a:pPr>
             <a:r>
-              <a:rPr lang="en-US" sz="1300" b="1" dirty="0">
-                <a:solidFill>
-                  <a:srgbClr val="0F172A"/>
+              <a:rPr lang="en-US" sz="1250" b="1" dirty="0">
+                <a:solidFill>
+                  <a:srgbClr val="101828"/>
                 </a:solidFill>
                 <a:latin typeface="Malgun Gothic" pitchFamily="34" charset="0"/>
                 <a:ea typeface="Malgun Gothic" pitchFamily="34" charset="-122"/>
@@ -2544,20 +3557,34 @@
               </a:rPr>
               <a:t>인형</a:t>
             </a:r>
-            <a:endParaRPr lang="en-US" sz="1300" dirty="0"/>
-          </a:p>
-        </p:txBody>
-      </p:sp>
-      <p:sp>
-        <p:nvSpPr>
-          <p:cNvPr id="8" name="Text 5"/>
-          <p:cNvSpPr txBox="1"/>
-          <p:nvPr/>
-        </p:nvSpPr>
-        <p:spPr>
-          <a:xfrm>
-            <a:off x="2020824" y="1735836"/>
-            <a:ext cx="2012594" cy="1124712"/>
+            <a:pPr algn="l" indent="0" marL="0">
+              <a:buNone/>
+            </a:pPr>
+            <a:r>
+              <a:rPr lang="en-US" sz="800" b="1" dirty="0">
+                <a:solidFill>
+                  <a:srgbClr val="3182F6"/>
+                </a:solidFill>
+                <a:latin typeface="Malgun Gothic" pitchFamily="34" charset="0"/>
+                <a:ea typeface="Malgun Gothic" pitchFamily="34" charset="-122"/>
+                <a:cs typeface="Malgun Gothic" pitchFamily="34" charset="-120"/>
+              </a:rPr>
+              <a:t>   6곳</a:t>
+            </a:r>
+            <a:endParaRPr lang="en-US" sz="1250" dirty="0"/>
+          </a:p>
+        </p:txBody>
+      </p:sp>
+      <p:sp>
+        <p:nvSpPr>
+          <p:cNvPr id="13" name="Text 10"/>
+          <p:cNvSpPr txBox="1"/>
+          <p:nvPr/>
+        </p:nvSpPr>
+        <p:spPr>
+          <a:xfrm>
+            <a:off x="2142744" y="2020824"/>
+            <a:ext cx="1805330" cy="816864"/>
           </a:xfrm>
           <a:prstGeom prst="rect">
             <a:avLst/>
@@ -2571,28 +3598,55 @@
           <a:p>
             <a:pPr algn="l" indent="0" marL="0">
               <a:lnSpc>
-                <a:spcPct val="120000"/>
+                <a:spcPct val="122000"/>
               </a:lnSpc>
               <a:buNone/>
             </a:pPr>
             <a:r>
               <a:rPr lang="en-US" sz="800" dirty="0">
                 <a:solidFill>
-                  <a:srgbClr val="475569"/>
-                </a:solidFill>
-                <a:latin typeface="Malgun Gothic" pitchFamily="34" charset="0"/>
-                <a:ea typeface="Malgun Gothic" pitchFamily="34" charset="-122"/>
-                <a:cs typeface="Malgun Gothic" pitchFamily="34" charset="-120"/>
-              </a:rPr>
-              <a:t>6곳 — 모루인형, 수공예 인형, 털모찌, 1:1 맞춤 제작 인형</a:t>
+                  <a:srgbClr val="5A6B85"/>
+                </a:solidFill>
+                <a:latin typeface="Malgun Gothic" pitchFamily="34" charset="0"/>
+                <a:ea typeface="Malgun Gothic" pitchFamily="34" charset="-122"/>
+                <a:cs typeface="Malgun Gothic" pitchFamily="34" charset="-120"/>
+              </a:rPr>
+              <a:t>모루인형, 수공예 인형, 털모찌, 1:1 맞춤 제작 인형</a:t>
             </a:r>
             <a:endParaRPr lang="en-US" sz="800" dirty="0"/>
           </a:p>
         </p:txBody>
+      </p:sp>
+      <p:sp>
+        <p:nvSpPr>
+          <p:cNvPr id="14" name="Shape 11"/>
+          <p:cNvSpPr/>
+          <p:nvPr/>
+        </p:nvSpPr>
+        <p:spPr>
+          <a:xfrm>
+            <a:off x="4332122" y="1426464"/>
+            <a:ext cx="3527450" cy="1530096"/>
+          </a:xfrm>
+          <a:prstGeom prst="roundRect">
+            <a:avLst>
+              <a:gd name="adj" fmla="val 2988"/>
+            </a:avLst>
+          </a:prstGeom>
+          <a:solidFill>
+            <a:srgbClr val="FBFCFE"/>
+          </a:solidFill>
+          <a:ln w="9525">
+            <a:solidFill>
+              <a:srgbClr val="E4EBF5"/>
+            </a:solidFill>
+            <a:prstDash val="solid"/>
+          </a:ln>
+        </p:spPr>
       </p:sp>
       <p:pic>
         <p:nvPicPr>
-          <p:cNvPr id="9" name="Image 1" descr="/home/user/Flitunion/docs/photos/seller-items/beads.jpg">    </p:cNvPr>
+          <p:cNvPr id="15" name="Image 1" descr="/home/user/Flitunion/docs/photos/seller-items/beads.jpg">    </p:cNvPr>
           <p:cNvPicPr>
             <a:picLocks noChangeAspect="1"/>
           </p:cNvPicPr>
@@ -2606,8 +3660,8 @@
         </p:blipFill>
         <p:spPr>
           <a:xfrm>
-            <a:off x="4307738" y="1443228"/>
-            <a:ext cx="1417320" cy="1417320"/>
+            <a:off x="4450994" y="1545336"/>
+            <a:ext cx="1292352" cy="1292352"/>
           </a:xfrm>
           <a:prstGeom prst="rect">
             <a:avLst/>
@@ -2616,14 +3670,53 @@
       </p:pic>
       <p:sp>
         <p:nvSpPr>
-          <p:cNvPr id="10" name="Text 6"/>
-          <p:cNvSpPr txBox="1"/>
-          <p:nvPr/>
-        </p:nvSpPr>
-        <p:spPr>
-          <a:xfrm>
-            <a:off x="5871362" y="1443228"/>
-            <a:ext cx="2012594" cy="292608"/>
+          <p:cNvPr id="16" name="Text 12"/>
+          <p:cNvSpPr txBox="1"/>
+          <p:nvPr/>
+        </p:nvSpPr>
+        <p:spPr>
+          <a:xfrm>
+            <a:off x="5907938" y="1563624"/>
+            <a:ext cx="1805330" cy="164592"/>
+          </a:xfrm>
+          <a:prstGeom prst="rect">
+            <a:avLst/>
+          </a:prstGeom>
+          <a:noFill/>
+          <a:ln/>
+        </p:spPr>
+        <p:txBody>
+          <a:bodyPr wrap="square" rtlCol="0" anchor="ctr"/>
+          <a:lstStyle/>
+          <a:p>
+            <a:pPr algn="l" indent="0" marL="0">
+              <a:buNone/>
+            </a:pPr>
+            <a:r>
+              <a:rPr lang="en-US" sz="750" b="1" spc="100" kern="0" dirty="0">
+                <a:solidFill>
+                  <a:srgbClr val="3182F6"/>
+                </a:solidFill>
+                <a:latin typeface="Arial" pitchFamily="34" charset="0"/>
+                <a:ea typeface="Arial" pitchFamily="34" charset="-122"/>
+                <a:cs typeface="Arial" pitchFamily="34" charset="-120"/>
+              </a:rPr>
+              <a:t>11</a:t>
+            </a:r>
+            <a:endParaRPr lang="en-US" sz="750" dirty="0"/>
+          </a:p>
+        </p:txBody>
+      </p:sp>
+      <p:sp>
+        <p:nvSpPr>
+          <p:cNvPr id="17" name="Text 13"/>
+          <p:cNvSpPr txBox="1"/>
+          <p:nvPr/>
+        </p:nvSpPr>
+        <p:spPr>
+          <a:xfrm>
+            <a:off x="5907938" y="1728216"/>
+            <a:ext cx="1805330" cy="274320"/>
           </a:xfrm>
           <a:prstGeom prst="rect">
             <a:avLst/>
@@ -2639,9 +3732,9 @@
               <a:buNone/>
             </a:pPr>
             <a:r>
-              <a:rPr lang="en-US" sz="1300" b="1" dirty="0">
-                <a:solidFill>
-                  <a:srgbClr val="0F172A"/>
+              <a:rPr lang="en-US" sz="1250" b="1" dirty="0">
+                <a:solidFill>
+                  <a:srgbClr val="101828"/>
                 </a:solidFill>
                 <a:latin typeface="Malgun Gothic" pitchFamily="34" charset="0"/>
                 <a:ea typeface="Malgun Gothic" pitchFamily="34" charset="-122"/>
@@ -2649,20 +3742,34 @@
               </a:rPr>
               <a:t>비즈 · 볼펜꾸미기</a:t>
             </a:r>
-            <a:endParaRPr lang="en-US" sz="1300" dirty="0"/>
-          </a:p>
-        </p:txBody>
-      </p:sp>
-      <p:sp>
-        <p:nvSpPr>
-          <p:cNvPr id="11" name="Text 7"/>
-          <p:cNvSpPr txBox="1"/>
-          <p:nvPr/>
-        </p:nvSpPr>
-        <p:spPr>
-          <a:xfrm>
-            <a:off x="5871362" y="1735836"/>
-            <a:ext cx="2012594" cy="1124712"/>
+            <a:pPr algn="l" indent="0" marL="0">
+              <a:buNone/>
+            </a:pPr>
+            <a:r>
+              <a:rPr lang="en-US" sz="800" b="1" dirty="0">
+                <a:solidFill>
+                  <a:srgbClr val="3182F6"/>
+                </a:solidFill>
+                <a:latin typeface="Malgun Gothic" pitchFamily="34" charset="0"/>
+                <a:ea typeface="Malgun Gothic" pitchFamily="34" charset="-122"/>
+                <a:cs typeface="Malgun Gothic" pitchFamily="34" charset="-120"/>
+              </a:rPr>
+              <a:t>   5곳</a:t>
+            </a:r>
+            <a:endParaRPr lang="en-US" sz="1250" dirty="0"/>
+          </a:p>
+        </p:txBody>
+      </p:sp>
+      <p:sp>
+        <p:nvSpPr>
+          <p:cNvPr id="18" name="Text 14"/>
+          <p:cNvSpPr txBox="1"/>
+          <p:nvPr/>
+        </p:nvSpPr>
+        <p:spPr>
+          <a:xfrm>
+            <a:off x="5907938" y="2020824"/>
+            <a:ext cx="1805330" cy="816864"/>
           </a:xfrm>
           <a:prstGeom prst="rect">
             <a:avLst/>
@@ -2676,28 +3783,55 @@
           <a:p>
             <a:pPr algn="l" indent="0" marL="0">
               <a:lnSpc>
-                <a:spcPct val="120000"/>
+                <a:spcPct val="122000"/>
               </a:lnSpc>
               <a:buNone/>
             </a:pPr>
             <a:r>
               <a:rPr lang="en-US" sz="800" dirty="0">
                 <a:solidFill>
-                  <a:srgbClr val="475569"/>
-                </a:solidFill>
-                <a:latin typeface="Malgun Gothic" pitchFamily="34" charset="0"/>
-                <a:ea typeface="Malgun Gothic" pitchFamily="34" charset="-122"/>
-                <a:cs typeface="Malgun Gothic" pitchFamily="34" charset="-120"/>
-              </a:rPr>
-              <a:t>5곳 — 비즈 악세사리, 비즈 볼펜, 네잎클로버·꽃 비즈 소품</a:t>
+                  <a:srgbClr val="5A6B85"/>
+                </a:solidFill>
+                <a:latin typeface="Malgun Gothic" pitchFamily="34" charset="0"/>
+                <a:ea typeface="Malgun Gothic" pitchFamily="34" charset="-122"/>
+                <a:cs typeface="Malgun Gothic" pitchFamily="34" charset="-120"/>
+              </a:rPr>
+              <a:t>비즈 악세사리, 비즈 볼펜, 네잎클로버·꽃 비즈 소품</a:t>
             </a:r>
             <a:endParaRPr lang="en-US" sz="800" dirty="0"/>
           </a:p>
         </p:txBody>
+      </p:sp>
+      <p:sp>
+        <p:nvSpPr>
+          <p:cNvPr id="19" name="Shape 15"/>
+          <p:cNvSpPr/>
+          <p:nvPr/>
+        </p:nvSpPr>
+        <p:spPr>
+          <a:xfrm>
+            <a:off x="8097317" y="1426464"/>
+            <a:ext cx="3527450" cy="1530096"/>
+          </a:xfrm>
+          <a:prstGeom prst="roundRect">
+            <a:avLst>
+              <a:gd name="adj" fmla="val 2988"/>
+            </a:avLst>
+          </a:prstGeom>
+          <a:solidFill>
+            <a:srgbClr val="FBFCFE"/>
+          </a:solidFill>
+          <a:ln w="9525">
+            <a:solidFill>
+              <a:srgbClr val="E4EBF5"/>
+            </a:solidFill>
+            <a:prstDash val="solid"/>
+          </a:ln>
+        </p:spPr>
       </p:sp>
       <p:pic>
         <p:nvPicPr>
-          <p:cNvPr id="12" name="Image 2" descr="/home/user/Flitunion/docs/photos/seller-items/candle.jpg">    </p:cNvPr>
+          <p:cNvPr id="20" name="Image 2" descr="/home/user/Flitunion/docs/photos/seller-items/candle.jpg">    </p:cNvPr>
           <p:cNvPicPr>
             <a:picLocks noChangeAspect="1"/>
           </p:cNvPicPr>
@@ -2711,8 +3845,8 @@
         </p:blipFill>
         <p:spPr>
           <a:xfrm>
-            <a:off x="8158277" y="1443228"/>
-            <a:ext cx="1417320" cy="1417320"/>
+            <a:off x="8216189" y="1545336"/>
+            <a:ext cx="1292352" cy="1292352"/>
           </a:xfrm>
           <a:prstGeom prst="rect">
             <a:avLst/>
@@ -2721,14 +3855,53 @@
       </p:pic>
       <p:sp>
         <p:nvSpPr>
-          <p:cNvPr id="13" name="Text 8"/>
-          <p:cNvSpPr txBox="1"/>
-          <p:nvPr/>
-        </p:nvSpPr>
-        <p:spPr>
-          <a:xfrm>
-            <a:off x="9721901" y="1443228"/>
-            <a:ext cx="2012594" cy="292608"/>
+          <p:cNvPr id="21" name="Text 16"/>
+          <p:cNvSpPr txBox="1"/>
+          <p:nvPr/>
+        </p:nvSpPr>
+        <p:spPr>
+          <a:xfrm>
+            <a:off x="9673133" y="1563624"/>
+            <a:ext cx="1805330" cy="164592"/>
+          </a:xfrm>
+          <a:prstGeom prst="rect">
+            <a:avLst/>
+          </a:prstGeom>
+          <a:noFill/>
+          <a:ln/>
+        </p:spPr>
+        <p:txBody>
+          <a:bodyPr wrap="square" rtlCol="0" anchor="ctr"/>
+          <a:lstStyle/>
+          <a:p>
+            <a:pPr algn="l" indent="0" marL="0">
+              <a:buNone/>
+            </a:pPr>
+            <a:r>
+              <a:rPr lang="en-US" sz="750" b="1" spc="100" kern="0" dirty="0">
+                <a:solidFill>
+                  <a:srgbClr val="3182F6"/>
+                </a:solidFill>
+                <a:latin typeface="Arial" pitchFamily="34" charset="0"/>
+                <a:ea typeface="Arial" pitchFamily="34" charset="-122"/>
+                <a:cs typeface="Arial" pitchFamily="34" charset="-120"/>
+              </a:rPr>
+              <a:t>12</a:t>
+            </a:r>
+            <a:endParaRPr lang="en-US" sz="750" dirty="0"/>
+          </a:p>
+        </p:txBody>
+      </p:sp>
+      <p:sp>
+        <p:nvSpPr>
+          <p:cNvPr id="22" name="Text 17"/>
+          <p:cNvSpPr txBox="1"/>
+          <p:nvPr/>
+        </p:nvSpPr>
+        <p:spPr>
+          <a:xfrm>
+            <a:off x="9673133" y="1728216"/>
+            <a:ext cx="1805330" cy="274320"/>
           </a:xfrm>
           <a:prstGeom prst="rect">
             <a:avLst/>
@@ -2744,9 +3917,9 @@
               <a:buNone/>
             </a:pPr>
             <a:r>
-              <a:rPr lang="en-US" sz="1300" b="1" dirty="0">
-                <a:solidFill>
-                  <a:srgbClr val="0F172A"/>
+              <a:rPr lang="en-US" sz="1250" b="1" dirty="0">
+                <a:solidFill>
+                  <a:srgbClr val="101828"/>
                 </a:solidFill>
                 <a:latin typeface="Malgun Gothic" pitchFamily="34" charset="0"/>
                 <a:ea typeface="Malgun Gothic" pitchFamily="34" charset="-122"/>
@@ -2754,20 +3927,34 @@
               </a:rPr>
               <a:t>캔들 · 방향제</a:t>
             </a:r>
-            <a:endParaRPr lang="en-US" sz="1300" dirty="0"/>
-          </a:p>
-        </p:txBody>
-      </p:sp>
-      <p:sp>
-        <p:nvSpPr>
-          <p:cNvPr id="14" name="Text 9"/>
-          <p:cNvSpPr txBox="1"/>
-          <p:nvPr/>
-        </p:nvSpPr>
-        <p:spPr>
-          <a:xfrm>
-            <a:off x="9721901" y="1735836"/>
-            <a:ext cx="2012594" cy="1124712"/>
+            <a:pPr algn="l" indent="0" marL="0">
+              <a:buNone/>
+            </a:pPr>
+            <a:r>
+              <a:rPr lang="en-US" sz="800" b="1" dirty="0">
+                <a:solidFill>
+                  <a:srgbClr val="3182F6"/>
+                </a:solidFill>
+                <a:latin typeface="Malgun Gothic" pitchFamily="34" charset="0"/>
+                <a:ea typeface="Malgun Gothic" pitchFamily="34" charset="-122"/>
+                <a:cs typeface="Malgun Gothic" pitchFamily="34" charset="-120"/>
+              </a:rPr>
+              <a:t>   5곳</a:t>
+            </a:r>
+            <a:endParaRPr lang="en-US" sz="1250" dirty="0"/>
+          </a:p>
+        </p:txBody>
+      </p:sp>
+      <p:sp>
+        <p:nvSpPr>
+          <p:cNvPr id="23" name="Text 18"/>
+          <p:cNvSpPr txBox="1"/>
+          <p:nvPr/>
+        </p:nvSpPr>
+        <p:spPr>
+          <a:xfrm>
+            <a:off x="9673133" y="2020824"/>
+            <a:ext cx="1805330" cy="816864"/>
           </a:xfrm>
           <a:prstGeom prst="rect">
             <a:avLst/>
@@ -2781,28 +3968,55 @@
           <a:p>
             <a:pPr algn="l" indent="0" marL="0">
               <a:lnSpc>
-                <a:spcPct val="120000"/>
+                <a:spcPct val="122000"/>
               </a:lnSpc>
               <a:buNone/>
             </a:pPr>
             <a:r>
               <a:rPr lang="en-US" sz="800" dirty="0">
                 <a:solidFill>
-                  <a:srgbClr val="475569"/>
-                </a:solidFill>
-                <a:latin typeface="Malgun Gothic" pitchFamily="34" charset="0"/>
-                <a:ea typeface="Malgun Gothic" pitchFamily="34" charset="-122"/>
-                <a:cs typeface="Malgun Gothic" pitchFamily="34" charset="-120"/>
-              </a:rPr>
-              <a:t>5곳 — 소이캔들, 디퓨저, 석고 방향제, 차량용 방향제</a:t>
+                  <a:srgbClr val="5A6B85"/>
+                </a:solidFill>
+                <a:latin typeface="Malgun Gothic" pitchFamily="34" charset="0"/>
+                <a:ea typeface="Malgun Gothic" pitchFamily="34" charset="-122"/>
+                <a:cs typeface="Malgun Gothic" pitchFamily="34" charset="-120"/>
+              </a:rPr>
+              <a:t>소이캔들, 디퓨저, 석고 방향제, 차량용 방향제</a:t>
             </a:r>
             <a:endParaRPr lang="en-US" sz="800" dirty="0"/>
           </a:p>
         </p:txBody>
+      </p:sp>
+      <p:sp>
+        <p:nvSpPr>
+          <p:cNvPr id="24" name="Shape 19"/>
+          <p:cNvSpPr/>
+          <p:nvPr/>
+        </p:nvSpPr>
+        <p:spPr>
+          <a:xfrm>
+            <a:off x="566928" y="3139440"/>
+            <a:ext cx="3527450" cy="1530096"/>
+          </a:xfrm>
+          <a:prstGeom prst="roundRect">
+            <a:avLst>
+              <a:gd name="adj" fmla="val 2988"/>
+            </a:avLst>
+          </a:prstGeom>
+          <a:solidFill>
+            <a:srgbClr val="FBFCFE"/>
+          </a:solidFill>
+          <a:ln w="9525">
+            <a:solidFill>
+              <a:srgbClr val="E4EBF5"/>
+            </a:solidFill>
+            <a:prstDash val="solid"/>
+          </a:ln>
+        </p:spPr>
       </p:sp>
       <p:pic>
         <p:nvPicPr>
-          <p:cNvPr id="15" name="Image 3" descr="/home/user/Flitunion/docs/photos/seller-items/farm.jpg">    </p:cNvPr>
+          <p:cNvPr id="25" name="Image 3" descr="/home/user/Flitunion/docs/photos/seller-items/farm.jpg">    </p:cNvPr>
           <p:cNvPicPr>
             <a:picLocks noChangeAspect="1"/>
           </p:cNvPicPr>
@@ -2816,8 +4030,8 @@
         </p:blipFill>
         <p:spPr>
           <a:xfrm>
-            <a:off x="457200" y="3204972"/>
-            <a:ext cx="1417320" cy="1417320"/>
+            <a:off x="685800" y="3258312"/>
+            <a:ext cx="1292352" cy="1292352"/>
           </a:xfrm>
           <a:prstGeom prst="rect">
             <a:avLst/>
@@ -2826,14 +4040,53 @@
       </p:pic>
       <p:sp>
         <p:nvSpPr>
-          <p:cNvPr id="16" name="Text 10"/>
-          <p:cNvSpPr txBox="1"/>
-          <p:nvPr/>
-        </p:nvSpPr>
-        <p:spPr>
-          <a:xfrm>
-            <a:off x="2020824" y="3204972"/>
-            <a:ext cx="2012594" cy="292608"/>
+          <p:cNvPr id="26" name="Text 20"/>
+          <p:cNvSpPr txBox="1"/>
+          <p:nvPr/>
+        </p:nvSpPr>
+        <p:spPr>
+          <a:xfrm>
+            <a:off x="2142744" y="3276600"/>
+            <a:ext cx="1805330" cy="164592"/>
+          </a:xfrm>
+          <a:prstGeom prst="rect">
+            <a:avLst/>
+          </a:prstGeom>
+          <a:noFill/>
+          <a:ln/>
+        </p:spPr>
+        <p:txBody>
+          <a:bodyPr wrap="square" rtlCol="0" anchor="ctr"/>
+          <a:lstStyle/>
+          <a:p>
+            <a:pPr algn="l" indent="0" marL="0">
+              <a:buNone/>
+            </a:pPr>
+            <a:r>
+              <a:rPr lang="en-US" sz="750" b="1" spc="100" kern="0" dirty="0">
+                <a:solidFill>
+                  <a:srgbClr val="3182F6"/>
+                </a:solidFill>
+                <a:latin typeface="Arial" pitchFamily="34" charset="0"/>
+                <a:ea typeface="Arial" pitchFamily="34" charset="-122"/>
+                <a:cs typeface="Arial" pitchFamily="34" charset="-120"/>
+              </a:rPr>
+              <a:t>13</a:t>
+            </a:r>
+            <a:endParaRPr lang="en-US" sz="750" dirty="0"/>
+          </a:p>
+        </p:txBody>
+      </p:sp>
+      <p:sp>
+        <p:nvSpPr>
+          <p:cNvPr id="27" name="Text 21"/>
+          <p:cNvSpPr txBox="1"/>
+          <p:nvPr/>
+        </p:nvSpPr>
+        <p:spPr>
+          <a:xfrm>
+            <a:off x="2142744" y="3441192"/>
+            <a:ext cx="1805330" cy="274320"/>
           </a:xfrm>
           <a:prstGeom prst="rect">
             <a:avLst/>
@@ -2849,9 +4102,9 @@
               <a:buNone/>
             </a:pPr>
             <a:r>
-              <a:rPr lang="en-US" sz="1300" b="1" dirty="0">
-                <a:solidFill>
-                  <a:srgbClr val="0F172A"/>
+              <a:rPr lang="en-US" sz="1250" b="1" dirty="0">
+                <a:solidFill>
+                  <a:srgbClr val="101828"/>
                 </a:solidFill>
                 <a:latin typeface="Malgun Gothic" pitchFamily="34" charset="0"/>
                 <a:ea typeface="Malgun Gothic" pitchFamily="34" charset="-122"/>
@@ -2859,20 +4112,34 @@
               </a:rPr>
               <a:t>농산물 · 특산물</a:t>
             </a:r>
-            <a:endParaRPr lang="en-US" sz="1300" dirty="0"/>
-          </a:p>
-        </p:txBody>
-      </p:sp>
-      <p:sp>
-        <p:nvSpPr>
-          <p:cNvPr id="17" name="Text 11"/>
-          <p:cNvSpPr txBox="1"/>
-          <p:nvPr/>
-        </p:nvSpPr>
-        <p:spPr>
-          <a:xfrm>
-            <a:off x="2020824" y="3497580"/>
-            <a:ext cx="2012594" cy="1124712"/>
+            <a:pPr algn="l" indent="0" marL="0">
+              <a:buNone/>
+            </a:pPr>
+            <a:r>
+              <a:rPr lang="en-US" sz="800" b="1" dirty="0">
+                <a:solidFill>
+                  <a:srgbClr val="3182F6"/>
+                </a:solidFill>
+                <a:latin typeface="Malgun Gothic" pitchFamily="34" charset="0"/>
+                <a:ea typeface="Malgun Gothic" pitchFamily="34" charset="-122"/>
+                <a:cs typeface="Malgun Gothic" pitchFamily="34" charset="-120"/>
+              </a:rPr>
+              <a:t>   5곳</a:t>
+            </a:r>
+            <a:endParaRPr lang="en-US" sz="1250" dirty="0"/>
+          </a:p>
+        </p:txBody>
+      </p:sp>
+      <p:sp>
+        <p:nvSpPr>
+          <p:cNvPr id="28" name="Text 22"/>
+          <p:cNvSpPr txBox="1"/>
+          <p:nvPr/>
+        </p:nvSpPr>
+        <p:spPr>
+          <a:xfrm>
+            <a:off x="2142744" y="3733800"/>
+            <a:ext cx="1805330" cy="816864"/>
           </a:xfrm>
           <a:prstGeom prst="rect">
             <a:avLst/>
@@ -2886,28 +4153,55 @@
           <a:p>
             <a:pPr algn="l" indent="0" marL="0">
               <a:lnSpc>
-                <a:spcPct val="120000"/>
+                <a:spcPct val="122000"/>
               </a:lnSpc>
               <a:buNone/>
             </a:pPr>
             <a:r>
               <a:rPr lang="en-US" sz="800" dirty="0">
                 <a:solidFill>
-                  <a:srgbClr val="475569"/>
-                </a:solidFill>
-                <a:latin typeface="Malgun Gothic" pitchFamily="34" charset="0"/>
-                <a:ea typeface="Malgun Gothic" pitchFamily="34" charset="-122"/>
-                <a:cs typeface="Malgun Gothic" pitchFamily="34" charset="-120"/>
-              </a:rPr>
-              <a:t>5곳 — 지역 과일, 건어물, 반건조 오징어, 한우. 지역 축제에서 현지 농가와 함께 구성</a:t>
+                  <a:srgbClr val="5A6B85"/>
+                </a:solidFill>
+                <a:latin typeface="Malgun Gothic" pitchFamily="34" charset="0"/>
+                <a:ea typeface="Malgun Gothic" pitchFamily="34" charset="-122"/>
+                <a:cs typeface="Malgun Gothic" pitchFamily="34" charset="-120"/>
+              </a:rPr>
+              <a:t>지역 과일, 건어물, 반건조 오징어, 한우. 지역 축제에서 현지 농가와 함께 구성</a:t>
             </a:r>
             <a:endParaRPr lang="en-US" sz="800" dirty="0"/>
           </a:p>
         </p:txBody>
+      </p:sp>
+      <p:sp>
+        <p:nvSpPr>
+          <p:cNvPr id="29" name="Shape 23"/>
+          <p:cNvSpPr/>
+          <p:nvPr/>
+        </p:nvSpPr>
+        <p:spPr>
+          <a:xfrm>
+            <a:off x="4332122" y="3139440"/>
+            <a:ext cx="3527450" cy="1530096"/>
+          </a:xfrm>
+          <a:prstGeom prst="roundRect">
+            <a:avLst>
+              <a:gd name="adj" fmla="val 2988"/>
+            </a:avLst>
+          </a:prstGeom>
+          <a:solidFill>
+            <a:srgbClr val="FBFCFE"/>
+          </a:solidFill>
+          <a:ln w="9525">
+            <a:solidFill>
+              <a:srgbClr val="E4EBF5"/>
+            </a:solidFill>
+            <a:prstDash val="solid"/>
+          </a:ln>
+        </p:spPr>
       </p:sp>
       <p:pic>
         <p:nvPicPr>
-          <p:cNvPr id="18" name="Image 4" descr="/home/user/Flitunion/docs/photos/seller-items/kids.jpg">    </p:cNvPr>
+          <p:cNvPr id="30" name="Image 4" descr="/home/user/Flitunion/docs/photos/seller-items/kids.jpg">    </p:cNvPr>
           <p:cNvPicPr>
             <a:picLocks noChangeAspect="1"/>
           </p:cNvPicPr>
@@ -2921,8 +4215,8 @@
         </p:blipFill>
         <p:spPr>
           <a:xfrm>
-            <a:off x="4307738" y="3204972"/>
-            <a:ext cx="1417320" cy="1417320"/>
+            <a:off x="4450994" y="3258312"/>
+            <a:ext cx="1292352" cy="1292352"/>
           </a:xfrm>
           <a:prstGeom prst="rect">
             <a:avLst/>
@@ -2931,14 +4225,53 @@
       </p:pic>
       <p:sp>
         <p:nvSpPr>
-          <p:cNvPr id="19" name="Text 12"/>
-          <p:cNvSpPr txBox="1"/>
-          <p:nvPr/>
-        </p:nvSpPr>
-        <p:spPr>
-          <a:xfrm>
-            <a:off x="5871362" y="3204972"/>
-            <a:ext cx="2012594" cy="292608"/>
+          <p:cNvPr id="31" name="Text 24"/>
+          <p:cNvSpPr txBox="1"/>
+          <p:nvPr/>
+        </p:nvSpPr>
+        <p:spPr>
+          <a:xfrm>
+            <a:off x="5907938" y="3276600"/>
+            <a:ext cx="1805330" cy="164592"/>
+          </a:xfrm>
+          <a:prstGeom prst="rect">
+            <a:avLst/>
+          </a:prstGeom>
+          <a:noFill/>
+          <a:ln/>
+        </p:spPr>
+        <p:txBody>
+          <a:bodyPr wrap="square" rtlCol="0" anchor="ctr"/>
+          <a:lstStyle/>
+          <a:p>
+            <a:pPr algn="l" indent="0" marL="0">
+              <a:buNone/>
+            </a:pPr>
+            <a:r>
+              <a:rPr lang="en-US" sz="750" b="1" spc="100" kern="0" dirty="0">
+                <a:solidFill>
+                  <a:srgbClr val="3182F6"/>
+                </a:solidFill>
+                <a:latin typeface="Arial" pitchFamily="34" charset="0"/>
+                <a:ea typeface="Arial" pitchFamily="34" charset="-122"/>
+                <a:cs typeface="Arial" pitchFamily="34" charset="-120"/>
+              </a:rPr>
+              <a:t>14</a:t>
+            </a:r>
+            <a:endParaRPr lang="en-US" sz="750" dirty="0"/>
+          </a:p>
+        </p:txBody>
+      </p:sp>
+      <p:sp>
+        <p:nvSpPr>
+          <p:cNvPr id="32" name="Text 25"/>
+          <p:cNvSpPr txBox="1"/>
+          <p:nvPr/>
+        </p:nvSpPr>
+        <p:spPr>
+          <a:xfrm>
+            <a:off x="5907938" y="3441192"/>
+            <a:ext cx="1805330" cy="274320"/>
           </a:xfrm>
           <a:prstGeom prst="rect">
             <a:avLst/>
@@ -2954,9 +4287,9 @@
               <a:buNone/>
             </a:pPr>
             <a:r>
-              <a:rPr lang="en-US" sz="1300" b="1" dirty="0">
-                <a:solidFill>
-                  <a:srgbClr val="0F172A"/>
+              <a:rPr lang="en-US" sz="1250" b="1" dirty="0">
+                <a:solidFill>
+                  <a:srgbClr val="101828"/>
                 </a:solidFill>
                 <a:latin typeface="Malgun Gothic" pitchFamily="34" charset="0"/>
                 <a:ea typeface="Malgun Gothic" pitchFamily="34" charset="-122"/>
@@ -2964,20 +4297,34 @@
               </a:rPr>
               <a:t>키즈</a:t>
             </a:r>
-            <a:endParaRPr lang="en-US" sz="1300" dirty="0"/>
-          </a:p>
-        </p:txBody>
-      </p:sp>
-      <p:sp>
-        <p:nvSpPr>
-          <p:cNvPr id="20" name="Text 13"/>
-          <p:cNvSpPr txBox="1"/>
-          <p:nvPr/>
-        </p:nvSpPr>
-        <p:spPr>
-          <a:xfrm>
-            <a:off x="5871362" y="3497580"/>
-            <a:ext cx="2012594" cy="1124712"/>
+            <a:pPr algn="l" indent="0" marL="0">
+              <a:buNone/>
+            </a:pPr>
+            <a:r>
+              <a:rPr lang="en-US" sz="800" b="1" dirty="0">
+                <a:solidFill>
+                  <a:srgbClr val="3182F6"/>
+                </a:solidFill>
+                <a:latin typeface="Malgun Gothic" pitchFamily="34" charset="0"/>
+                <a:ea typeface="Malgun Gothic" pitchFamily="34" charset="-122"/>
+                <a:cs typeface="Malgun Gothic" pitchFamily="34" charset="-120"/>
+              </a:rPr>
+              <a:t>   5곳</a:t>
+            </a:r>
+            <a:endParaRPr lang="en-US" sz="1250" dirty="0"/>
+          </a:p>
+        </p:txBody>
+      </p:sp>
+      <p:sp>
+        <p:nvSpPr>
+          <p:cNvPr id="33" name="Text 26"/>
+          <p:cNvSpPr txBox="1"/>
+          <p:nvPr/>
+        </p:nvSpPr>
+        <p:spPr>
+          <a:xfrm>
+            <a:off x="5907938" y="3733800"/>
+            <a:ext cx="1805330" cy="816864"/>
           </a:xfrm>
           <a:prstGeom prst="rect">
             <a:avLst/>
@@ -2991,28 +4338,55 @@
           <a:p>
             <a:pPr algn="l" indent="0" marL="0">
               <a:lnSpc>
-                <a:spcPct val="120000"/>
+                <a:spcPct val="122000"/>
               </a:lnSpc>
               <a:buNone/>
             </a:pPr>
             <a:r>
               <a:rPr lang="en-US" sz="800" dirty="0">
                 <a:solidFill>
-                  <a:srgbClr val="475569"/>
-                </a:solidFill>
-                <a:latin typeface="Malgun Gothic" pitchFamily="34" charset="0"/>
-                <a:ea typeface="Malgun Gothic" pitchFamily="34" charset="-122"/>
-                <a:cs typeface="Malgun Gothic" pitchFamily="34" charset="-120"/>
-              </a:rPr>
-              <a:t>5곳 — 키즈 놀이존, 유아 용품, 도서 나눔, 아토피 케어</a:t>
+                  <a:srgbClr val="5A6B85"/>
+                </a:solidFill>
+                <a:latin typeface="Malgun Gothic" pitchFamily="34" charset="0"/>
+                <a:ea typeface="Malgun Gothic" pitchFamily="34" charset="-122"/>
+                <a:cs typeface="Malgun Gothic" pitchFamily="34" charset="-120"/>
+              </a:rPr>
+              <a:t>키즈 놀이존, 유아 용품, 도서 나눔, 아토피 케어</a:t>
             </a:r>
             <a:endParaRPr lang="en-US" sz="800" dirty="0"/>
           </a:p>
         </p:txBody>
+      </p:sp>
+      <p:sp>
+        <p:nvSpPr>
+          <p:cNvPr id="34" name="Shape 27"/>
+          <p:cNvSpPr/>
+          <p:nvPr/>
+        </p:nvSpPr>
+        <p:spPr>
+          <a:xfrm>
+            <a:off x="8097317" y="3139440"/>
+            <a:ext cx="3527450" cy="1530096"/>
+          </a:xfrm>
+          <a:prstGeom prst="roundRect">
+            <a:avLst>
+              <a:gd name="adj" fmla="val 2988"/>
+            </a:avLst>
+          </a:prstGeom>
+          <a:solidFill>
+            <a:srgbClr val="FBFCFE"/>
+          </a:solidFill>
+          <a:ln w="9525">
+            <a:solidFill>
+              <a:srgbClr val="E4EBF5"/>
+            </a:solidFill>
+            <a:prstDash val="solid"/>
+          </a:ln>
+        </p:spPr>
       </p:sp>
       <p:pic>
         <p:nvPicPr>
-          <p:cNvPr id="21" name="Image 5" descr="/home/user/Flitunion/docs/photos/seller-items/ceramic.jpg">    </p:cNvPr>
+          <p:cNvPr id="35" name="Image 5" descr="/home/user/Flitunion/docs/photos/seller-items/ceramic.jpg">    </p:cNvPr>
           <p:cNvPicPr>
             <a:picLocks noChangeAspect="1"/>
           </p:cNvPicPr>
@@ -3026,8 +4400,8 @@
         </p:blipFill>
         <p:spPr>
           <a:xfrm>
-            <a:off x="8158277" y="3204972"/>
-            <a:ext cx="1417320" cy="1417320"/>
+            <a:off x="8216189" y="3258312"/>
+            <a:ext cx="1292352" cy="1292352"/>
           </a:xfrm>
           <a:prstGeom prst="rect">
             <a:avLst/>
@@ -3036,14 +4410,53 @@
       </p:pic>
       <p:sp>
         <p:nvSpPr>
-          <p:cNvPr id="22" name="Text 14"/>
-          <p:cNvSpPr txBox="1"/>
-          <p:nvPr/>
-        </p:nvSpPr>
-        <p:spPr>
-          <a:xfrm>
-            <a:off x="9721901" y="3204972"/>
-            <a:ext cx="2012594" cy="292608"/>
+          <p:cNvPr id="36" name="Text 28"/>
+          <p:cNvSpPr txBox="1"/>
+          <p:nvPr/>
+        </p:nvSpPr>
+        <p:spPr>
+          <a:xfrm>
+            <a:off x="9673133" y="3276600"/>
+            <a:ext cx="1805330" cy="164592"/>
+          </a:xfrm>
+          <a:prstGeom prst="rect">
+            <a:avLst/>
+          </a:prstGeom>
+          <a:noFill/>
+          <a:ln/>
+        </p:spPr>
+        <p:txBody>
+          <a:bodyPr wrap="square" rtlCol="0" anchor="ctr"/>
+          <a:lstStyle/>
+          <a:p>
+            <a:pPr algn="l" indent="0" marL="0">
+              <a:buNone/>
+            </a:pPr>
+            <a:r>
+              <a:rPr lang="en-US" sz="750" b="1" spc="100" kern="0" dirty="0">
+                <a:solidFill>
+                  <a:srgbClr val="3182F6"/>
+                </a:solidFill>
+                <a:latin typeface="Arial" pitchFamily="34" charset="0"/>
+                <a:ea typeface="Arial" pitchFamily="34" charset="-122"/>
+                <a:cs typeface="Arial" pitchFamily="34" charset="-120"/>
+              </a:rPr>
+              <a:t>15</a:t>
+            </a:r>
+            <a:endParaRPr lang="en-US" sz="750" dirty="0"/>
+          </a:p>
+        </p:txBody>
+      </p:sp>
+      <p:sp>
+        <p:nvSpPr>
+          <p:cNvPr id="37" name="Text 29"/>
+          <p:cNvSpPr txBox="1"/>
+          <p:nvPr/>
+        </p:nvSpPr>
+        <p:spPr>
+          <a:xfrm>
+            <a:off x="9673133" y="3441192"/>
+            <a:ext cx="1805330" cy="274320"/>
           </a:xfrm>
           <a:prstGeom prst="rect">
             <a:avLst/>
@@ -3059,9 +4472,9 @@
               <a:buNone/>
             </a:pPr>
             <a:r>
-              <a:rPr lang="en-US" sz="1300" b="1" dirty="0">
-                <a:solidFill>
-                  <a:srgbClr val="0F172A"/>
+              <a:rPr lang="en-US" sz="1250" b="1" dirty="0">
+                <a:solidFill>
+                  <a:srgbClr val="101828"/>
                 </a:solidFill>
                 <a:latin typeface="Malgun Gothic" pitchFamily="34" charset="0"/>
                 <a:ea typeface="Malgun Gothic" pitchFamily="34" charset="-122"/>
@@ -3069,20 +4482,34 @@
               </a:rPr>
               <a:t>도자기</a:t>
             </a:r>
-            <a:endParaRPr lang="en-US" sz="1300" dirty="0"/>
-          </a:p>
-        </p:txBody>
-      </p:sp>
-      <p:sp>
-        <p:nvSpPr>
-          <p:cNvPr id="23" name="Text 15"/>
-          <p:cNvSpPr txBox="1"/>
-          <p:nvPr/>
-        </p:nvSpPr>
-        <p:spPr>
-          <a:xfrm>
-            <a:off x="9721901" y="3497580"/>
-            <a:ext cx="2012594" cy="1124712"/>
+            <a:pPr algn="l" indent="0" marL="0">
+              <a:buNone/>
+            </a:pPr>
+            <a:r>
+              <a:rPr lang="en-US" sz="800" b="1" dirty="0">
+                <a:solidFill>
+                  <a:srgbClr val="3182F6"/>
+                </a:solidFill>
+                <a:latin typeface="Malgun Gothic" pitchFamily="34" charset="0"/>
+                <a:ea typeface="Malgun Gothic" pitchFamily="34" charset="-122"/>
+                <a:cs typeface="Malgun Gothic" pitchFamily="34" charset="-120"/>
+              </a:rPr>
+              <a:t>   4곳</a:t>
+            </a:r>
+            <a:endParaRPr lang="en-US" sz="1250" dirty="0"/>
+          </a:p>
+        </p:txBody>
+      </p:sp>
+      <p:sp>
+        <p:nvSpPr>
+          <p:cNvPr id="38" name="Text 30"/>
+          <p:cNvSpPr txBox="1"/>
+          <p:nvPr/>
+        </p:nvSpPr>
+        <p:spPr>
+          <a:xfrm>
+            <a:off x="9673133" y="3733800"/>
+            <a:ext cx="1805330" cy="816864"/>
           </a:xfrm>
           <a:prstGeom prst="rect">
             <a:avLst/>
@@ -3096,28 +4523,55 @@
           <a:p>
             <a:pPr algn="l" indent="0" marL="0">
               <a:lnSpc>
-                <a:spcPct val="120000"/>
+                <a:spcPct val="122000"/>
               </a:lnSpc>
               <a:buNone/>
             </a:pPr>
             <a:r>
               <a:rPr lang="en-US" sz="800" dirty="0">
                 <a:solidFill>
-                  <a:srgbClr val="475569"/>
-                </a:solidFill>
-                <a:latin typeface="Malgun Gothic" pitchFamily="34" charset="0"/>
-                <a:ea typeface="Malgun Gothic" pitchFamily="34" charset="-122"/>
-                <a:cs typeface="Malgun Gothic" pitchFamily="34" charset="-120"/>
-              </a:rPr>
-              <a:t>4곳 — 그릇, 미니어처 오브제, 리빙 소품, 페인팅 액자</a:t>
+                  <a:srgbClr val="5A6B85"/>
+                </a:solidFill>
+                <a:latin typeface="Malgun Gothic" pitchFamily="34" charset="0"/>
+                <a:ea typeface="Malgun Gothic" pitchFamily="34" charset="-122"/>
+                <a:cs typeface="Malgun Gothic" pitchFamily="34" charset="-120"/>
+              </a:rPr>
+              <a:t>그릇, 미니어처 오브제, 리빙 소품, 페인팅 액자</a:t>
             </a:r>
             <a:endParaRPr lang="en-US" sz="800" dirty="0"/>
           </a:p>
         </p:txBody>
+      </p:sp>
+      <p:sp>
+        <p:nvSpPr>
+          <p:cNvPr id="39" name="Shape 31"/>
+          <p:cNvSpPr/>
+          <p:nvPr/>
+        </p:nvSpPr>
+        <p:spPr>
+          <a:xfrm>
+            <a:off x="566928" y="4852416"/>
+            <a:ext cx="3527450" cy="1530096"/>
+          </a:xfrm>
+          <a:prstGeom prst="roundRect">
+            <a:avLst>
+              <a:gd name="adj" fmla="val 2988"/>
+            </a:avLst>
+          </a:prstGeom>
+          <a:solidFill>
+            <a:srgbClr val="FBFCFE"/>
+          </a:solidFill>
+          <a:ln w="9525">
+            <a:solidFill>
+              <a:srgbClr val="E4EBF5"/>
+            </a:solidFill>
+            <a:prstDash val="solid"/>
+          </a:ln>
+        </p:spPr>
       </p:sp>
       <p:pic>
         <p:nvPicPr>
-          <p:cNvPr id="24" name="Image 6" descr="/home/user/Flitunion/docs/photos/seller-items/knit.jpg">    </p:cNvPr>
+          <p:cNvPr id="40" name="Image 6" descr="/home/user/Flitunion/docs/photos/seller-items/knit.jpg">    </p:cNvPr>
           <p:cNvPicPr>
             <a:picLocks noChangeAspect="1"/>
           </p:cNvPicPr>
@@ -3131,8 +4585,8 @@
         </p:blipFill>
         <p:spPr>
           <a:xfrm>
-            <a:off x="457200" y="4966716"/>
-            <a:ext cx="1417320" cy="1417320"/>
+            <a:off x="685800" y="4971288"/>
+            <a:ext cx="1292352" cy="1292352"/>
           </a:xfrm>
           <a:prstGeom prst="rect">
             <a:avLst/>
@@ -3141,14 +4595,53 @@
       </p:pic>
       <p:sp>
         <p:nvSpPr>
-          <p:cNvPr id="25" name="Text 16"/>
-          <p:cNvSpPr txBox="1"/>
-          <p:nvPr/>
-        </p:nvSpPr>
-        <p:spPr>
-          <a:xfrm>
-            <a:off x="2020824" y="4966716"/>
-            <a:ext cx="2012594" cy="292608"/>
+          <p:cNvPr id="41" name="Text 32"/>
+          <p:cNvSpPr txBox="1"/>
+          <p:nvPr/>
+        </p:nvSpPr>
+        <p:spPr>
+          <a:xfrm>
+            <a:off x="2142744" y="4989576"/>
+            <a:ext cx="1805330" cy="164592"/>
+          </a:xfrm>
+          <a:prstGeom prst="rect">
+            <a:avLst/>
+          </a:prstGeom>
+          <a:noFill/>
+          <a:ln/>
+        </p:spPr>
+        <p:txBody>
+          <a:bodyPr wrap="square" rtlCol="0" anchor="ctr"/>
+          <a:lstStyle/>
+          <a:p>
+            <a:pPr algn="l" indent="0" marL="0">
+              <a:buNone/>
+            </a:pPr>
+            <a:r>
+              <a:rPr lang="en-US" sz="750" b="1" spc="100" kern="0" dirty="0">
+                <a:solidFill>
+                  <a:srgbClr val="3182F6"/>
+                </a:solidFill>
+                <a:latin typeface="Arial" pitchFamily="34" charset="0"/>
+                <a:ea typeface="Arial" pitchFamily="34" charset="-122"/>
+                <a:cs typeface="Arial" pitchFamily="34" charset="-120"/>
+              </a:rPr>
+              <a:t>16</a:t>
+            </a:r>
+            <a:endParaRPr lang="en-US" sz="750" dirty="0"/>
+          </a:p>
+        </p:txBody>
+      </p:sp>
+      <p:sp>
+        <p:nvSpPr>
+          <p:cNvPr id="42" name="Text 33"/>
+          <p:cNvSpPr txBox="1"/>
+          <p:nvPr/>
+        </p:nvSpPr>
+        <p:spPr>
+          <a:xfrm>
+            <a:off x="2142744" y="5154168"/>
+            <a:ext cx="1805330" cy="274320"/>
           </a:xfrm>
           <a:prstGeom prst="rect">
             <a:avLst/>
@@ -3164,9 +4657,9 @@
               <a:buNone/>
             </a:pPr>
             <a:r>
-              <a:rPr lang="en-US" sz="1300" b="1" dirty="0">
-                <a:solidFill>
-                  <a:srgbClr val="0F172A"/>
+              <a:rPr lang="en-US" sz="1250" b="1" dirty="0">
+                <a:solidFill>
+                  <a:srgbClr val="101828"/>
                 </a:solidFill>
                 <a:latin typeface="Malgun Gothic" pitchFamily="34" charset="0"/>
                 <a:ea typeface="Malgun Gothic" pitchFamily="34" charset="-122"/>
@@ -3174,20 +4667,34 @@
               </a:rPr>
               <a:t>뜨개 · 니팅</a:t>
             </a:r>
-            <a:endParaRPr lang="en-US" sz="1300" dirty="0"/>
-          </a:p>
-        </p:txBody>
-      </p:sp>
-      <p:sp>
-        <p:nvSpPr>
-          <p:cNvPr id="26" name="Text 17"/>
-          <p:cNvSpPr txBox="1"/>
-          <p:nvPr/>
-        </p:nvSpPr>
-        <p:spPr>
-          <a:xfrm>
-            <a:off x="2020824" y="5259324"/>
-            <a:ext cx="2012594" cy="1124712"/>
+            <a:pPr algn="l" indent="0" marL="0">
+              <a:buNone/>
+            </a:pPr>
+            <a:r>
+              <a:rPr lang="en-US" sz="800" b="1" dirty="0">
+                <a:solidFill>
+                  <a:srgbClr val="3182F6"/>
+                </a:solidFill>
+                <a:latin typeface="Malgun Gothic" pitchFamily="34" charset="0"/>
+                <a:ea typeface="Malgun Gothic" pitchFamily="34" charset="-122"/>
+                <a:cs typeface="Malgun Gothic" pitchFamily="34" charset="-120"/>
+              </a:rPr>
+              <a:t>   4곳</a:t>
+            </a:r>
+            <a:endParaRPr lang="en-US" sz="1250" dirty="0"/>
+          </a:p>
+        </p:txBody>
+      </p:sp>
+      <p:sp>
+        <p:nvSpPr>
+          <p:cNvPr id="43" name="Text 34"/>
+          <p:cNvSpPr txBox="1"/>
+          <p:nvPr/>
+        </p:nvSpPr>
+        <p:spPr>
+          <a:xfrm>
+            <a:off x="2142744" y="5446776"/>
+            <a:ext cx="1805330" cy="816864"/>
           </a:xfrm>
           <a:prstGeom prst="rect">
             <a:avLst/>
@@ -3201,28 +4708,55 @@
           <a:p>
             <a:pPr algn="l" indent="0" marL="0">
               <a:lnSpc>
-                <a:spcPct val="120000"/>
+                <a:spcPct val="122000"/>
               </a:lnSpc>
               <a:buNone/>
             </a:pPr>
             <a:r>
               <a:rPr lang="en-US" sz="800" dirty="0">
                 <a:solidFill>
-                  <a:srgbClr val="475569"/>
-                </a:solidFill>
-                <a:latin typeface="Malgun Gothic" pitchFamily="34" charset="0"/>
-                <a:ea typeface="Malgun Gothic" pitchFamily="34" charset="-122"/>
-                <a:cs typeface="Malgun Gothic" pitchFamily="34" charset="-120"/>
-              </a:rPr>
-              <a:t>4곳 — 손염색실, 뜨개 소품, 수세미, 니팅 제품</a:t>
+                  <a:srgbClr val="5A6B85"/>
+                </a:solidFill>
+                <a:latin typeface="Malgun Gothic" pitchFamily="34" charset="0"/>
+                <a:ea typeface="Malgun Gothic" pitchFamily="34" charset="-122"/>
+                <a:cs typeface="Malgun Gothic" pitchFamily="34" charset="-120"/>
+              </a:rPr>
+              <a:t>손염색실, 뜨개 소품, 수세미, 니팅 제품</a:t>
             </a:r>
             <a:endParaRPr lang="en-US" sz="800" dirty="0"/>
           </a:p>
         </p:txBody>
+      </p:sp>
+      <p:sp>
+        <p:nvSpPr>
+          <p:cNvPr id="44" name="Shape 35"/>
+          <p:cNvSpPr/>
+          <p:nvPr/>
+        </p:nvSpPr>
+        <p:spPr>
+          <a:xfrm>
+            <a:off x="4332122" y="4852416"/>
+            <a:ext cx="3527450" cy="1530096"/>
+          </a:xfrm>
+          <a:prstGeom prst="roundRect">
+            <a:avLst>
+              <a:gd name="adj" fmla="val 2988"/>
+            </a:avLst>
+          </a:prstGeom>
+          <a:solidFill>
+            <a:srgbClr val="FBFCFE"/>
+          </a:solidFill>
+          <a:ln w="9525">
+            <a:solidFill>
+              <a:srgbClr val="E4EBF5"/>
+            </a:solidFill>
+            <a:prstDash val="solid"/>
+          </a:ln>
+        </p:spPr>
       </p:sp>
       <p:pic>
         <p:nvPicPr>
-          <p:cNvPr id="27" name="Image 7" descr="/home/user/Flitunion/docs/photos/seller-items/caricature.jpg">    </p:cNvPr>
+          <p:cNvPr id="45" name="Image 7" descr="/home/user/Flitunion/docs/photos/seller-items/caricature.jpg">    </p:cNvPr>
           <p:cNvPicPr>
             <a:picLocks noChangeAspect="1"/>
           </p:cNvPicPr>
@@ -3236,8 +4770,8 @@
         </p:blipFill>
         <p:spPr>
           <a:xfrm>
-            <a:off x="4307738" y="4966716"/>
-            <a:ext cx="1417320" cy="1417320"/>
+            <a:off x="4450994" y="4971288"/>
+            <a:ext cx="1292352" cy="1292352"/>
           </a:xfrm>
           <a:prstGeom prst="rect">
             <a:avLst/>
@@ -3246,14 +4780,53 @@
       </p:pic>
       <p:sp>
         <p:nvSpPr>
-          <p:cNvPr id="28" name="Text 18"/>
-          <p:cNvSpPr txBox="1"/>
-          <p:nvPr/>
-        </p:nvSpPr>
-        <p:spPr>
-          <a:xfrm>
-            <a:off x="5871362" y="4966716"/>
-            <a:ext cx="2012594" cy="292608"/>
+          <p:cNvPr id="46" name="Text 36"/>
+          <p:cNvSpPr txBox="1"/>
+          <p:nvPr/>
+        </p:nvSpPr>
+        <p:spPr>
+          <a:xfrm>
+            <a:off x="5907938" y="4989576"/>
+            <a:ext cx="1805330" cy="164592"/>
+          </a:xfrm>
+          <a:prstGeom prst="rect">
+            <a:avLst/>
+          </a:prstGeom>
+          <a:noFill/>
+          <a:ln/>
+        </p:spPr>
+        <p:txBody>
+          <a:bodyPr wrap="square" rtlCol="0" anchor="ctr"/>
+          <a:lstStyle/>
+          <a:p>
+            <a:pPr algn="l" indent="0" marL="0">
+              <a:buNone/>
+            </a:pPr>
+            <a:r>
+              <a:rPr lang="en-US" sz="750" b="1" spc="100" kern="0" dirty="0">
+                <a:solidFill>
+                  <a:srgbClr val="3182F6"/>
+                </a:solidFill>
+                <a:latin typeface="Arial" pitchFamily="34" charset="0"/>
+                <a:ea typeface="Arial" pitchFamily="34" charset="-122"/>
+                <a:cs typeface="Arial" pitchFamily="34" charset="-120"/>
+              </a:rPr>
+              <a:t>17</a:t>
+            </a:r>
+            <a:endParaRPr lang="en-US" sz="750" dirty="0"/>
+          </a:p>
+        </p:txBody>
+      </p:sp>
+      <p:sp>
+        <p:nvSpPr>
+          <p:cNvPr id="47" name="Text 37"/>
+          <p:cNvSpPr txBox="1"/>
+          <p:nvPr/>
+        </p:nvSpPr>
+        <p:spPr>
+          <a:xfrm>
+            <a:off x="5907938" y="5154168"/>
+            <a:ext cx="1805330" cy="274320"/>
           </a:xfrm>
           <a:prstGeom prst="rect">
             <a:avLst/>
@@ -3269,9 +4842,9 @@
               <a:buNone/>
             </a:pPr>
             <a:r>
-              <a:rPr lang="en-US" sz="1300" b="1" dirty="0">
-                <a:solidFill>
-                  <a:srgbClr val="0F172A"/>
+              <a:rPr lang="en-US" sz="1250" b="1" dirty="0">
+                <a:solidFill>
+                  <a:srgbClr val="101828"/>
                 </a:solidFill>
                 <a:latin typeface="Malgun Gothic" pitchFamily="34" charset="0"/>
                 <a:ea typeface="Malgun Gothic" pitchFamily="34" charset="-122"/>
@@ -3279,20 +4852,34 @@
               </a:rPr>
               <a:t>캐리커처 · 초상화</a:t>
             </a:r>
-            <a:endParaRPr lang="en-US" sz="1300" dirty="0"/>
-          </a:p>
-        </p:txBody>
-      </p:sp>
-      <p:sp>
-        <p:nvSpPr>
-          <p:cNvPr id="29" name="Text 19"/>
-          <p:cNvSpPr txBox="1"/>
-          <p:nvPr/>
-        </p:nvSpPr>
-        <p:spPr>
-          <a:xfrm>
-            <a:off x="5871362" y="5259324"/>
-            <a:ext cx="2012594" cy="1124712"/>
+            <a:pPr algn="l" indent="0" marL="0">
+              <a:buNone/>
+            </a:pPr>
+            <a:r>
+              <a:rPr lang="en-US" sz="800" b="1" dirty="0">
+                <a:solidFill>
+                  <a:srgbClr val="3182F6"/>
+                </a:solidFill>
+                <a:latin typeface="Malgun Gothic" pitchFamily="34" charset="0"/>
+                <a:ea typeface="Malgun Gothic" pitchFamily="34" charset="-122"/>
+                <a:cs typeface="Malgun Gothic" pitchFamily="34" charset="-120"/>
+              </a:rPr>
+              <a:t>   4곳</a:t>
+            </a:r>
+            <a:endParaRPr lang="en-US" sz="1250" dirty="0"/>
+          </a:p>
+        </p:txBody>
+      </p:sp>
+      <p:sp>
+        <p:nvSpPr>
+          <p:cNvPr id="48" name="Text 38"/>
+          <p:cNvSpPr txBox="1"/>
+          <p:nvPr/>
+        </p:nvSpPr>
+        <p:spPr>
+          <a:xfrm>
+            <a:off x="5907938" y="5446776"/>
+            <a:ext cx="1805330" cy="816864"/>
           </a:xfrm>
           <a:prstGeom prst="rect">
             <a:avLst/>
@@ -3306,28 +4893,55 @@
           <a:p>
             <a:pPr algn="l" indent="0" marL="0">
               <a:lnSpc>
-                <a:spcPct val="120000"/>
+                <a:spcPct val="122000"/>
               </a:lnSpc>
               <a:buNone/>
             </a:pPr>
             <a:r>
               <a:rPr lang="en-US" sz="800" dirty="0">
                 <a:solidFill>
-                  <a:srgbClr val="475569"/>
-                </a:solidFill>
-                <a:latin typeface="Malgun Gothic" pitchFamily="34" charset="0"/>
-                <a:ea typeface="Malgun Gothic" pitchFamily="34" charset="-122"/>
-                <a:cs typeface="Malgun Gothic" pitchFamily="34" charset="-120"/>
-              </a:rPr>
-              <a:t>4곳 — 현장 캐리커처, 수채 초상화, 거리 인물화. 3분 내외로 완성돼 회전이 빠름</a:t>
+                  <a:srgbClr val="5A6B85"/>
+                </a:solidFill>
+                <a:latin typeface="Malgun Gothic" pitchFamily="34" charset="0"/>
+                <a:ea typeface="Malgun Gothic" pitchFamily="34" charset="-122"/>
+                <a:cs typeface="Malgun Gothic" pitchFamily="34" charset="-120"/>
+              </a:rPr>
+              <a:t>현장 캐리커처, 수채 초상화, 거리 인물화. 3분 내외로 완성돼 회전이 빠름</a:t>
             </a:r>
             <a:endParaRPr lang="en-US" sz="800" dirty="0"/>
           </a:p>
         </p:txBody>
+      </p:sp>
+      <p:sp>
+        <p:nvSpPr>
+          <p:cNvPr id="49" name="Shape 39"/>
+          <p:cNvSpPr/>
+          <p:nvPr/>
+        </p:nvSpPr>
+        <p:spPr>
+          <a:xfrm>
+            <a:off x="8097317" y="4852416"/>
+            <a:ext cx="3527450" cy="1530096"/>
+          </a:xfrm>
+          <a:prstGeom prst="roundRect">
+            <a:avLst>
+              <a:gd name="adj" fmla="val 2988"/>
+            </a:avLst>
+          </a:prstGeom>
+          <a:solidFill>
+            <a:srgbClr val="FBFCFE"/>
+          </a:solidFill>
+          <a:ln w="9525">
+            <a:solidFill>
+              <a:srgbClr val="E4EBF5"/>
+            </a:solidFill>
+            <a:prstDash val="solid"/>
+          </a:ln>
+        </p:spPr>
       </p:sp>
       <p:pic>
         <p:nvPicPr>
-          <p:cNvPr id="30" name="Image 8" descr="/home/user/Flitunion/docs/photos/seller-items/photo.jpg">    </p:cNvPr>
+          <p:cNvPr id="50" name="Image 8" descr="/home/user/Flitunion/docs/photos/seller-items/photo.jpg">    </p:cNvPr>
           <p:cNvPicPr>
             <a:picLocks noChangeAspect="1"/>
           </p:cNvPicPr>
@@ -3341,8 +4955,8 @@
         </p:blipFill>
         <p:spPr>
           <a:xfrm>
-            <a:off x="8158277" y="4966716"/>
-            <a:ext cx="1417320" cy="1417320"/>
+            <a:off x="8216189" y="4971288"/>
+            <a:ext cx="1292352" cy="1292352"/>
           </a:xfrm>
           <a:prstGeom prst="rect">
             <a:avLst/>
@@ -3351,14 +4965,53 @@
       </p:pic>
       <p:sp>
         <p:nvSpPr>
-          <p:cNvPr id="31" name="Text 20"/>
-          <p:cNvSpPr txBox="1"/>
-          <p:nvPr/>
-        </p:nvSpPr>
-        <p:spPr>
-          <a:xfrm>
-            <a:off x="9721901" y="4966716"/>
-            <a:ext cx="2012594" cy="292608"/>
+          <p:cNvPr id="51" name="Text 40"/>
+          <p:cNvSpPr txBox="1"/>
+          <p:nvPr/>
+        </p:nvSpPr>
+        <p:spPr>
+          <a:xfrm>
+            <a:off x="9673133" y="4989576"/>
+            <a:ext cx="1805330" cy="164592"/>
+          </a:xfrm>
+          <a:prstGeom prst="rect">
+            <a:avLst/>
+          </a:prstGeom>
+          <a:noFill/>
+          <a:ln/>
+        </p:spPr>
+        <p:txBody>
+          <a:bodyPr wrap="square" rtlCol="0" anchor="ctr"/>
+          <a:lstStyle/>
+          <a:p>
+            <a:pPr algn="l" indent="0" marL="0">
+              <a:buNone/>
+            </a:pPr>
+            <a:r>
+              <a:rPr lang="en-US" sz="750" b="1" spc="100" kern="0" dirty="0">
+                <a:solidFill>
+                  <a:srgbClr val="3182F6"/>
+                </a:solidFill>
+                <a:latin typeface="Arial" pitchFamily="34" charset="0"/>
+                <a:ea typeface="Arial" pitchFamily="34" charset="-122"/>
+                <a:cs typeface="Arial" pitchFamily="34" charset="-120"/>
+              </a:rPr>
+              <a:t>18</a:t>
+            </a:r>
+            <a:endParaRPr lang="en-US" sz="750" dirty="0"/>
+          </a:p>
+        </p:txBody>
+      </p:sp>
+      <p:sp>
+        <p:nvSpPr>
+          <p:cNvPr id="52" name="Text 41"/>
+          <p:cNvSpPr txBox="1"/>
+          <p:nvPr/>
+        </p:nvSpPr>
+        <p:spPr>
+          <a:xfrm>
+            <a:off x="9673133" y="5154168"/>
+            <a:ext cx="1805330" cy="274320"/>
           </a:xfrm>
           <a:prstGeom prst="rect">
             <a:avLst/>
@@ -3374,9 +5027,9 @@
               <a:buNone/>
             </a:pPr>
             <a:r>
-              <a:rPr lang="en-US" sz="1300" b="1" dirty="0">
-                <a:solidFill>
-                  <a:srgbClr val="0F172A"/>
+              <a:rPr lang="en-US" sz="1250" b="1" dirty="0">
+                <a:solidFill>
+                  <a:srgbClr val="101828"/>
                 </a:solidFill>
                 <a:latin typeface="Malgun Gothic" pitchFamily="34" charset="0"/>
                 <a:ea typeface="Malgun Gothic" pitchFamily="34" charset="-122"/>
@@ -3384,20 +5037,34 @@
               </a:rPr>
               <a:t>즉석사진</a:t>
             </a:r>
-            <a:endParaRPr lang="en-US" sz="1300" dirty="0"/>
-          </a:p>
-        </p:txBody>
-      </p:sp>
-      <p:sp>
-        <p:nvSpPr>
-          <p:cNvPr id="32" name="Text 21"/>
-          <p:cNvSpPr txBox="1"/>
-          <p:nvPr/>
-        </p:nvSpPr>
-        <p:spPr>
-          <a:xfrm>
-            <a:off x="9721901" y="5259324"/>
-            <a:ext cx="2012594" cy="1124712"/>
+            <a:pPr algn="l" indent="0" marL="0">
+              <a:buNone/>
+            </a:pPr>
+            <a:r>
+              <a:rPr lang="en-US" sz="800" b="1" dirty="0">
+                <a:solidFill>
+                  <a:srgbClr val="3182F6"/>
+                </a:solidFill>
+                <a:latin typeface="Malgun Gothic" pitchFamily="34" charset="0"/>
+                <a:ea typeface="Malgun Gothic" pitchFamily="34" charset="-122"/>
+                <a:cs typeface="Malgun Gothic" pitchFamily="34" charset="-120"/>
+              </a:rPr>
+              <a:t>   4곳</a:t>
+            </a:r>
+            <a:endParaRPr lang="en-US" sz="1250" dirty="0"/>
+          </a:p>
+        </p:txBody>
+      </p:sp>
+      <p:sp>
+        <p:nvSpPr>
+          <p:cNvPr id="53" name="Text 42"/>
+          <p:cNvSpPr txBox="1"/>
+          <p:nvPr/>
+        </p:nvSpPr>
+        <p:spPr>
+          <a:xfrm>
+            <a:off x="9673133" y="5446776"/>
+            <a:ext cx="1805330" cy="816864"/>
           </a:xfrm>
           <a:prstGeom prst="rect">
             <a:avLst/>
@@ -3411,20 +5078,20 @@
           <a:p>
             <a:pPr algn="l" indent="0" marL="0">
               <a:lnSpc>
-                <a:spcPct val="120000"/>
+                <a:spcPct val="122000"/>
               </a:lnSpc>
               <a:buNone/>
             </a:pPr>
             <a:r>
               <a:rPr lang="en-US" sz="800" dirty="0">
                 <a:solidFill>
-                  <a:srgbClr val="475569"/>
-                </a:solidFill>
-                <a:latin typeface="Malgun Gothic" pitchFamily="34" charset="0"/>
-                <a:ea typeface="Malgun Gothic" pitchFamily="34" charset="-122"/>
-                <a:cs typeface="Malgun Gothic" pitchFamily="34" charset="-120"/>
-              </a:rPr>
-              <a:t>4곳 — 현장 촬영 후 즉석 인화. 행사 기념품으로 남는 부스</a:t>
+                  <a:srgbClr val="5A6B85"/>
+                </a:solidFill>
+                <a:latin typeface="Malgun Gothic" pitchFamily="34" charset="0"/>
+                <a:ea typeface="Malgun Gothic" pitchFamily="34" charset="-122"/>
+                <a:cs typeface="Malgun Gothic" pitchFamily="34" charset="-120"/>
+              </a:rPr>
+              <a:t>현장 촬영 후 즉석 인화. 행사 기념품으로 남는 부스</a:t>
             </a:r>
             <a:endParaRPr lang="en-US" sz="800" dirty="0"/>
           </a:p>
@@ -3432,14 +5099,39 @@
       </p:sp>
       <p:sp>
         <p:nvSpPr>
-          <p:cNvPr id="33" name="Text 22"/>
-          <p:cNvSpPr txBox="1"/>
-          <p:nvPr/>
-        </p:nvSpPr>
-        <p:spPr>
-          <a:xfrm>
-            <a:off x="457200" y="6492240"/>
-            <a:ext cx="10637215" cy="274320"/>
+          <p:cNvPr id="54" name="Shape 43"/>
+          <p:cNvSpPr/>
+          <p:nvPr/>
+        </p:nvSpPr>
+        <p:spPr>
+          <a:xfrm>
+            <a:off x="566928" y="6400800"/>
+            <a:ext cx="11057839" cy="10973"/>
+          </a:xfrm>
+          <a:prstGeom prst="rect">
+            <a:avLst/>
+          </a:prstGeom>
+          <a:solidFill>
+            <a:srgbClr val="E4EBF5"/>
+          </a:solidFill>
+          <a:ln w="12700">
+            <a:solidFill>
+              <a:srgbClr val="E4EBF5"/>
+            </a:solidFill>
+            <a:prstDash val="solid"/>
+          </a:ln>
+        </p:spPr>
+      </p:sp>
+      <p:sp>
+        <p:nvSpPr>
+          <p:cNvPr id="55" name="Text 44"/>
+          <p:cNvSpPr txBox="1"/>
+          <p:nvPr/>
+        </p:nvSpPr>
+        <p:spPr>
+          <a:xfrm>
+            <a:off x="566928" y="6492240"/>
+            <a:ext cx="10234879" cy="256032"/>
           </a:xfrm>
           <a:prstGeom prst="rect">
             <a:avLst/>
@@ -3457,13 +5149,13 @@
             <a:r>
               <a:rPr lang="en-US" sz="750" dirty="0">
                 <a:solidFill>
-                  <a:srgbClr val="94A3B8"/>
-                </a:solidFill>
-                <a:latin typeface="Malgun Gothic" pitchFamily="34" charset="0"/>
-                <a:ea typeface="Malgun Gothic" pitchFamily="34" charset="-122"/>
-                <a:cs typeface="Malgun Gothic" pitchFamily="34" charset="-120"/>
-              </a:rPr>
-              <a:t>플릿 유니온 · www.flitunion.com   |   사진은 품목 이해를 돕기 위한 예시 이미지입니다 (자유 이용 라이선스). 실제 참여 셀러의 상품 사진이 아닙니다.</a:t>
+                  <a:srgbClr val="A3B0C4"/>
+                </a:solidFill>
+                <a:latin typeface="Malgun Gothic" pitchFamily="34" charset="0"/>
+                <a:ea typeface="Malgun Gothic" pitchFamily="34" charset="-122"/>
+                <a:cs typeface="Malgun Gothic" pitchFamily="34" charset="-120"/>
+              </a:rPr>
+              <a:t>사진은 품목 이해를 돕기 위한 예시 이미지입니다 (자유 이용 라이선스). 실제 참여 셀러의 상품 사진이 아닙니다.</a:t>
             </a:r>
             <a:endParaRPr lang="en-US" sz="750" dirty="0"/>
           </a:p>
@@ -3471,14 +5163,14 @@
       </p:sp>
       <p:sp>
         <p:nvSpPr>
-          <p:cNvPr id="34" name="Text 23"/>
-          <p:cNvSpPr txBox="1"/>
-          <p:nvPr/>
-        </p:nvSpPr>
-        <p:spPr>
-          <a:xfrm>
-            <a:off x="457200" y="6492240"/>
-            <a:ext cx="11277295" cy="274320"/>
+          <p:cNvPr id="56" name="Text 45"/>
+          <p:cNvSpPr txBox="1"/>
+          <p:nvPr/>
+        </p:nvSpPr>
+        <p:spPr>
+          <a:xfrm>
+            <a:off x="566928" y="6492240"/>
+            <a:ext cx="11057839" cy="256032"/>
           </a:xfrm>
           <a:prstGeom prst="rect">
             <a:avLst/>
@@ -3494,15 +5186,15 @@
               <a:buNone/>
             </a:pPr>
             <a:r>
-              <a:rPr lang="en-US" sz="750" dirty="0">
-                <a:solidFill>
-                  <a:srgbClr val="94A3B8"/>
-                </a:solidFill>
-                <a:latin typeface="Malgun Gothic" pitchFamily="34" charset="0"/>
-                <a:ea typeface="Malgun Gothic" pitchFamily="34" charset="-122"/>
-                <a:cs typeface="Malgun Gothic" pitchFamily="34" charset="-120"/>
-              </a:rPr>
-              <a:t>2 / 4</a:t>
+              <a:rPr lang="en-US" sz="750" b="1" spc="160" kern="0" dirty="0">
+                <a:solidFill>
+                  <a:srgbClr val="A3B0C4"/>
+                </a:solidFill>
+                <a:latin typeface="Arial" pitchFamily="34" charset="0"/>
+                <a:ea typeface="Arial" pitchFamily="34" charset="-122"/>
+                <a:cs typeface="Arial" pitchFamily="34" charset="-120"/>
+              </a:rPr>
+              <a:t>FLIT UNION</a:t>
             </a:r>
             <a:endParaRPr lang="en-US" sz="750" dirty="0"/>
           </a:p>
@@ -3542,104 +5234,24 @@
       </p:grpSpPr>
       <p:sp>
         <p:nvSpPr>
-          <p:cNvPr id="2" name="Text 0"/>
+          <p:cNvPr id="2" name="Shape 0"/>
           <p:cNvSpPr/>
           <p:nvPr/>
         </p:nvSpPr>
         <p:spPr>
           <a:xfrm>
-            <a:off x="0" y="201168"/>
-            <a:ext cx="12191695" cy="274320"/>
-          </a:xfrm>
-          <a:prstGeom prst="rect">
-            <a:avLst/>
-          </a:prstGeom>
-          <a:noFill/>
-          <a:ln/>
-        </p:spPr>
-        <p:txBody>
-          <a:bodyPr wrap="square" rtlCol="0" anchor="ctr"/>
-          <a:lstStyle/>
-          <a:p>
-            <a:pPr algn="ctr" indent="0" marL="0">
-              <a:buNone/>
-            </a:pPr>
-            <a:r>
-              <a:rPr lang="en-US" sz="1600" b="1" spc="100" kern="0" dirty="0">
-                <a:solidFill>
-                  <a:srgbClr val="3182F6"/>
-                </a:solidFill>
-                <a:latin typeface="Malgun Gothic" pitchFamily="34" charset="0"/>
-                <a:ea typeface="Malgun Gothic" pitchFamily="34" charset="-122"/>
-                <a:cs typeface="Malgun Gothic" pitchFamily="34" charset="-120"/>
-              </a:rPr>
-              <a:t>플릿 유니온</a:t>
-            </a:r>
-            <a:endParaRPr lang="en-US" sz="1600" dirty="0"/>
-          </a:p>
-        </p:txBody>
-      </p:sp>
-      <p:sp>
-        <p:nvSpPr>
-          <p:cNvPr id="3" name="Text 1"/>
-          <p:cNvSpPr/>
-          <p:nvPr/>
-        </p:nvSpPr>
-        <p:spPr>
-          <a:xfrm>
-            <a:off x="0" y="457200"/>
-            <a:ext cx="12191695" cy="457200"/>
-          </a:xfrm>
-          <a:prstGeom prst="rect">
-            <a:avLst/>
-          </a:prstGeom>
-          <a:noFill/>
-          <a:ln/>
-        </p:spPr>
-        <p:txBody>
-          <a:bodyPr wrap="square" rtlCol="0" anchor="ctr"/>
-          <a:lstStyle/>
-          <a:p>
-            <a:pPr algn="ctr" indent="0" marL="0">
-              <a:buNone/>
-            </a:pPr>
-            <a:r>
-              <a:rPr lang="en-US" sz="2800" b="1" dirty="0">
-                <a:solidFill>
-                  <a:srgbClr val="0B1F44"/>
-                </a:solidFill>
-                <a:latin typeface="Malgun Gothic" pitchFamily="34" charset="0"/>
-                <a:ea typeface="Malgun Gothic" pitchFamily="34" charset="-122"/>
-                <a:cs typeface="Malgun Gothic" pitchFamily="34" charset="-120"/>
-              </a:rPr>
-              <a:t>플리마켓 셀러 품목</a:t>
-            </a:r>
-            <a:endParaRPr lang="en-US" sz="2800" dirty="0"/>
-          </a:p>
-        </p:txBody>
-      </p:sp>
-      <p:sp>
-        <p:nvSpPr>
-          <p:cNvPr id="4" name="Shape 2"/>
-          <p:cNvSpPr/>
-          <p:nvPr/>
-        </p:nvSpPr>
-        <p:spPr>
-          <a:xfrm>
-            <a:off x="3809848" y="932688"/>
-            <a:ext cx="4572000" cy="310896"/>
-          </a:xfrm>
-          <a:prstGeom prst="roundRect">
-            <a:avLst>
-              <a:gd name="adj" fmla="val 50000"/>
-            </a:avLst>
+            <a:off x="0" y="0"/>
+            <a:ext cx="12191695" cy="68580"/>
+          </a:xfrm>
+          <a:prstGeom prst="rect">
+            <a:avLst/>
           </a:prstGeom>
           <a:solidFill>
-            <a:srgbClr val="EAF2FF"/>
+            <a:srgbClr val="0B1F44"/>
           </a:solidFill>
           <a:ln w="12700">
             <a:solidFill>
-              <a:srgbClr val="EAF2FF"/>
+              <a:srgbClr val="0B1F44"/>
             </a:solidFill>
             <a:prstDash val="solid"/>
           </a:ln>
@@ -3647,14 +5259,156 @@
       </p:sp>
       <p:sp>
         <p:nvSpPr>
+          <p:cNvPr id="3" name="Shape 1"/>
+          <p:cNvSpPr/>
+          <p:nvPr/>
+        </p:nvSpPr>
+        <p:spPr>
+          <a:xfrm>
+            <a:off x="566928" y="457200"/>
+            <a:ext cx="50292" cy="420624"/>
+          </a:xfrm>
+          <a:prstGeom prst="rect">
+            <a:avLst/>
+          </a:prstGeom>
+          <a:solidFill>
+            <a:srgbClr val="3182F6"/>
+          </a:solidFill>
+          <a:ln w="12700">
+            <a:solidFill>
+              <a:srgbClr val="3182F6"/>
+            </a:solidFill>
+            <a:prstDash val="solid"/>
+          </a:ln>
+        </p:spPr>
+      </p:sp>
+      <p:sp>
+        <p:nvSpPr>
+          <p:cNvPr id="4" name="Text 2"/>
+          <p:cNvSpPr txBox="1"/>
+          <p:nvPr/>
+        </p:nvSpPr>
+        <p:spPr>
+          <a:xfrm>
+            <a:off x="749808" y="384048"/>
+            <a:ext cx="3657600" cy="201168"/>
+          </a:xfrm>
+          <a:prstGeom prst="rect">
+            <a:avLst/>
+          </a:prstGeom>
+          <a:noFill/>
+          <a:ln/>
+        </p:spPr>
+        <p:txBody>
+          <a:bodyPr wrap="square" rtlCol="0" anchor="ctr"/>
+          <a:lstStyle/>
+          <a:p>
+            <a:pPr algn="l" indent="0" marL="0">
+              <a:buNone/>
+            </a:pPr>
+            <a:r>
+              <a:rPr lang="en-US" sz="850" b="1" spc="240" kern="0" dirty="0">
+                <a:solidFill>
+                  <a:srgbClr val="3182F6"/>
+                </a:solidFill>
+                <a:latin typeface="Arial" pitchFamily="34" charset="0"/>
+                <a:ea typeface="Arial" pitchFamily="34" charset="-122"/>
+                <a:cs typeface="Arial" pitchFamily="34" charset="-120"/>
+              </a:rPr>
+              <a:t>FLIT UNION</a:t>
+            </a:r>
+            <a:endParaRPr lang="en-US" sz="850" dirty="0"/>
+          </a:p>
+        </p:txBody>
+      </p:sp>
+      <p:sp>
+        <p:nvSpPr>
           <p:cNvPr id="5" name="Text 3"/>
           <p:cNvSpPr txBox="1"/>
           <p:nvPr/>
         </p:nvSpPr>
         <p:spPr>
           <a:xfrm>
-            <a:off x="3809848" y="932688"/>
-            <a:ext cx="4572000" cy="310896"/>
+            <a:off x="749808" y="548640"/>
+            <a:ext cx="6583680" cy="365760"/>
+          </a:xfrm>
+          <a:prstGeom prst="rect">
+            <a:avLst/>
+          </a:prstGeom>
+          <a:noFill/>
+          <a:ln/>
+        </p:spPr>
+        <p:txBody>
+          <a:bodyPr wrap="square" rtlCol="0" anchor="t"/>
+          <a:lstStyle/>
+          <a:p>
+            <a:pPr algn="l" indent="0" marL="0">
+              <a:buNone/>
+            </a:pPr>
+            <a:r>
+              <a:rPr lang="en-US" sz="2200" b="1" dirty="0">
+                <a:solidFill>
+                  <a:srgbClr val="0B1F44"/>
+                </a:solidFill>
+                <a:latin typeface="Malgun Gothic" pitchFamily="34" charset="0"/>
+                <a:ea typeface="Malgun Gothic" pitchFamily="34" charset="-122"/>
+                <a:cs typeface="Malgun Gothic" pitchFamily="34" charset="-120"/>
+              </a:rPr>
+              <a:t>플리마켓 셀러 품목</a:t>
+            </a:r>
+            <a:endParaRPr lang="en-US" sz="2200" dirty="0"/>
+          </a:p>
+        </p:txBody>
+      </p:sp>
+      <p:sp>
+        <p:nvSpPr>
+          <p:cNvPr id="6" name="Text 4"/>
+          <p:cNvSpPr txBox="1"/>
+          <p:nvPr/>
+        </p:nvSpPr>
+        <p:spPr>
+          <a:xfrm>
+            <a:off x="6869887" y="603504"/>
+            <a:ext cx="4754880" cy="274320"/>
+          </a:xfrm>
+          <a:prstGeom prst="rect">
+            <a:avLst/>
+          </a:prstGeom>
+          <a:noFill/>
+          <a:ln/>
+        </p:spPr>
+        <p:txBody>
+          <a:bodyPr wrap="square" rtlCol="0" anchor="t"/>
+          <a:lstStyle/>
+          <a:p>
+            <a:pPr algn="r" indent="0" marL="0">
+              <a:buNone/>
+            </a:pPr>
+            <a:r>
+              <a:rPr lang="en-US" sz="950" dirty="0">
+                <a:solidFill>
+                  <a:srgbClr val="5A6B85"/>
+                </a:solidFill>
+                <a:latin typeface="Malgun Gothic" pitchFamily="34" charset="0"/>
+                <a:ea typeface="Malgun Gothic" pitchFamily="34" charset="-122"/>
+                <a:cs typeface="Malgun Gothic" pitchFamily="34" charset="-120"/>
+              </a:rPr>
+              <a:t>보유 셀러가 많은 순 30종</a:t>
+            </a:r>
+            <a:endParaRPr lang="en-US" sz="950" dirty="0"/>
+          </a:p>
+        </p:txBody>
+      </p:sp>
+      <p:sp>
+        <p:nvSpPr>
+          <p:cNvPr id="7" name="Text 5"/>
+          <p:cNvSpPr txBox="1"/>
+          <p:nvPr/>
+        </p:nvSpPr>
+        <p:spPr>
+          <a:xfrm>
+            <a:off x="6869887" y="384048"/>
+            <a:ext cx="4754880" cy="219456"/>
           </a:xfrm>
           <a:prstGeom prst="rect">
             <a:avLst/>
@@ -3666,7 +5420,7 @@
           <a:bodyPr wrap="square" rtlCol="0" anchor="ctr"/>
           <a:lstStyle/>
           <a:p>
-            <a:pPr algn="ctr" indent="0" marL="0">
+            <a:pPr algn="r" indent="0" marL="0">
               <a:buNone/>
             </a:pPr>
             <a:r>
@@ -3674,19 +5428,85 @@
                 <a:solidFill>
                   <a:srgbClr val="0B1F44"/>
                 </a:solidFill>
-                <a:latin typeface="Malgun Gothic" pitchFamily="34" charset="0"/>
-                <a:ea typeface="Malgun Gothic" pitchFamily="34" charset="-122"/>
-                <a:cs typeface="Malgun Gothic" pitchFamily="34" charset="-120"/>
-              </a:rPr>
-              <a:t>· 19 ~ 27 ·</a:t>
+                <a:latin typeface="Arial" pitchFamily="34" charset="0"/>
+                <a:ea typeface="Arial" pitchFamily="34" charset="-122"/>
+                <a:cs typeface="Arial" pitchFamily="34" charset="-120"/>
+              </a:rPr>
+              <a:t>03</a:t>
+            </a:r>
+            <a:pPr algn="r" indent="0" marL="0">
+              <a:buNone/>
+            </a:pPr>
+            <a:r>
+              <a:rPr lang="en-US" sz="900" dirty="0">
+                <a:solidFill>
+                  <a:srgbClr val="A3B0C4"/>
+                </a:solidFill>
+                <a:latin typeface="Arial" pitchFamily="34" charset="0"/>
+                <a:ea typeface="Arial" pitchFamily="34" charset="-122"/>
+                <a:cs typeface="Arial" pitchFamily="34" charset="-120"/>
+              </a:rPr>
+              <a:t> / 04</a:t>
             </a:r>
             <a:endParaRPr lang="en-US" sz="1100" dirty="0"/>
           </a:p>
         </p:txBody>
+      </p:sp>
+      <p:sp>
+        <p:nvSpPr>
+          <p:cNvPr id="8" name="Shape 6"/>
+          <p:cNvSpPr/>
+          <p:nvPr/>
+        </p:nvSpPr>
+        <p:spPr>
+          <a:xfrm>
+            <a:off x="566928" y="1152144"/>
+            <a:ext cx="11057839" cy="10973"/>
+          </a:xfrm>
+          <a:prstGeom prst="rect">
+            <a:avLst/>
+          </a:prstGeom>
+          <a:solidFill>
+            <a:srgbClr val="E4EBF5"/>
+          </a:solidFill>
+          <a:ln w="12700">
+            <a:solidFill>
+              <a:srgbClr val="E4EBF5"/>
+            </a:solidFill>
+            <a:prstDash val="solid"/>
+          </a:ln>
+        </p:spPr>
+      </p:sp>
+      <p:sp>
+        <p:nvSpPr>
+          <p:cNvPr id="9" name="Shape 7"/>
+          <p:cNvSpPr/>
+          <p:nvPr/>
+        </p:nvSpPr>
+        <p:spPr>
+          <a:xfrm>
+            <a:off x="566928" y="1426464"/>
+            <a:ext cx="3527450" cy="1530096"/>
+          </a:xfrm>
+          <a:prstGeom prst="roundRect">
+            <a:avLst>
+              <a:gd name="adj" fmla="val 2988"/>
+            </a:avLst>
+          </a:prstGeom>
+          <a:solidFill>
+            <a:srgbClr val="FBFCFE"/>
+          </a:solidFill>
+          <a:ln w="9525">
+            <a:solidFill>
+              <a:srgbClr val="E4EBF5"/>
+            </a:solidFill>
+            <a:prstDash val="solid"/>
+          </a:ln>
+        </p:spPr>
       </p:sp>
       <p:pic>
         <p:nvPicPr>
-          <p:cNvPr id="6" name="Image 0" descr="/home/user/Flitunion/docs/photos/seller-items/figure.jpg">    </p:cNvPr>
+          <p:cNvPr id="10" name="Image 0" descr="/home/user/Flitunion/docs/photos/seller-items/figure.jpg">    </p:cNvPr>
           <p:cNvPicPr>
             <a:picLocks noChangeAspect="1"/>
           </p:cNvPicPr>
@@ -3700,8 +5520,8 @@
         </p:blipFill>
         <p:spPr>
           <a:xfrm>
-            <a:off x="457200" y="1443228"/>
-            <a:ext cx="1417320" cy="1417320"/>
+            <a:off x="685800" y="1545336"/>
+            <a:ext cx="1292352" cy="1292352"/>
           </a:xfrm>
           <a:prstGeom prst="rect">
             <a:avLst/>
@@ -3710,14 +5530,53 @@
       </p:pic>
       <p:sp>
         <p:nvSpPr>
-          <p:cNvPr id="7" name="Text 4"/>
-          <p:cNvSpPr txBox="1"/>
-          <p:nvPr/>
-        </p:nvSpPr>
-        <p:spPr>
-          <a:xfrm>
-            <a:off x="2020824" y="1443228"/>
-            <a:ext cx="2012594" cy="292608"/>
+          <p:cNvPr id="11" name="Text 8"/>
+          <p:cNvSpPr txBox="1"/>
+          <p:nvPr/>
+        </p:nvSpPr>
+        <p:spPr>
+          <a:xfrm>
+            <a:off x="2142744" y="1563624"/>
+            <a:ext cx="1805330" cy="164592"/>
+          </a:xfrm>
+          <a:prstGeom prst="rect">
+            <a:avLst/>
+          </a:prstGeom>
+          <a:noFill/>
+          <a:ln/>
+        </p:spPr>
+        <p:txBody>
+          <a:bodyPr wrap="square" rtlCol="0" anchor="ctr"/>
+          <a:lstStyle/>
+          <a:p>
+            <a:pPr algn="l" indent="0" marL="0">
+              <a:buNone/>
+            </a:pPr>
+            <a:r>
+              <a:rPr lang="en-US" sz="750" b="1" spc="100" kern="0" dirty="0">
+                <a:solidFill>
+                  <a:srgbClr val="3182F6"/>
+                </a:solidFill>
+                <a:latin typeface="Arial" pitchFamily="34" charset="0"/>
+                <a:ea typeface="Arial" pitchFamily="34" charset="-122"/>
+                <a:cs typeface="Arial" pitchFamily="34" charset="-120"/>
+              </a:rPr>
+              <a:t>19</a:t>
+            </a:r>
+            <a:endParaRPr lang="en-US" sz="750" dirty="0"/>
+          </a:p>
+        </p:txBody>
+      </p:sp>
+      <p:sp>
+        <p:nvSpPr>
+          <p:cNvPr id="12" name="Text 9"/>
+          <p:cNvSpPr txBox="1"/>
+          <p:nvPr/>
+        </p:nvSpPr>
+        <p:spPr>
+          <a:xfrm>
+            <a:off x="2142744" y="1728216"/>
+            <a:ext cx="1805330" cy="274320"/>
           </a:xfrm>
           <a:prstGeom prst="rect">
             <a:avLst/>
@@ -3733,9 +5592,9 @@
               <a:buNone/>
             </a:pPr>
             <a:r>
-              <a:rPr lang="en-US" sz="1300" b="1" dirty="0">
-                <a:solidFill>
-                  <a:srgbClr val="0F172A"/>
+              <a:rPr lang="en-US" sz="1250" b="1" dirty="0">
+                <a:solidFill>
+                  <a:srgbClr val="101828"/>
                 </a:solidFill>
                 <a:latin typeface="Malgun Gothic" pitchFamily="34" charset="0"/>
                 <a:ea typeface="Malgun Gothic" pitchFamily="34" charset="-122"/>
@@ -3743,20 +5602,34 @@
               </a:rPr>
               <a:t>피규어</a:t>
             </a:r>
-            <a:endParaRPr lang="en-US" sz="1300" dirty="0"/>
-          </a:p>
-        </p:txBody>
-      </p:sp>
-      <p:sp>
-        <p:nvSpPr>
-          <p:cNvPr id="8" name="Text 5"/>
-          <p:cNvSpPr txBox="1"/>
-          <p:nvPr/>
-        </p:nvSpPr>
-        <p:spPr>
-          <a:xfrm>
-            <a:off x="2020824" y="1735836"/>
-            <a:ext cx="2012594" cy="1124712"/>
+            <a:pPr algn="l" indent="0" marL="0">
+              <a:buNone/>
+            </a:pPr>
+            <a:r>
+              <a:rPr lang="en-US" sz="800" b="1" dirty="0">
+                <a:solidFill>
+                  <a:srgbClr val="3182F6"/>
+                </a:solidFill>
+                <a:latin typeface="Malgun Gothic" pitchFamily="34" charset="0"/>
+                <a:ea typeface="Malgun Gothic" pitchFamily="34" charset="-122"/>
+                <a:cs typeface="Malgun Gothic" pitchFamily="34" charset="-120"/>
+              </a:rPr>
+              <a:t>   3곳</a:t>
+            </a:r>
+            <a:endParaRPr lang="en-US" sz="1250" dirty="0"/>
+          </a:p>
+        </p:txBody>
+      </p:sp>
+      <p:sp>
+        <p:nvSpPr>
+          <p:cNvPr id="13" name="Text 10"/>
+          <p:cNvSpPr txBox="1"/>
+          <p:nvPr/>
+        </p:nvSpPr>
+        <p:spPr>
+          <a:xfrm>
+            <a:off x="2142744" y="2020824"/>
+            <a:ext cx="1805330" cy="816864"/>
           </a:xfrm>
           <a:prstGeom prst="rect">
             <a:avLst/>
@@ -3770,28 +5643,55 @@
           <a:p>
             <a:pPr algn="l" indent="0" marL="0">
               <a:lnSpc>
-                <a:spcPct val="120000"/>
+                <a:spcPct val="122000"/>
               </a:lnSpc>
               <a:buNone/>
             </a:pPr>
             <a:r>
               <a:rPr lang="en-US" sz="800" dirty="0">
                 <a:solidFill>
-                  <a:srgbClr val="475569"/>
-                </a:solidFill>
-                <a:latin typeface="Malgun Gothic" pitchFamily="34" charset="0"/>
-                <a:ea typeface="Malgun Gothic" pitchFamily="34" charset="-122"/>
-                <a:cs typeface="Malgun Gothic" pitchFamily="34" charset="-120"/>
-              </a:rPr>
-              <a:t>3곳 — 3D 인물 피규어 제작, 캐릭터 피규어</a:t>
+                  <a:srgbClr val="5A6B85"/>
+                </a:solidFill>
+                <a:latin typeface="Malgun Gothic" pitchFamily="34" charset="0"/>
+                <a:ea typeface="Malgun Gothic" pitchFamily="34" charset="-122"/>
+                <a:cs typeface="Malgun Gothic" pitchFamily="34" charset="-120"/>
+              </a:rPr>
+              <a:t>3D 인물 피규어 제작, 캐릭터 피규어</a:t>
             </a:r>
             <a:endParaRPr lang="en-US" sz="800" dirty="0"/>
           </a:p>
         </p:txBody>
+      </p:sp>
+      <p:sp>
+        <p:nvSpPr>
+          <p:cNvPr id="14" name="Shape 11"/>
+          <p:cNvSpPr/>
+          <p:nvPr/>
+        </p:nvSpPr>
+        <p:spPr>
+          <a:xfrm>
+            <a:off x="4332122" y="1426464"/>
+            <a:ext cx="3527450" cy="1530096"/>
+          </a:xfrm>
+          <a:prstGeom prst="roundRect">
+            <a:avLst>
+              <a:gd name="adj" fmla="val 2988"/>
+            </a:avLst>
+          </a:prstGeom>
+          <a:solidFill>
+            <a:srgbClr val="FBFCFE"/>
+          </a:solidFill>
+          <a:ln w="9525">
+            <a:solidFill>
+              <a:srgbClr val="E4EBF5"/>
+            </a:solidFill>
+            <a:prstDash val="solid"/>
+          </a:ln>
+        </p:spPr>
       </p:sp>
       <p:pic>
         <p:nvPicPr>
-          <p:cNvPr id="9" name="Image 1" descr="/home/user/Flitunion/docs/photos/seller-items/maedeup.jpg">    </p:cNvPr>
+          <p:cNvPr id="15" name="Image 1" descr="/home/user/Flitunion/docs/photos/seller-items/maedeup.jpg">    </p:cNvPr>
           <p:cNvPicPr>
             <a:picLocks noChangeAspect="1"/>
           </p:cNvPicPr>
@@ -3805,8 +5705,8 @@
         </p:blipFill>
         <p:spPr>
           <a:xfrm>
-            <a:off x="4307738" y="1443228"/>
-            <a:ext cx="1417320" cy="1417320"/>
+            <a:off x="4450994" y="1545336"/>
+            <a:ext cx="1292352" cy="1292352"/>
           </a:xfrm>
           <a:prstGeom prst="rect">
             <a:avLst/>
@@ -3815,14 +5715,53 @@
       </p:pic>
       <p:sp>
         <p:nvSpPr>
-          <p:cNvPr id="10" name="Text 6"/>
-          <p:cNvSpPr txBox="1"/>
-          <p:nvPr/>
-        </p:nvSpPr>
-        <p:spPr>
-          <a:xfrm>
-            <a:off x="5871362" y="1443228"/>
-            <a:ext cx="2012594" cy="292608"/>
+          <p:cNvPr id="16" name="Text 12"/>
+          <p:cNvSpPr txBox="1"/>
+          <p:nvPr/>
+        </p:nvSpPr>
+        <p:spPr>
+          <a:xfrm>
+            <a:off x="5907938" y="1563624"/>
+            <a:ext cx="1805330" cy="164592"/>
+          </a:xfrm>
+          <a:prstGeom prst="rect">
+            <a:avLst/>
+          </a:prstGeom>
+          <a:noFill/>
+          <a:ln/>
+        </p:spPr>
+        <p:txBody>
+          <a:bodyPr wrap="square" rtlCol="0" anchor="ctr"/>
+          <a:lstStyle/>
+          <a:p>
+            <a:pPr algn="l" indent="0" marL="0">
+              <a:buNone/>
+            </a:pPr>
+            <a:r>
+              <a:rPr lang="en-US" sz="750" b="1" spc="100" kern="0" dirty="0">
+                <a:solidFill>
+                  <a:srgbClr val="3182F6"/>
+                </a:solidFill>
+                <a:latin typeface="Arial" pitchFamily="34" charset="0"/>
+                <a:ea typeface="Arial" pitchFamily="34" charset="-122"/>
+                <a:cs typeface="Arial" pitchFamily="34" charset="-120"/>
+              </a:rPr>
+              <a:t>20</a:t>
+            </a:r>
+            <a:endParaRPr lang="en-US" sz="750" dirty="0"/>
+          </a:p>
+        </p:txBody>
+      </p:sp>
+      <p:sp>
+        <p:nvSpPr>
+          <p:cNvPr id="17" name="Text 13"/>
+          <p:cNvSpPr txBox="1"/>
+          <p:nvPr/>
+        </p:nvSpPr>
+        <p:spPr>
+          <a:xfrm>
+            <a:off x="5907938" y="1728216"/>
+            <a:ext cx="1805330" cy="274320"/>
           </a:xfrm>
           <a:prstGeom prst="rect">
             <a:avLst/>
@@ -3838,9 +5777,9 @@
               <a:buNone/>
             </a:pPr>
             <a:r>
-              <a:rPr lang="en-US" sz="1300" b="1" dirty="0">
-                <a:solidFill>
-                  <a:srgbClr val="0F172A"/>
+              <a:rPr lang="en-US" sz="1250" b="1" dirty="0">
+                <a:solidFill>
+                  <a:srgbClr val="101828"/>
                 </a:solidFill>
                 <a:latin typeface="Malgun Gothic" pitchFamily="34" charset="0"/>
                 <a:ea typeface="Malgun Gothic" pitchFamily="34" charset="-122"/>
@@ -3848,20 +5787,34 @@
               </a:rPr>
               <a:t>매듭 · 리본</a:t>
             </a:r>
-            <a:endParaRPr lang="en-US" sz="1300" dirty="0"/>
-          </a:p>
-        </p:txBody>
-      </p:sp>
-      <p:sp>
-        <p:nvSpPr>
-          <p:cNvPr id="11" name="Text 7"/>
-          <p:cNvSpPr txBox="1"/>
-          <p:nvPr/>
-        </p:nvSpPr>
-        <p:spPr>
-          <a:xfrm>
-            <a:off x="5871362" y="1735836"/>
-            <a:ext cx="2012594" cy="1124712"/>
+            <a:pPr algn="l" indent="0" marL="0">
+              <a:buNone/>
+            </a:pPr>
+            <a:r>
+              <a:rPr lang="en-US" sz="800" b="1" dirty="0">
+                <a:solidFill>
+                  <a:srgbClr val="3182F6"/>
+                </a:solidFill>
+                <a:latin typeface="Malgun Gothic" pitchFamily="34" charset="0"/>
+                <a:ea typeface="Malgun Gothic" pitchFamily="34" charset="-122"/>
+                <a:cs typeface="Malgun Gothic" pitchFamily="34" charset="-120"/>
+              </a:rPr>
+              <a:t>   3곳</a:t>
+            </a:r>
+            <a:endParaRPr lang="en-US" sz="1250" dirty="0"/>
+          </a:p>
+        </p:txBody>
+      </p:sp>
+      <p:sp>
+        <p:nvSpPr>
+          <p:cNvPr id="18" name="Text 14"/>
+          <p:cNvSpPr txBox="1"/>
+          <p:nvPr/>
+        </p:nvSpPr>
+        <p:spPr>
+          <a:xfrm>
+            <a:off x="5907938" y="2020824"/>
+            <a:ext cx="1805330" cy="816864"/>
           </a:xfrm>
           <a:prstGeom prst="rect">
             <a:avLst/>
@@ -3875,28 +5828,55 @@
           <a:p>
             <a:pPr algn="l" indent="0" marL="0">
               <a:lnSpc>
-                <a:spcPct val="120000"/>
+                <a:spcPct val="122000"/>
               </a:lnSpc>
               <a:buNone/>
             </a:pPr>
             <a:r>
               <a:rPr lang="en-US" sz="800" dirty="0">
                 <a:solidFill>
-                  <a:srgbClr val="475569"/>
-                </a:solidFill>
-                <a:latin typeface="Malgun Gothic" pitchFamily="34" charset="0"/>
-                <a:ea typeface="Malgun Gothic" pitchFamily="34" charset="-122"/>
-                <a:cs typeface="Malgun Gothic" pitchFamily="34" charset="-120"/>
-              </a:rPr>
-              <a:t>3곳 — 전통 매듭 팔찌·머리핀, 리본 공예</a:t>
+                  <a:srgbClr val="5A6B85"/>
+                </a:solidFill>
+                <a:latin typeface="Malgun Gothic" pitchFamily="34" charset="0"/>
+                <a:ea typeface="Malgun Gothic" pitchFamily="34" charset="-122"/>
+                <a:cs typeface="Malgun Gothic" pitchFamily="34" charset="-120"/>
+              </a:rPr>
+              <a:t>전통 매듭 팔찌·머리핀, 리본 공예</a:t>
             </a:r>
             <a:endParaRPr lang="en-US" sz="800" dirty="0"/>
           </a:p>
         </p:txBody>
+      </p:sp>
+      <p:sp>
+        <p:nvSpPr>
+          <p:cNvPr id="19" name="Shape 15"/>
+          <p:cNvSpPr/>
+          <p:nvPr/>
+        </p:nvSpPr>
+        <p:spPr>
+          <a:xfrm>
+            <a:off x="8097317" y="1426464"/>
+            <a:ext cx="3527450" cy="1530096"/>
+          </a:xfrm>
+          <a:prstGeom prst="roundRect">
+            <a:avLst>
+              <a:gd name="adj" fmla="val 2988"/>
+            </a:avLst>
+          </a:prstGeom>
+          <a:solidFill>
+            <a:srgbClr val="FBFCFE"/>
+          </a:solidFill>
+          <a:ln w="9525">
+            <a:solidFill>
+              <a:srgbClr val="E4EBF5"/>
+            </a:solidFill>
+            <a:prstDash val="solid"/>
+          </a:ln>
+        </p:spPr>
       </p:sp>
       <p:pic>
         <p:nvPicPr>
-          <p:cNvPr id="12" name="Image 2" descr="/home/user/Flitunion/docs/photos/seller-items/nail.jpg">    </p:cNvPr>
+          <p:cNvPr id="20" name="Image 2" descr="/home/user/Flitunion/docs/photos/seller-items/nail.jpg">    </p:cNvPr>
           <p:cNvPicPr>
             <a:picLocks noChangeAspect="1"/>
           </p:cNvPicPr>
@@ -3910,8 +5890,8 @@
         </p:blipFill>
         <p:spPr>
           <a:xfrm>
-            <a:off x="8158277" y="1443228"/>
-            <a:ext cx="1417320" cy="1417320"/>
+            <a:off x="8216189" y="1545336"/>
+            <a:ext cx="1292352" cy="1292352"/>
           </a:xfrm>
           <a:prstGeom prst="rect">
             <a:avLst/>
@@ -3920,14 +5900,53 @@
       </p:pic>
       <p:sp>
         <p:nvSpPr>
-          <p:cNvPr id="13" name="Text 8"/>
-          <p:cNvSpPr txBox="1"/>
-          <p:nvPr/>
-        </p:nvSpPr>
-        <p:spPr>
-          <a:xfrm>
-            <a:off x="9721901" y="1443228"/>
-            <a:ext cx="2012594" cy="292608"/>
+          <p:cNvPr id="21" name="Text 16"/>
+          <p:cNvSpPr txBox="1"/>
+          <p:nvPr/>
+        </p:nvSpPr>
+        <p:spPr>
+          <a:xfrm>
+            <a:off x="9673133" y="1563624"/>
+            <a:ext cx="1805330" cy="164592"/>
+          </a:xfrm>
+          <a:prstGeom prst="rect">
+            <a:avLst/>
+          </a:prstGeom>
+          <a:noFill/>
+          <a:ln/>
+        </p:spPr>
+        <p:txBody>
+          <a:bodyPr wrap="square" rtlCol="0" anchor="ctr"/>
+          <a:lstStyle/>
+          <a:p>
+            <a:pPr algn="l" indent="0" marL="0">
+              <a:buNone/>
+            </a:pPr>
+            <a:r>
+              <a:rPr lang="en-US" sz="750" b="1" spc="100" kern="0" dirty="0">
+                <a:solidFill>
+                  <a:srgbClr val="3182F6"/>
+                </a:solidFill>
+                <a:latin typeface="Arial" pitchFamily="34" charset="0"/>
+                <a:ea typeface="Arial" pitchFamily="34" charset="-122"/>
+                <a:cs typeface="Arial" pitchFamily="34" charset="-120"/>
+              </a:rPr>
+              <a:t>21</a:t>
+            </a:r>
+            <a:endParaRPr lang="en-US" sz="750" dirty="0"/>
+          </a:p>
+        </p:txBody>
+      </p:sp>
+      <p:sp>
+        <p:nvSpPr>
+          <p:cNvPr id="22" name="Text 17"/>
+          <p:cNvSpPr txBox="1"/>
+          <p:nvPr/>
+        </p:nvSpPr>
+        <p:spPr>
+          <a:xfrm>
+            <a:off x="9673133" y="1728216"/>
+            <a:ext cx="1805330" cy="274320"/>
           </a:xfrm>
           <a:prstGeom prst="rect">
             <a:avLst/>
@@ -3943,9 +5962,9 @@
               <a:buNone/>
             </a:pPr>
             <a:r>
-              <a:rPr lang="en-US" sz="1300" b="1" dirty="0">
-                <a:solidFill>
-                  <a:srgbClr val="0F172A"/>
+              <a:rPr lang="en-US" sz="1250" b="1" dirty="0">
+                <a:solidFill>
+                  <a:srgbClr val="101828"/>
                 </a:solidFill>
                 <a:latin typeface="Malgun Gothic" pitchFamily="34" charset="0"/>
                 <a:ea typeface="Malgun Gothic" pitchFamily="34" charset="-122"/>
@@ -3953,20 +5972,34 @@
               </a:rPr>
               <a:t>네일 · 뷰티</a:t>
             </a:r>
-            <a:endParaRPr lang="en-US" sz="1300" dirty="0"/>
-          </a:p>
-        </p:txBody>
-      </p:sp>
-      <p:sp>
-        <p:nvSpPr>
-          <p:cNvPr id="14" name="Text 9"/>
-          <p:cNvSpPr txBox="1"/>
-          <p:nvPr/>
-        </p:nvSpPr>
-        <p:spPr>
-          <a:xfrm>
-            <a:off x="9721901" y="1735836"/>
-            <a:ext cx="2012594" cy="1124712"/>
+            <a:pPr algn="l" indent="0" marL="0">
+              <a:buNone/>
+            </a:pPr>
+            <a:r>
+              <a:rPr lang="en-US" sz="800" b="1" dirty="0">
+                <a:solidFill>
+                  <a:srgbClr val="3182F6"/>
+                </a:solidFill>
+                <a:latin typeface="Malgun Gothic" pitchFamily="34" charset="0"/>
+                <a:ea typeface="Malgun Gothic" pitchFamily="34" charset="-122"/>
+                <a:cs typeface="Malgun Gothic" pitchFamily="34" charset="-120"/>
+              </a:rPr>
+              <a:t>   3곳</a:t>
+            </a:r>
+            <a:endParaRPr lang="en-US" sz="1250" dirty="0"/>
+          </a:p>
+        </p:txBody>
+      </p:sp>
+      <p:sp>
+        <p:nvSpPr>
+          <p:cNvPr id="23" name="Text 18"/>
+          <p:cNvSpPr txBox="1"/>
+          <p:nvPr/>
+        </p:nvSpPr>
+        <p:spPr>
+          <a:xfrm>
+            <a:off x="9673133" y="2020824"/>
+            <a:ext cx="1805330" cy="816864"/>
           </a:xfrm>
           <a:prstGeom prst="rect">
             <a:avLst/>
@@ -3980,28 +6013,55 @@
           <a:p>
             <a:pPr algn="l" indent="0" marL="0">
               <a:lnSpc>
-                <a:spcPct val="120000"/>
+                <a:spcPct val="122000"/>
               </a:lnSpc>
               <a:buNone/>
             </a:pPr>
             <a:r>
               <a:rPr lang="en-US" sz="800" dirty="0">
                 <a:solidFill>
-                  <a:srgbClr val="475569"/>
-                </a:solidFill>
-                <a:latin typeface="Malgun Gothic" pitchFamily="34" charset="0"/>
-                <a:ea typeface="Malgun Gothic" pitchFamily="34" charset="-122"/>
-                <a:cs typeface="Malgun Gothic" pitchFamily="34" charset="-120"/>
-              </a:rPr>
-              <a:t>3곳 — 수제 네일팁 주문제작, 더마·K뷰티 화장품</a:t>
+                  <a:srgbClr val="5A6B85"/>
+                </a:solidFill>
+                <a:latin typeface="Malgun Gothic" pitchFamily="34" charset="0"/>
+                <a:ea typeface="Malgun Gothic" pitchFamily="34" charset="-122"/>
+                <a:cs typeface="Malgun Gothic" pitchFamily="34" charset="-120"/>
+              </a:rPr>
+              <a:t>수제 네일팁 주문제작, 더마·K뷰티 화장품</a:t>
             </a:r>
             <a:endParaRPr lang="en-US" sz="800" dirty="0"/>
           </a:p>
         </p:txBody>
+      </p:sp>
+      <p:sp>
+        <p:nvSpPr>
+          <p:cNvPr id="24" name="Shape 19"/>
+          <p:cNvSpPr/>
+          <p:nvPr/>
+        </p:nvSpPr>
+        <p:spPr>
+          <a:xfrm>
+            <a:off x="566928" y="3139440"/>
+            <a:ext cx="3527450" cy="1530096"/>
+          </a:xfrm>
+          <a:prstGeom prst="roundRect">
+            <a:avLst>
+              <a:gd name="adj" fmla="val 2988"/>
+            </a:avLst>
+          </a:prstGeom>
+          <a:solidFill>
+            <a:srgbClr val="FBFCFE"/>
+          </a:solidFill>
+          <a:ln w="9525">
+            <a:solidFill>
+              <a:srgbClr val="E4EBF5"/>
+            </a:solidFill>
+            <a:prstDash val="solid"/>
+          </a:ln>
+        </p:spPr>
       </p:sp>
       <p:pic>
         <p:nvPicPr>
-          <p:cNvPr id="15" name="Image 3" descr="/home/user/Flitunion/docs/photos/seller-items/henna.jpg">    </p:cNvPr>
+          <p:cNvPr id="25" name="Image 3" descr="/home/user/Flitunion/docs/photos/seller-items/henna.jpg">    </p:cNvPr>
           <p:cNvPicPr>
             <a:picLocks noChangeAspect="1"/>
           </p:cNvPicPr>
@@ -4015,8 +6075,8 @@
         </p:blipFill>
         <p:spPr>
           <a:xfrm>
-            <a:off x="457200" y="3204972"/>
-            <a:ext cx="1417320" cy="1417320"/>
+            <a:off x="685800" y="3258312"/>
+            <a:ext cx="1292352" cy="1292352"/>
           </a:xfrm>
           <a:prstGeom prst="rect">
             <a:avLst/>
@@ -4025,14 +6085,53 @@
       </p:pic>
       <p:sp>
         <p:nvSpPr>
-          <p:cNvPr id="16" name="Text 10"/>
-          <p:cNvSpPr txBox="1"/>
-          <p:nvPr/>
-        </p:nvSpPr>
-        <p:spPr>
-          <a:xfrm>
-            <a:off x="2020824" y="3204972"/>
-            <a:ext cx="2012594" cy="292608"/>
+          <p:cNvPr id="26" name="Text 20"/>
+          <p:cNvSpPr txBox="1"/>
+          <p:nvPr/>
+        </p:nvSpPr>
+        <p:spPr>
+          <a:xfrm>
+            <a:off x="2142744" y="3276600"/>
+            <a:ext cx="1805330" cy="164592"/>
+          </a:xfrm>
+          <a:prstGeom prst="rect">
+            <a:avLst/>
+          </a:prstGeom>
+          <a:noFill/>
+          <a:ln/>
+        </p:spPr>
+        <p:txBody>
+          <a:bodyPr wrap="square" rtlCol="0" anchor="ctr"/>
+          <a:lstStyle/>
+          <a:p>
+            <a:pPr algn="l" indent="0" marL="0">
+              <a:buNone/>
+            </a:pPr>
+            <a:r>
+              <a:rPr lang="en-US" sz="750" b="1" spc="100" kern="0" dirty="0">
+                <a:solidFill>
+                  <a:srgbClr val="3182F6"/>
+                </a:solidFill>
+                <a:latin typeface="Arial" pitchFamily="34" charset="0"/>
+                <a:ea typeface="Arial" pitchFamily="34" charset="-122"/>
+                <a:cs typeface="Arial" pitchFamily="34" charset="-120"/>
+              </a:rPr>
+              <a:t>22</a:t>
+            </a:r>
+            <a:endParaRPr lang="en-US" sz="750" dirty="0"/>
+          </a:p>
+        </p:txBody>
+      </p:sp>
+      <p:sp>
+        <p:nvSpPr>
+          <p:cNvPr id="27" name="Text 21"/>
+          <p:cNvSpPr txBox="1"/>
+          <p:nvPr/>
+        </p:nvSpPr>
+        <p:spPr>
+          <a:xfrm>
+            <a:off x="2142744" y="3441192"/>
+            <a:ext cx="1805330" cy="274320"/>
           </a:xfrm>
           <a:prstGeom prst="rect">
             <a:avLst/>
@@ -4048,9 +6147,9 @@
               <a:buNone/>
             </a:pPr>
             <a:r>
-              <a:rPr lang="en-US" sz="1300" b="1" dirty="0">
-                <a:solidFill>
-                  <a:srgbClr val="0F172A"/>
+              <a:rPr lang="en-US" sz="1250" b="1" dirty="0">
+                <a:solidFill>
+                  <a:srgbClr val="101828"/>
                 </a:solidFill>
                 <a:latin typeface="Malgun Gothic" pitchFamily="34" charset="0"/>
                 <a:ea typeface="Malgun Gothic" pitchFamily="34" charset="-122"/>
@@ -4058,20 +6157,34 @@
               </a:rPr>
               <a:t>헤나 · 페이스페인팅</a:t>
             </a:r>
-            <a:endParaRPr lang="en-US" sz="1300" dirty="0"/>
-          </a:p>
-        </p:txBody>
-      </p:sp>
-      <p:sp>
-        <p:nvSpPr>
-          <p:cNvPr id="17" name="Text 11"/>
-          <p:cNvSpPr txBox="1"/>
-          <p:nvPr/>
-        </p:nvSpPr>
-        <p:spPr>
-          <a:xfrm>
-            <a:off x="2020824" y="3497580"/>
-            <a:ext cx="2012594" cy="1124712"/>
+            <a:pPr algn="l" indent="0" marL="0">
+              <a:buNone/>
+            </a:pPr>
+            <a:r>
+              <a:rPr lang="en-US" sz="800" b="1" dirty="0">
+                <a:solidFill>
+                  <a:srgbClr val="3182F6"/>
+                </a:solidFill>
+                <a:latin typeface="Malgun Gothic" pitchFamily="34" charset="0"/>
+                <a:ea typeface="Malgun Gothic" pitchFamily="34" charset="-122"/>
+                <a:cs typeface="Malgun Gothic" pitchFamily="34" charset="-120"/>
+              </a:rPr>
+              <a:t>   2곳</a:t>
+            </a:r>
+            <a:endParaRPr lang="en-US" sz="1250" dirty="0"/>
+          </a:p>
+        </p:txBody>
+      </p:sp>
+      <p:sp>
+        <p:nvSpPr>
+          <p:cNvPr id="28" name="Text 22"/>
+          <p:cNvSpPr txBox="1"/>
+          <p:nvPr/>
+        </p:nvSpPr>
+        <p:spPr>
+          <a:xfrm>
+            <a:off x="2142744" y="3733800"/>
+            <a:ext cx="1805330" cy="816864"/>
           </a:xfrm>
           <a:prstGeom prst="rect">
             <a:avLst/>
@@ -4085,28 +6198,55 @@
           <a:p>
             <a:pPr algn="l" indent="0" marL="0">
               <a:lnSpc>
-                <a:spcPct val="120000"/>
+                <a:spcPct val="122000"/>
               </a:lnSpc>
               <a:buNone/>
             </a:pPr>
             <a:r>
               <a:rPr lang="en-US" sz="800" dirty="0">
                 <a:solidFill>
-                  <a:srgbClr val="475569"/>
-                </a:solidFill>
-                <a:latin typeface="Malgun Gothic" pitchFamily="34" charset="0"/>
-                <a:ea typeface="Malgun Gothic" pitchFamily="34" charset="-122"/>
-                <a:cs typeface="Malgun Gothic" pitchFamily="34" charset="-120"/>
-              </a:rPr>
-              <a:t>2곳 — 헤나 타투와 페이스페인팅. 아이 동반 행사 필수 부스</a:t>
+                  <a:srgbClr val="5A6B85"/>
+                </a:solidFill>
+                <a:latin typeface="Malgun Gothic" pitchFamily="34" charset="0"/>
+                <a:ea typeface="Malgun Gothic" pitchFamily="34" charset="-122"/>
+                <a:cs typeface="Malgun Gothic" pitchFamily="34" charset="-120"/>
+              </a:rPr>
+              <a:t>헤나 타투와 페이스페인팅. 아이 동반 행사 필수 부스</a:t>
             </a:r>
             <a:endParaRPr lang="en-US" sz="800" dirty="0"/>
           </a:p>
         </p:txBody>
+      </p:sp>
+      <p:sp>
+        <p:nvSpPr>
+          <p:cNvPr id="29" name="Shape 23"/>
+          <p:cNvSpPr/>
+          <p:nvPr/>
+        </p:nvSpPr>
+        <p:spPr>
+          <a:xfrm>
+            <a:off x="4332122" y="3139440"/>
+            <a:ext cx="3527450" cy="1530096"/>
+          </a:xfrm>
+          <a:prstGeom prst="roundRect">
+            <a:avLst>
+              <a:gd name="adj" fmla="val 2988"/>
+            </a:avLst>
+          </a:prstGeom>
+          <a:solidFill>
+            <a:srgbClr val="FBFCFE"/>
+          </a:solidFill>
+          <a:ln w="9525">
+            <a:solidFill>
+              <a:srgbClr val="E4EBF5"/>
+            </a:solidFill>
+            <a:prstDash val="solid"/>
+          </a:ln>
+        </p:spPr>
       </p:sp>
       <p:pic>
         <p:nvPicPr>
-          <p:cNvPr id="18" name="Image 4" descr="/home/user/Flitunion/docs/photos/seller-items/wood.jpg">    </p:cNvPr>
+          <p:cNvPr id="30" name="Image 4" descr="/home/user/Flitunion/docs/photos/seller-items/wood.jpg">    </p:cNvPr>
           <p:cNvPicPr>
             <a:picLocks noChangeAspect="1"/>
           </p:cNvPicPr>
@@ -4120,8 +6260,8 @@
         </p:blipFill>
         <p:spPr>
           <a:xfrm>
-            <a:off x="4307738" y="3204972"/>
-            <a:ext cx="1417320" cy="1417320"/>
+            <a:off x="4450994" y="3258312"/>
+            <a:ext cx="1292352" cy="1292352"/>
           </a:xfrm>
           <a:prstGeom prst="rect">
             <a:avLst/>
@@ -4130,14 +6270,53 @@
       </p:pic>
       <p:sp>
         <p:nvSpPr>
-          <p:cNvPr id="19" name="Text 12"/>
-          <p:cNvSpPr txBox="1"/>
-          <p:nvPr/>
-        </p:nvSpPr>
-        <p:spPr>
-          <a:xfrm>
-            <a:off x="5871362" y="3204972"/>
-            <a:ext cx="2012594" cy="292608"/>
+          <p:cNvPr id="31" name="Text 24"/>
+          <p:cNvSpPr txBox="1"/>
+          <p:nvPr/>
+        </p:nvSpPr>
+        <p:spPr>
+          <a:xfrm>
+            <a:off x="5907938" y="3276600"/>
+            <a:ext cx="1805330" cy="164592"/>
+          </a:xfrm>
+          <a:prstGeom prst="rect">
+            <a:avLst/>
+          </a:prstGeom>
+          <a:noFill/>
+          <a:ln/>
+        </p:spPr>
+        <p:txBody>
+          <a:bodyPr wrap="square" rtlCol="0" anchor="ctr"/>
+          <a:lstStyle/>
+          <a:p>
+            <a:pPr algn="l" indent="0" marL="0">
+              <a:buNone/>
+            </a:pPr>
+            <a:r>
+              <a:rPr lang="en-US" sz="750" b="1" spc="100" kern="0" dirty="0">
+                <a:solidFill>
+                  <a:srgbClr val="3182F6"/>
+                </a:solidFill>
+                <a:latin typeface="Arial" pitchFamily="34" charset="0"/>
+                <a:ea typeface="Arial" pitchFamily="34" charset="-122"/>
+                <a:cs typeface="Arial" pitchFamily="34" charset="-120"/>
+              </a:rPr>
+              <a:t>23</a:t>
+            </a:r>
+            <a:endParaRPr lang="en-US" sz="750" dirty="0"/>
+          </a:p>
+        </p:txBody>
+      </p:sp>
+      <p:sp>
+        <p:nvSpPr>
+          <p:cNvPr id="32" name="Text 25"/>
+          <p:cNvSpPr txBox="1"/>
+          <p:nvPr/>
+        </p:nvSpPr>
+        <p:spPr>
+          <a:xfrm>
+            <a:off x="5907938" y="3441192"/>
+            <a:ext cx="1805330" cy="274320"/>
           </a:xfrm>
           <a:prstGeom prst="rect">
             <a:avLst/>
@@ -4153,9 +6332,9 @@
               <a:buNone/>
             </a:pPr>
             <a:r>
-              <a:rPr lang="en-US" sz="1300" b="1" dirty="0">
-                <a:solidFill>
-                  <a:srgbClr val="0F172A"/>
+              <a:rPr lang="en-US" sz="1250" b="1" dirty="0">
+                <a:solidFill>
+                  <a:srgbClr val="101828"/>
                 </a:solidFill>
                 <a:latin typeface="Malgun Gothic" pitchFamily="34" charset="0"/>
                 <a:ea typeface="Malgun Gothic" pitchFamily="34" charset="-122"/>
@@ -4163,20 +6342,34 @@
               </a:rPr>
               <a:t>목공예</a:t>
             </a:r>
-            <a:endParaRPr lang="en-US" sz="1300" dirty="0"/>
-          </a:p>
-        </p:txBody>
-      </p:sp>
-      <p:sp>
-        <p:nvSpPr>
-          <p:cNvPr id="20" name="Text 13"/>
-          <p:cNvSpPr txBox="1"/>
-          <p:nvPr/>
-        </p:nvSpPr>
-        <p:spPr>
-          <a:xfrm>
-            <a:off x="5871362" y="3497580"/>
-            <a:ext cx="2012594" cy="1124712"/>
+            <a:pPr algn="l" indent="0" marL="0">
+              <a:buNone/>
+            </a:pPr>
+            <a:r>
+              <a:rPr lang="en-US" sz="800" b="1" dirty="0">
+                <a:solidFill>
+                  <a:srgbClr val="3182F6"/>
+                </a:solidFill>
+                <a:latin typeface="Malgun Gothic" pitchFamily="34" charset="0"/>
+                <a:ea typeface="Malgun Gothic" pitchFamily="34" charset="-122"/>
+                <a:cs typeface="Malgun Gothic" pitchFamily="34" charset="-120"/>
+              </a:rPr>
+              <a:t>   2곳</a:t>
+            </a:r>
+            <a:endParaRPr lang="en-US" sz="1250" dirty="0"/>
+          </a:p>
+        </p:txBody>
+      </p:sp>
+      <p:sp>
+        <p:nvSpPr>
+          <p:cNvPr id="33" name="Text 26"/>
+          <p:cNvSpPr txBox="1"/>
+          <p:nvPr/>
+        </p:nvSpPr>
+        <p:spPr>
+          <a:xfrm>
+            <a:off x="5907938" y="3733800"/>
+            <a:ext cx="1805330" cy="816864"/>
           </a:xfrm>
           <a:prstGeom prst="rect">
             <a:avLst/>
@@ -4190,28 +6383,55 @@
           <a:p>
             <a:pPr algn="l" indent="0" marL="0">
               <a:lnSpc>
-                <a:spcPct val="120000"/>
+                <a:spcPct val="122000"/>
               </a:lnSpc>
               <a:buNone/>
             </a:pPr>
             <a:r>
               <a:rPr lang="en-US" sz="800" dirty="0">
                 <a:solidFill>
-                  <a:srgbClr val="475569"/>
-                </a:solidFill>
-                <a:latin typeface="Malgun Gothic" pitchFamily="34" charset="0"/>
-                <a:ea typeface="Malgun Gothic" pitchFamily="34" charset="-122"/>
-                <a:cs typeface="Malgun Gothic" pitchFamily="34" charset="-120"/>
-              </a:rPr>
-              <a:t>2곳 — 원목 소품, 바느질 도구, 데스크 오거나이저</a:t>
+                  <a:srgbClr val="5A6B85"/>
+                </a:solidFill>
+                <a:latin typeface="Malgun Gothic" pitchFamily="34" charset="0"/>
+                <a:ea typeface="Malgun Gothic" pitchFamily="34" charset="-122"/>
+                <a:cs typeface="Malgun Gothic" pitchFamily="34" charset="-120"/>
+              </a:rPr>
+              <a:t>원목 소품, 바느질 도구, 데스크 오거나이저</a:t>
             </a:r>
             <a:endParaRPr lang="en-US" sz="800" dirty="0"/>
           </a:p>
         </p:txBody>
+      </p:sp>
+      <p:sp>
+        <p:nvSpPr>
+          <p:cNvPr id="34" name="Shape 27"/>
+          <p:cNvSpPr/>
+          <p:nvPr/>
+        </p:nvSpPr>
+        <p:spPr>
+          <a:xfrm>
+            <a:off x="8097317" y="3139440"/>
+            <a:ext cx="3527450" cy="1530096"/>
+          </a:xfrm>
+          <a:prstGeom prst="roundRect">
+            <a:avLst>
+              <a:gd name="adj" fmla="val 2988"/>
+            </a:avLst>
+          </a:prstGeom>
+          <a:solidFill>
+            <a:srgbClr val="FBFCFE"/>
+          </a:solidFill>
+          <a:ln w="9525">
+            <a:solidFill>
+              <a:srgbClr val="E4EBF5"/>
+            </a:solidFill>
+            <a:prstDash val="solid"/>
+          </a:ln>
+        </p:spPr>
       </p:sp>
       <p:pic>
         <p:nvPicPr>
-          <p:cNvPr id="21" name="Image 5" descr="/home/user/Flitunion/docs/photos/seller-items/badge.jpg">    </p:cNvPr>
+          <p:cNvPr id="35" name="Image 5" descr="/home/user/Flitunion/docs/photos/seller-items/badge.jpg">    </p:cNvPr>
           <p:cNvPicPr>
             <a:picLocks noChangeAspect="1"/>
           </p:cNvPicPr>
@@ -4225,8 +6445,8 @@
         </p:blipFill>
         <p:spPr>
           <a:xfrm>
-            <a:off x="8158277" y="3204972"/>
-            <a:ext cx="1417320" cy="1417320"/>
+            <a:off x="8216189" y="3258312"/>
+            <a:ext cx="1292352" cy="1292352"/>
           </a:xfrm>
           <a:prstGeom prst="rect">
             <a:avLst/>
@@ -4235,14 +6455,53 @@
       </p:pic>
       <p:sp>
         <p:nvSpPr>
-          <p:cNvPr id="22" name="Text 14"/>
-          <p:cNvSpPr txBox="1"/>
-          <p:nvPr/>
-        </p:nvSpPr>
-        <p:spPr>
-          <a:xfrm>
-            <a:off x="9721901" y="3204972"/>
-            <a:ext cx="2012594" cy="292608"/>
+          <p:cNvPr id="36" name="Text 28"/>
+          <p:cNvSpPr txBox="1"/>
+          <p:nvPr/>
+        </p:nvSpPr>
+        <p:spPr>
+          <a:xfrm>
+            <a:off x="9673133" y="3276600"/>
+            <a:ext cx="1805330" cy="164592"/>
+          </a:xfrm>
+          <a:prstGeom prst="rect">
+            <a:avLst/>
+          </a:prstGeom>
+          <a:noFill/>
+          <a:ln/>
+        </p:spPr>
+        <p:txBody>
+          <a:bodyPr wrap="square" rtlCol="0" anchor="ctr"/>
+          <a:lstStyle/>
+          <a:p>
+            <a:pPr algn="l" indent="0" marL="0">
+              <a:buNone/>
+            </a:pPr>
+            <a:r>
+              <a:rPr lang="en-US" sz="750" b="1" spc="100" kern="0" dirty="0">
+                <a:solidFill>
+                  <a:srgbClr val="3182F6"/>
+                </a:solidFill>
+                <a:latin typeface="Arial" pitchFamily="34" charset="0"/>
+                <a:ea typeface="Arial" pitchFamily="34" charset="-122"/>
+                <a:cs typeface="Arial" pitchFamily="34" charset="-120"/>
+              </a:rPr>
+              <a:t>24</a:t>
+            </a:r>
+            <a:endParaRPr lang="en-US" sz="750" dirty="0"/>
+          </a:p>
+        </p:txBody>
+      </p:sp>
+      <p:sp>
+        <p:nvSpPr>
+          <p:cNvPr id="37" name="Text 29"/>
+          <p:cNvSpPr txBox="1"/>
+          <p:nvPr/>
+        </p:nvSpPr>
+        <p:spPr>
+          <a:xfrm>
+            <a:off x="9673133" y="3441192"/>
+            <a:ext cx="1805330" cy="274320"/>
           </a:xfrm>
           <a:prstGeom prst="rect">
             <a:avLst/>
@@ -4258,9 +6517,9 @@
               <a:buNone/>
             </a:pPr>
             <a:r>
-              <a:rPr lang="en-US" sz="1300" b="1" dirty="0">
-                <a:solidFill>
-                  <a:srgbClr val="0F172A"/>
+              <a:rPr lang="en-US" sz="1250" b="1" dirty="0">
+                <a:solidFill>
+                  <a:srgbClr val="101828"/>
                 </a:solidFill>
                 <a:latin typeface="Malgun Gothic" pitchFamily="34" charset="0"/>
                 <a:ea typeface="Malgun Gothic" pitchFamily="34" charset="-122"/>
@@ -4268,20 +6527,34 @@
               </a:rPr>
               <a:t>뱃지</a:t>
             </a:r>
-            <a:endParaRPr lang="en-US" sz="1300" dirty="0"/>
-          </a:p>
-        </p:txBody>
-      </p:sp>
-      <p:sp>
-        <p:nvSpPr>
-          <p:cNvPr id="23" name="Text 15"/>
-          <p:cNvSpPr txBox="1"/>
-          <p:nvPr/>
-        </p:nvSpPr>
-        <p:spPr>
-          <a:xfrm>
-            <a:off x="9721901" y="3497580"/>
-            <a:ext cx="2012594" cy="1124712"/>
+            <a:pPr algn="l" indent="0" marL="0">
+              <a:buNone/>
+            </a:pPr>
+            <a:r>
+              <a:rPr lang="en-US" sz="800" b="1" dirty="0">
+                <a:solidFill>
+                  <a:srgbClr val="3182F6"/>
+                </a:solidFill>
+                <a:latin typeface="Malgun Gothic" pitchFamily="34" charset="0"/>
+                <a:ea typeface="Malgun Gothic" pitchFamily="34" charset="-122"/>
+                <a:cs typeface="Malgun Gothic" pitchFamily="34" charset="-120"/>
+              </a:rPr>
+              <a:t>   2곳</a:t>
+            </a:r>
+            <a:endParaRPr lang="en-US" sz="1250" dirty="0"/>
+          </a:p>
+        </p:txBody>
+      </p:sp>
+      <p:sp>
+        <p:nvSpPr>
+          <p:cNvPr id="38" name="Text 30"/>
+          <p:cNvSpPr txBox="1"/>
+          <p:nvPr/>
+        </p:nvSpPr>
+        <p:spPr>
+          <a:xfrm>
+            <a:off x="9673133" y="3733800"/>
+            <a:ext cx="1805330" cy="816864"/>
           </a:xfrm>
           <a:prstGeom prst="rect">
             <a:avLst/>
@@ -4295,28 +6568,55 @@
           <a:p>
             <a:pPr algn="l" indent="0" marL="0">
               <a:lnSpc>
-                <a:spcPct val="120000"/>
+                <a:spcPct val="122000"/>
               </a:lnSpc>
               <a:buNone/>
             </a:pPr>
             <a:r>
               <a:rPr lang="en-US" sz="800" dirty="0">
                 <a:solidFill>
-                  <a:srgbClr val="475569"/>
-                </a:solidFill>
-                <a:latin typeface="Malgun Gothic" pitchFamily="34" charset="0"/>
-                <a:ea typeface="Malgun Gothic" pitchFamily="34" charset="-122"/>
-                <a:cs typeface="Malgun Gothic" pitchFamily="34" charset="-120"/>
-              </a:rPr>
-              <a:t>2곳 — 캘리그래피·그림 뱃지 제작</a:t>
+                  <a:srgbClr val="5A6B85"/>
+                </a:solidFill>
+                <a:latin typeface="Malgun Gothic" pitchFamily="34" charset="0"/>
+                <a:ea typeface="Malgun Gothic" pitchFamily="34" charset="-122"/>
+                <a:cs typeface="Malgun Gothic" pitchFamily="34" charset="-120"/>
+              </a:rPr>
+              <a:t>캘리그래피·그림 뱃지 제작</a:t>
             </a:r>
             <a:endParaRPr lang="en-US" sz="800" dirty="0"/>
           </a:p>
         </p:txBody>
+      </p:sp>
+      <p:sp>
+        <p:nvSpPr>
+          <p:cNvPr id="39" name="Shape 31"/>
+          <p:cNvSpPr/>
+          <p:nvPr/>
+        </p:nvSpPr>
+        <p:spPr>
+          <a:xfrm>
+            <a:off x="566928" y="4852416"/>
+            <a:ext cx="3527450" cy="1530096"/>
+          </a:xfrm>
+          <a:prstGeom prst="roundRect">
+            <a:avLst>
+              <a:gd name="adj" fmla="val 2988"/>
+            </a:avLst>
+          </a:prstGeom>
+          <a:solidFill>
+            <a:srgbClr val="FBFCFE"/>
+          </a:solidFill>
+          <a:ln w="9525">
+            <a:solidFill>
+              <a:srgbClr val="E4EBF5"/>
+            </a:solidFill>
+            <a:prstDash val="solid"/>
+          </a:ln>
+        </p:spPr>
       </p:sp>
       <p:pic>
         <p:nvPicPr>
-          <p:cNvPr id="24" name="Image 6" descr="/home/user/Flitunion/docs/photos/seller-items/tattoo.jpg">    </p:cNvPr>
+          <p:cNvPr id="40" name="Image 6" descr="/home/user/Flitunion/docs/photos/seller-items/tattoo.jpg">    </p:cNvPr>
           <p:cNvPicPr>
             <a:picLocks noChangeAspect="1"/>
           </p:cNvPicPr>
@@ -4330,8 +6630,8 @@
         </p:blipFill>
         <p:spPr>
           <a:xfrm>
-            <a:off x="457200" y="4966716"/>
-            <a:ext cx="1417320" cy="1417320"/>
+            <a:off x="685800" y="4971288"/>
+            <a:ext cx="1292352" cy="1292352"/>
           </a:xfrm>
           <a:prstGeom prst="rect">
             <a:avLst/>
@@ -4340,14 +6640,53 @@
       </p:pic>
       <p:sp>
         <p:nvSpPr>
-          <p:cNvPr id="25" name="Text 16"/>
-          <p:cNvSpPr txBox="1"/>
-          <p:nvPr/>
-        </p:nvSpPr>
-        <p:spPr>
-          <a:xfrm>
-            <a:off x="2020824" y="4966716"/>
-            <a:ext cx="2012594" cy="292608"/>
+          <p:cNvPr id="41" name="Text 32"/>
+          <p:cNvSpPr txBox="1"/>
+          <p:nvPr/>
+        </p:nvSpPr>
+        <p:spPr>
+          <a:xfrm>
+            <a:off x="2142744" y="4989576"/>
+            <a:ext cx="1805330" cy="164592"/>
+          </a:xfrm>
+          <a:prstGeom prst="rect">
+            <a:avLst/>
+          </a:prstGeom>
+          <a:noFill/>
+          <a:ln/>
+        </p:spPr>
+        <p:txBody>
+          <a:bodyPr wrap="square" rtlCol="0" anchor="ctr"/>
+          <a:lstStyle/>
+          <a:p>
+            <a:pPr algn="l" indent="0" marL="0">
+              <a:buNone/>
+            </a:pPr>
+            <a:r>
+              <a:rPr lang="en-US" sz="750" b="1" spc="100" kern="0" dirty="0">
+                <a:solidFill>
+                  <a:srgbClr val="3182F6"/>
+                </a:solidFill>
+                <a:latin typeface="Arial" pitchFamily="34" charset="0"/>
+                <a:ea typeface="Arial" pitchFamily="34" charset="-122"/>
+                <a:cs typeface="Arial" pitchFamily="34" charset="-120"/>
+              </a:rPr>
+              <a:t>25</a:t>
+            </a:r>
+            <a:endParaRPr lang="en-US" sz="750" dirty="0"/>
+          </a:p>
+        </p:txBody>
+      </p:sp>
+      <p:sp>
+        <p:nvSpPr>
+          <p:cNvPr id="42" name="Text 33"/>
+          <p:cNvSpPr txBox="1"/>
+          <p:nvPr/>
+        </p:nvSpPr>
+        <p:spPr>
+          <a:xfrm>
+            <a:off x="2142744" y="5154168"/>
+            <a:ext cx="1805330" cy="274320"/>
           </a:xfrm>
           <a:prstGeom prst="rect">
             <a:avLst/>
@@ -4363,9 +6702,9 @@
               <a:buNone/>
             </a:pPr>
             <a:r>
-              <a:rPr lang="en-US" sz="1300" b="1" dirty="0">
-                <a:solidFill>
-                  <a:srgbClr val="0F172A"/>
+              <a:rPr lang="en-US" sz="1250" b="1" dirty="0">
+                <a:solidFill>
+                  <a:srgbClr val="101828"/>
                 </a:solidFill>
                 <a:latin typeface="Malgun Gothic" pitchFamily="34" charset="0"/>
                 <a:ea typeface="Malgun Gothic" pitchFamily="34" charset="-122"/>
@@ -4373,20 +6712,34 @@
               </a:rPr>
               <a:t>타투 스티커</a:t>
             </a:r>
-            <a:endParaRPr lang="en-US" sz="1300" dirty="0"/>
-          </a:p>
-        </p:txBody>
-      </p:sp>
-      <p:sp>
-        <p:nvSpPr>
-          <p:cNvPr id="26" name="Text 17"/>
-          <p:cNvSpPr txBox="1"/>
-          <p:nvPr/>
-        </p:nvSpPr>
-        <p:spPr>
-          <a:xfrm>
-            <a:off x="2020824" y="5259324"/>
-            <a:ext cx="2012594" cy="1124712"/>
+            <a:pPr algn="l" indent="0" marL="0">
+              <a:buNone/>
+            </a:pPr>
+            <a:r>
+              <a:rPr lang="en-US" sz="800" b="1" dirty="0">
+                <a:solidFill>
+                  <a:srgbClr val="3182F6"/>
+                </a:solidFill>
+                <a:latin typeface="Malgun Gothic" pitchFamily="34" charset="0"/>
+                <a:ea typeface="Malgun Gothic" pitchFamily="34" charset="-122"/>
+                <a:cs typeface="Malgun Gothic" pitchFamily="34" charset="-120"/>
+              </a:rPr>
+              <a:t>   2곳</a:t>
+            </a:r>
+            <a:endParaRPr lang="en-US" sz="1250" dirty="0"/>
+          </a:p>
+        </p:txBody>
+      </p:sp>
+      <p:sp>
+        <p:nvSpPr>
+          <p:cNvPr id="43" name="Text 34"/>
+          <p:cNvSpPr txBox="1"/>
+          <p:nvPr/>
+        </p:nvSpPr>
+        <p:spPr>
+          <a:xfrm>
+            <a:off x="2142744" y="5446776"/>
+            <a:ext cx="1805330" cy="816864"/>
           </a:xfrm>
           <a:prstGeom prst="rect">
             <a:avLst/>
@@ -4400,28 +6753,55 @@
           <a:p>
             <a:pPr algn="l" indent="0" marL="0">
               <a:lnSpc>
-                <a:spcPct val="120000"/>
+                <a:spcPct val="122000"/>
               </a:lnSpc>
               <a:buNone/>
             </a:pPr>
             <a:r>
               <a:rPr lang="en-US" sz="800" dirty="0">
                 <a:solidFill>
-                  <a:srgbClr val="475569"/>
-                </a:solidFill>
-                <a:latin typeface="Malgun Gothic" pitchFamily="34" charset="0"/>
-                <a:ea typeface="Malgun Gothic" pitchFamily="34" charset="-122"/>
-                <a:cs typeface="Malgun Gothic" pitchFamily="34" charset="-120"/>
-              </a:rPr>
-              <a:t>2곳 — 주문제작 타투 스티커, 타투 아트 전시·체험</a:t>
+                  <a:srgbClr val="5A6B85"/>
+                </a:solidFill>
+                <a:latin typeface="Malgun Gothic" pitchFamily="34" charset="0"/>
+                <a:ea typeface="Malgun Gothic" pitchFamily="34" charset="-122"/>
+                <a:cs typeface="Malgun Gothic" pitchFamily="34" charset="-120"/>
+              </a:rPr>
+              <a:t>주문제작 타투 스티커, 타투 아트 전시·체험</a:t>
             </a:r>
             <a:endParaRPr lang="en-US" sz="800" dirty="0"/>
           </a:p>
         </p:txBody>
+      </p:sp>
+      <p:sp>
+        <p:nvSpPr>
+          <p:cNvPr id="44" name="Shape 35"/>
+          <p:cNvSpPr/>
+          <p:nvPr/>
+        </p:nvSpPr>
+        <p:spPr>
+          <a:xfrm>
+            <a:off x="4332122" y="4852416"/>
+            <a:ext cx="3527450" cy="1530096"/>
+          </a:xfrm>
+          <a:prstGeom prst="roundRect">
+            <a:avLst>
+              <a:gd name="adj" fmla="val 2988"/>
+            </a:avLst>
+          </a:prstGeom>
+          <a:solidFill>
+            <a:srgbClr val="FBFCFE"/>
+          </a:solidFill>
+          <a:ln w="9525">
+            <a:solidFill>
+              <a:srgbClr val="E4EBF5"/>
+            </a:solidFill>
+            <a:prstDash val="solid"/>
+          </a:ln>
+        </p:spPr>
       </p:sp>
       <p:pic>
         <p:nvPicPr>
-          <p:cNvPr id="27" name="Image 7" descr="/home/user/Flitunion/docs/photos/seller-items/leather.jpg">    </p:cNvPr>
+          <p:cNvPr id="45" name="Image 7" descr="/home/user/Flitunion/docs/photos/seller-items/leather.jpg">    </p:cNvPr>
           <p:cNvPicPr>
             <a:picLocks noChangeAspect="1"/>
           </p:cNvPicPr>
@@ -4435,8 +6815,8 @@
         </p:blipFill>
         <p:spPr>
           <a:xfrm>
-            <a:off x="4307738" y="4966716"/>
-            <a:ext cx="1417320" cy="1417320"/>
+            <a:off x="4450994" y="4971288"/>
+            <a:ext cx="1292352" cy="1292352"/>
           </a:xfrm>
           <a:prstGeom prst="rect">
             <a:avLst/>
@@ -4445,14 +6825,53 @@
       </p:pic>
       <p:sp>
         <p:nvSpPr>
-          <p:cNvPr id="28" name="Text 18"/>
-          <p:cNvSpPr txBox="1"/>
-          <p:nvPr/>
-        </p:nvSpPr>
-        <p:spPr>
-          <a:xfrm>
-            <a:off x="5871362" y="4966716"/>
-            <a:ext cx="2012594" cy="292608"/>
+          <p:cNvPr id="46" name="Text 36"/>
+          <p:cNvSpPr txBox="1"/>
+          <p:nvPr/>
+        </p:nvSpPr>
+        <p:spPr>
+          <a:xfrm>
+            <a:off x="5907938" y="4989576"/>
+            <a:ext cx="1805330" cy="164592"/>
+          </a:xfrm>
+          <a:prstGeom prst="rect">
+            <a:avLst/>
+          </a:prstGeom>
+          <a:noFill/>
+          <a:ln/>
+        </p:spPr>
+        <p:txBody>
+          <a:bodyPr wrap="square" rtlCol="0" anchor="ctr"/>
+          <a:lstStyle/>
+          <a:p>
+            <a:pPr algn="l" indent="0" marL="0">
+              <a:buNone/>
+            </a:pPr>
+            <a:r>
+              <a:rPr lang="en-US" sz="750" b="1" spc="100" kern="0" dirty="0">
+                <a:solidFill>
+                  <a:srgbClr val="3182F6"/>
+                </a:solidFill>
+                <a:latin typeface="Arial" pitchFamily="34" charset="0"/>
+                <a:ea typeface="Arial" pitchFamily="34" charset="-122"/>
+                <a:cs typeface="Arial" pitchFamily="34" charset="-120"/>
+              </a:rPr>
+              <a:t>26</a:t>
+            </a:r>
+            <a:endParaRPr lang="en-US" sz="750" dirty="0"/>
+          </a:p>
+        </p:txBody>
+      </p:sp>
+      <p:sp>
+        <p:nvSpPr>
+          <p:cNvPr id="47" name="Text 37"/>
+          <p:cNvSpPr txBox="1"/>
+          <p:nvPr/>
+        </p:nvSpPr>
+        <p:spPr>
+          <a:xfrm>
+            <a:off x="5907938" y="5154168"/>
+            <a:ext cx="1805330" cy="274320"/>
           </a:xfrm>
           <a:prstGeom prst="rect">
             <a:avLst/>
@@ -4468,9 +6887,9 @@
               <a:buNone/>
             </a:pPr>
             <a:r>
-              <a:rPr lang="en-US" sz="1300" b="1" dirty="0">
-                <a:solidFill>
-                  <a:srgbClr val="0F172A"/>
+              <a:rPr lang="en-US" sz="1250" b="1" dirty="0">
+                <a:solidFill>
+                  <a:srgbClr val="101828"/>
                 </a:solidFill>
                 <a:latin typeface="Malgun Gothic" pitchFamily="34" charset="0"/>
                 <a:ea typeface="Malgun Gothic" pitchFamily="34" charset="-122"/>
@@ -4478,20 +6897,34 @@
               </a:rPr>
               <a:t>가죽공예</a:t>
             </a:r>
-            <a:endParaRPr lang="en-US" sz="1300" dirty="0"/>
-          </a:p>
-        </p:txBody>
-      </p:sp>
-      <p:sp>
-        <p:nvSpPr>
-          <p:cNvPr id="29" name="Text 19"/>
-          <p:cNvSpPr txBox="1"/>
-          <p:nvPr/>
-        </p:nvSpPr>
-        <p:spPr>
-          <a:xfrm>
-            <a:off x="5871362" y="5259324"/>
-            <a:ext cx="2012594" cy="1124712"/>
+            <a:pPr algn="l" indent="0" marL="0">
+              <a:buNone/>
+            </a:pPr>
+            <a:r>
+              <a:rPr lang="en-US" sz="800" b="1" dirty="0">
+                <a:solidFill>
+                  <a:srgbClr val="3182F6"/>
+                </a:solidFill>
+                <a:latin typeface="Malgun Gothic" pitchFamily="34" charset="0"/>
+                <a:ea typeface="Malgun Gothic" pitchFamily="34" charset="-122"/>
+                <a:cs typeface="Malgun Gothic" pitchFamily="34" charset="-120"/>
+              </a:rPr>
+              <a:t>   1곳</a:t>
+            </a:r>
+            <a:endParaRPr lang="en-US" sz="1250" dirty="0"/>
+          </a:p>
+        </p:txBody>
+      </p:sp>
+      <p:sp>
+        <p:nvSpPr>
+          <p:cNvPr id="48" name="Text 38"/>
+          <p:cNvSpPr txBox="1"/>
+          <p:nvPr/>
+        </p:nvSpPr>
+        <p:spPr>
+          <a:xfrm>
+            <a:off x="5907938" y="5446776"/>
+            <a:ext cx="1805330" cy="816864"/>
           </a:xfrm>
           <a:prstGeom prst="rect">
             <a:avLst/>
@@ -4505,28 +6938,55 @@
           <a:p>
             <a:pPr algn="l" indent="0" marL="0">
               <a:lnSpc>
-                <a:spcPct val="120000"/>
+                <a:spcPct val="122000"/>
               </a:lnSpc>
               <a:buNone/>
             </a:pPr>
             <a:r>
               <a:rPr lang="en-US" sz="800" dirty="0">
                 <a:solidFill>
-                  <a:srgbClr val="475569"/>
-                </a:solidFill>
-                <a:latin typeface="Malgun Gothic" pitchFamily="34" charset="0"/>
-                <a:ea typeface="Malgun Gothic" pitchFamily="34" charset="-122"/>
-                <a:cs typeface="Malgun Gothic" pitchFamily="34" charset="-120"/>
-              </a:rPr>
-              <a:t>1곳 — 카드지갑, 키링 등 DIY 패키지 형태의 가죽 체험</a:t>
+                  <a:srgbClr val="5A6B85"/>
+                </a:solidFill>
+                <a:latin typeface="Malgun Gothic" pitchFamily="34" charset="0"/>
+                <a:ea typeface="Malgun Gothic" pitchFamily="34" charset="-122"/>
+                <a:cs typeface="Malgun Gothic" pitchFamily="34" charset="-120"/>
+              </a:rPr>
+              <a:t>카드지갑, 키링 등 DIY 패키지 형태의 가죽 체험</a:t>
             </a:r>
             <a:endParaRPr lang="en-US" sz="800" dirty="0"/>
           </a:p>
         </p:txBody>
+      </p:sp>
+      <p:sp>
+        <p:nvSpPr>
+          <p:cNvPr id="49" name="Shape 39"/>
+          <p:cNvSpPr/>
+          <p:nvPr/>
+        </p:nvSpPr>
+        <p:spPr>
+          <a:xfrm>
+            <a:off x="8097317" y="4852416"/>
+            <a:ext cx="3527450" cy="1530096"/>
+          </a:xfrm>
+          <a:prstGeom prst="roundRect">
+            <a:avLst>
+              <a:gd name="adj" fmla="val 2988"/>
+            </a:avLst>
+          </a:prstGeom>
+          <a:solidFill>
+            <a:srgbClr val="FBFCFE"/>
+          </a:solidFill>
+          <a:ln w="9525">
+            <a:solidFill>
+              <a:srgbClr val="E4EBF5"/>
+            </a:solidFill>
+            <a:prstDash val="solid"/>
+          </a:ln>
+        </p:spPr>
       </p:sp>
       <p:pic>
         <p:nvPicPr>
-          <p:cNvPr id="30" name="Image 8" descr="/home/user/Flitunion/docs/photos/seller-items/rattan.jpg">    </p:cNvPr>
+          <p:cNvPr id="50" name="Image 8" descr="/home/user/Flitunion/docs/photos/seller-items/rattan.jpg">    </p:cNvPr>
           <p:cNvPicPr>
             <a:picLocks noChangeAspect="1"/>
           </p:cNvPicPr>
@@ -4540,8 +7000,8 @@
         </p:blipFill>
         <p:spPr>
           <a:xfrm>
-            <a:off x="8158277" y="4966716"/>
-            <a:ext cx="1417320" cy="1417320"/>
+            <a:off x="8216189" y="4971288"/>
+            <a:ext cx="1292352" cy="1292352"/>
           </a:xfrm>
           <a:prstGeom prst="rect">
             <a:avLst/>
@@ -4550,14 +7010,53 @@
       </p:pic>
       <p:sp>
         <p:nvSpPr>
-          <p:cNvPr id="31" name="Text 20"/>
-          <p:cNvSpPr txBox="1"/>
-          <p:nvPr/>
-        </p:nvSpPr>
-        <p:spPr>
-          <a:xfrm>
-            <a:off x="9721901" y="4966716"/>
-            <a:ext cx="2012594" cy="292608"/>
+          <p:cNvPr id="51" name="Text 40"/>
+          <p:cNvSpPr txBox="1"/>
+          <p:nvPr/>
+        </p:nvSpPr>
+        <p:spPr>
+          <a:xfrm>
+            <a:off x="9673133" y="4989576"/>
+            <a:ext cx="1805330" cy="164592"/>
+          </a:xfrm>
+          <a:prstGeom prst="rect">
+            <a:avLst/>
+          </a:prstGeom>
+          <a:noFill/>
+          <a:ln/>
+        </p:spPr>
+        <p:txBody>
+          <a:bodyPr wrap="square" rtlCol="0" anchor="ctr"/>
+          <a:lstStyle/>
+          <a:p>
+            <a:pPr algn="l" indent="0" marL="0">
+              <a:buNone/>
+            </a:pPr>
+            <a:r>
+              <a:rPr lang="en-US" sz="750" b="1" spc="100" kern="0" dirty="0">
+                <a:solidFill>
+                  <a:srgbClr val="3182F6"/>
+                </a:solidFill>
+                <a:latin typeface="Arial" pitchFamily="34" charset="0"/>
+                <a:ea typeface="Arial" pitchFamily="34" charset="-122"/>
+                <a:cs typeface="Arial" pitchFamily="34" charset="-120"/>
+              </a:rPr>
+              <a:t>27</a:t>
+            </a:r>
+            <a:endParaRPr lang="en-US" sz="750" dirty="0"/>
+          </a:p>
+        </p:txBody>
+      </p:sp>
+      <p:sp>
+        <p:nvSpPr>
+          <p:cNvPr id="52" name="Text 41"/>
+          <p:cNvSpPr txBox="1"/>
+          <p:nvPr/>
+        </p:nvSpPr>
+        <p:spPr>
+          <a:xfrm>
+            <a:off x="9673133" y="5154168"/>
+            <a:ext cx="1805330" cy="274320"/>
           </a:xfrm>
           <a:prstGeom prst="rect">
             <a:avLst/>
@@ -4573,9 +7072,9 @@
               <a:buNone/>
             </a:pPr>
             <a:r>
-              <a:rPr lang="en-US" sz="1300" b="1" dirty="0">
-                <a:solidFill>
-                  <a:srgbClr val="0F172A"/>
+              <a:rPr lang="en-US" sz="1250" b="1" dirty="0">
+                <a:solidFill>
+                  <a:srgbClr val="101828"/>
                 </a:solidFill>
                 <a:latin typeface="Malgun Gothic" pitchFamily="34" charset="0"/>
                 <a:ea typeface="Malgun Gothic" pitchFamily="34" charset="-122"/>
@@ -4583,20 +7082,34 @@
               </a:rPr>
               <a:t>라탄 공예</a:t>
             </a:r>
-            <a:endParaRPr lang="en-US" sz="1300" dirty="0"/>
-          </a:p>
-        </p:txBody>
-      </p:sp>
-      <p:sp>
-        <p:nvSpPr>
-          <p:cNvPr id="32" name="Text 21"/>
-          <p:cNvSpPr txBox="1"/>
-          <p:nvPr/>
-        </p:nvSpPr>
-        <p:spPr>
-          <a:xfrm>
-            <a:off x="9721901" y="5259324"/>
-            <a:ext cx="2012594" cy="1124712"/>
+            <a:pPr algn="l" indent="0" marL="0">
+              <a:buNone/>
+            </a:pPr>
+            <a:r>
+              <a:rPr lang="en-US" sz="800" b="1" dirty="0">
+                <a:solidFill>
+                  <a:srgbClr val="3182F6"/>
+                </a:solidFill>
+                <a:latin typeface="Malgun Gothic" pitchFamily="34" charset="0"/>
+                <a:ea typeface="Malgun Gothic" pitchFamily="34" charset="-122"/>
+                <a:cs typeface="Malgun Gothic" pitchFamily="34" charset="-120"/>
+              </a:rPr>
+              <a:t>   1곳</a:t>
+            </a:r>
+            <a:endParaRPr lang="en-US" sz="1250" dirty="0"/>
+          </a:p>
+        </p:txBody>
+      </p:sp>
+      <p:sp>
+        <p:nvSpPr>
+          <p:cNvPr id="53" name="Text 42"/>
+          <p:cNvSpPr txBox="1"/>
+          <p:nvPr/>
+        </p:nvSpPr>
+        <p:spPr>
+          <a:xfrm>
+            <a:off x="9673133" y="5446776"/>
+            <a:ext cx="1805330" cy="816864"/>
           </a:xfrm>
           <a:prstGeom prst="rect">
             <a:avLst/>
@@ -4610,20 +7123,20 @@
           <a:p>
             <a:pPr algn="l" indent="0" marL="0">
               <a:lnSpc>
-                <a:spcPct val="120000"/>
+                <a:spcPct val="122000"/>
               </a:lnSpc>
               <a:buNone/>
             </a:pPr>
             <a:r>
               <a:rPr lang="en-US" sz="800" dirty="0">
                 <a:solidFill>
-                  <a:srgbClr val="475569"/>
-                </a:solidFill>
-                <a:latin typeface="Malgun Gothic" pitchFamily="34" charset="0"/>
-                <a:ea typeface="Malgun Gothic" pitchFamily="34" charset="-122"/>
-                <a:cs typeface="Malgun Gothic" pitchFamily="34" charset="-120"/>
-              </a:rPr>
-              <a:t>1곳 — 라탄 바구니, 트레이, 소품</a:t>
+                  <a:srgbClr val="5A6B85"/>
+                </a:solidFill>
+                <a:latin typeface="Malgun Gothic" pitchFamily="34" charset="0"/>
+                <a:ea typeface="Malgun Gothic" pitchFamily="34" charset="-122"/>
+                <a:cs typeface="Malgun Gothic" pitchFamily="34" charset="-120"/>
+              </a:rPr>
+              <a:t>라탄 바구니, 트레이, 소품</a:t>
             </a:r>
             <a:endParaRPr lang="en-US" sz="800" dirty="0"/>
           </a:p>
@@ -4631,14 +7144,39 @@
       </p:sp>
       <p:sp>
         <p:nvSpPr>
-          <p:cNvPr id="33" name="Text 22"/>
-          <p:cNvSpPr txBox="1"/>
-          <p:nvPr/>
-        </p:nvSpPr>
-        <p:spPr>
-          <a:xfrm>
-            <a:off x="457200" y="6492240"/>
-            <a:ext cx="10637215" cy="274320"/>
+          <p:cNvPr id="54" name="Shape 43"/>
+          <p:cNvSpPr/>
+          <p:nvPr/>
+        </p:nvSpPr>
+        <p:spPr>
+          <a:xfrm>
+            <a:off x="566928" y="6400800"/>
+            <a:ext cx="11057839" cy="10973"/>
+          </a:xfrm>
+          <a:prstGeom prst="rect">
+            <a:avLst/>
+          </a:prstGeom>
+          <a:solidFill>
+            <a:srgbClr val="E4EBF5"/>
+          </a:solidFill>
+          <a:ln w="12700">
+            <a:solidFill>
+              <a:srgbClr val="E4EBF5"/>
+            </a:solidFill>
+            <a:prstDash val="solid"/>
+          </a:ln>
+        </p:spPr>
+      </p:sp>
+      <p:sp>
+        <p:nvSpPr>
+          <p:cNvPr id="55" name="Text 44"/>
+          <p:cNvSpPr txBox="1"/>
+          <p:nvPr/>
+        </p:nvSpPr>
+        <p:spPr>
+          <a:xfrm>
+            <a:off x="566928" y="6492240"/>
+            <a:ext cx="10234879" cy="256032"/>
           </a:xfrm>
           <a:prstGeom prst="rect">
             <a:avLst/>
@@ -4656,13 +7194,13 @@
             <a:r>
               <a:rPr lang="en-US" sz="750" dirty="0">
                 <a:solidFill>
-                  <a:srgbClr val="94A3B8"/>
-                </a:solidFill>
-                <a:latin typeface="Malgun Gothic" pitchFamily="34" charset="0"/>
-                <a:ea typeface="Malgun Gothic" pitchFamily="34" charset="-122"/>
-                <a:cs typeface="Malgun Gothic" pitchFamily="34" charset="-120"/>
-              </a:rPr>
-              <a:t>플릿 유니온 · www.flitunion.com   |   사진은 품목 이해를 돕기 위한 예시 이미지입니다 (자유 이용 라이선스). 실제 참여 셀러의 상품 사진이 아닙니다.</a:t>
+                  <a:srgbClr val="A3B0C4"/>
+                </a:solidFill>
+                <a:latin typeface="Malgun Gothic" pitchFamily="34" charset="0"/>
+                <a:ea typeface="Malgun Gothic" pitchFamily="34" charset="-122"/>
+                <a:cs typeface="Malgun Gothic" pitchFamily="34" charset="-120"/>
+              </a:rPr>
+              <a:t>사진은 품목 이해를 돕기 위한 예시 이미지입니다 (자유 이용 라이선스). 실제 참여 셀러의 상품 사진이 아닙니다.</a:t>
             </a:r>
             <a:endParaRPr lang="en-US" sz="750" dirty="0"/>
           </a:p>
@@ -4670,14 +7208,14 @@
       </p:sp>
       <p:sp>
         <p:nvSpPr>
-          <p:cNvPr id="34" name="Text 23"/>
-          <p:cNvSpPr txBox="1"/>
-          <p:nvPr/>
-        </p:nvSpPr>
-        <p:spPr>
-          <a:xfrm>
-            <a:off x="457200" y="6492240"/>
-            <a:ext cx="11277295" cy="274320"/>
+          <p:cNvPr id="56" name="Text 45"/>
+          <p:cNvSpPr txBox="1"/>
+          <p:nvPr/>
+        </p:nvSpPr>
+        <p:spPr>
+          <a:xfrm>
+            <a:off x="566928" y="6492240"/>
+            <a:ext cx="11057839" cy="256032"/>
           </a:xfrm>
           <a:prstGeom prst="rect">
             <a:avLst/>
@@ -4693,15 +7231,15 @@
               <a:buNone/>
             </a:pPr>
             <a:r>
-              <a:rPr lang="en-US" sz="750" dirty="0">
-                <a:solidFill>
-                  <a:srgbClr val="94A3B8"/>
-                </a:solidFill>
-                <a:latin typeface="Malgun Gothic" pitchFamily="34" charset="0"/>
-                <a:ea typeface="Malgun Gothic" pitchFamily="34" charset="-122"/>
-                <a:cs typeface="Malgun Gothic" pitchFamily="34" charset="-120"/>
-              </a:rPr>
-              <a:t>3 / 4</a:t>
+              <a:rPr lang="en-US" sz="750" b="1" spc="160" kern="0" dirty="0">
+                <a:solidFill>
+                  <a:srgbClr val="A3B0C4"/>
+                </a:solidFill>
+                <a:latin typeface="Arial" pitchFamily="34" charset="0"/>
+                <a:ea typeface="Arial" pitchFamily="34" charset="-122"/>
+                <a:cs typeface="Arial" pitchFamily="34" charset="-120"/>
+              </a:rPr>
+              <a:t>FLIT UNION</a:t>
             </a:r>
             <a:endParaRPr lang="en-US" sz="750" dirty="0"/>
           </a:p>
@@ -4741,104 +7279,24 @@
       </p:grpSpPr>
       <p:sp>
         <p:nvSpPr>
-          <p:cNvPr id="2" name="Text 0"/>
+          <p:cNvPr id="2" name="Shape 0"/>
           <p:cNvSpPr/>
           <p:nvPr/>
         </p:nvSpPr>
         <p:spPr>
           <a:xfrm>
-            <a:off x="0" y="201168"/>
-            <a:ext cx="12191695" cy="274320"/>
-          </a:xfrm>
-          <a:prstGeom prst="rect">
-            <a:avLst/>
-          </a:prstGeom>
-          <a:noFill/>
-          <a:ln/>
-        </p:spPr>
-        <p:txBody>
-          <a:bodyPr wrap="square" rtlCol="0" anchor="ctr"/>
-          <a:lstStyle/>
-          <a:p>
-            <a:pPr algn="ctr" indent="0" marL="0">
-              <a:buNone/>
-            </a:pPr>
-            <a:r>
-              <a:rPr lang="en-US" sz="1600" b="1" spc="100" kern="0" dirty="0">
-                <a:solidFill>
-                  <a:srgbClr val="3182F6"/>
-                </a:solidFill>
-                <a:latin typeface="Malgun Gothic" pitchFamily="34" charset="0"/>
-                <a:ea typeface="Malgun Gothic" pitchFamily="34" charset="-122"/>
-                <a:cs typeface="Malgun Gothic" pitchFamily="34" charset="-120"/>
-              </a:rPr>
-              <a:t>플릿 유니온</a:t>
-            </a:r>
-            <a:endParaRPr lang="en-US" sz="1600" dirty="0"/>
-          </a:p>
-        </p:txBody>
-      </p:sp>
-      <p:sp>
-        <p:nvSpPr>
-          <p:cNvPr id="3" name="Text 1"/>
-          <p:cNvSpPr/>
-          <p:nvPr/>
-        </p:nvSpPr>
-        <p:spPr>
-          <a:xfrm>
-            <a:off x="0" y="457200"/>
-            <a:ext cx="12191695" cy="457200"/>
-          </a:xfrm>
-          <a:prstGeom prst="rect">
-            <a:avLst/>
-          </a:prstGeom>
-          <a:noFill/>
-          <a:ln/>
-        </p:spPr>
-        <p:txBody>
-          <a:bodyPr wrap="square" rtlCol="0" anchor="ctr"/>
-          <a:lstStyle/>
-          <a:p>
-            <a:pPr algn="ctr" indent="0" marL="0">
-              <a:buNone/>
-            </a:pPr>
-            <a:r>
-              <a:rPr lang="en-US" sz="2800" b="1" dirty="0">
-                <a:solidFill>
-                  <a:srgbClr val="0B1F44"/>
-                </a:solidFill>
-                <a:latin typeface="Malgun Gothic" pitchFamily="34" charset="0"/>
-                <a:ea typeface="Malgun Gothic" pitchFamily="34" charset="-122"/>
-                <a:cs typeface="Malgun Gothic" pitchFamily="34" charset="-120"/>
-              </a:rPr>
-              <a:t>플리마켓 셀러 품목</a:t>
-            </a:r>
-            <a:endParaRPr lang="en-US" sz="2800" dirty="0"/>
-          </a:p>
-        </p:txBody>
-      </p:sp>
-      <p:sp>
-        <p:nvSpPr>
-          <p:cNvPr id="4" name="Shape 2"/>
-          <p:cNvSpPr/>
-          <p:nvPr/>
-        </p:nvSpPr>
-        <p:spPr>
-          <a:xfrm>
-            <a:off x="3809848" y="932688"/>
-            <a:ext cx="4572000" cy="310896"/>
-          </a:xfrm>
-          <a:prstGeom prst="roundRect">
-            <a:avLst>
-              <a:gd name="adj" fmla="val 50000"/>
-            </a:avLst>
+            <a:off x="0" y="0"/>
+            <a:ext cx="12191695" cy="68580"/>
+          </a:xfrm>
+          <a:prstGeom prst="rect">
+            <a:avLst/>
           </a:prstGeom>
           <a:solidFill>
-            <a:srgbClr val="EAF2FF"/>
+            <a:srgbClr val="0B1F44"/>
           </a:solidFill>
           <a:ln w="12700">
             <a:solidFill>
-              <a:srgbClr val="EAF2FF"/>
+              <a:srgbClr val="0B1F44"/>
             </a:solidFill>
             <a:prstDash val="solid"/>
           </a:ln>
@@ -4846,14 +7304,156 @@
       </p:sp>
       <p:sp>
         <p:nvSpPr>
+          <p:cNvPr id="3" name="Shape 1"/>
+          <p:cNvSpPr/>
+          <p:nvPr/>
+        </p:nvSpPr>
+        <p:spPr>
+          <a:xfrm>
+            <a:off x="566928" y="457200"/>
+            <a:ext cx="50292" cy="420624"/>
+          </a:xfrm>
+          <a:prstGeom prst="rect">
+            <a:avLst/>
+          </a:prstGeom>
+          <a:solidFill>
+            <a:srgbClr val="3182F6"/>
+          </a:solidFill>
+          <a:ln w="12700">
+            <a:solidFill>
+              <a:srgbClr val="3182F6"/>
+            </a:solidFill>
+            <a:prstDash val="solid"/>
+          </a:ln>
+        </p:spPr>
+      </p:sp>
+      <p:sp>
+        <p:nvSpPr>
+          <p:cNvPr id="4" name="Text 2"/>
+          <p:cNvSpPr txBox="1"/>
+          <p:nvPr/>
+        </p:nvSpPr>
+        <p:spPr>
+          <a:xfrm>
+            <a:off x="749808" y="384048"/>
+            <a:ext cx="3657600" cy="201168"/>
+          </a:xfrm>
+          <a:prstGeom prst="rect">
+            <a:avLst/>
+          </a:prstGeom>
+          <a:noFill/>
+          <a:ln/>
+        </p:spPr>
+        <p:txBody>
+          <a:bodyPr wrap="square" rtlCol="0" anchor="ctr"/>
+          <a:lstStyle/>
+          <a:p>
+            <a:pPr algn="l" indent="0" marL="0">
+              <a:buNone/>
+            </a:pPr>
+            <a:r>
+              <a:rPr lang="en-US" sz="850" b="1" spc="240" kern="0" dirty="0">
+                <a:solidFill>
+                  <a:srgbClr val="3182F6"/>
+                </a:solidFill>
+                <a:latin typeface="Arial" pitchFamily="34" charset="0"/>
+                <a:ea typeface="Arial" pitchFamily="34" charset="-122"/>
+                <a:cs typeface="Arial" pitchFamily="34" charset="-120"/>
+              </a:rPr>
+              <a:t>FLIT UNION</a:t>
+            </a:r>
+            <a:endParaRPr lang="en-US" sz="850" dirty="0"/>
+          </a:p>
+        </p:txBody>
+      </p:sp>
+      <p:sp>
+        <p:nvSpPr>
           <p:cNvPr id="5" name="Text 3"/>
           <p:cNvSpPr txBox="1"/>
           <p:nvPr/>
         </p:nvSpPr>
         <p:spPr>
           <a:xfrm>
-            <a:off x="3809848" y="932688"/>
-            <a:ext cx="4572000" cy="310896"/>
+            <a:off x="749808" y="548640"/>
+            <a:ext cx="6583680" cy="365760"/>
+          </a:xfrm>
+          <a:prstGeom prst="rect">
+            <a:avLst/>
+          </a:prstGeom>
+          <a:noFill/>
+          <a:ln/>
+        </p:spPr>
+        <p:txBody>
+          <a:bodyPr wrap="square" rtlCol="0" anchor="t"/>
+          <a:lstStyle/>
+          <a:p>
+            <a:pPr algn="l" indent="0" marL="0">
+              <a:buNone/>
+            </a:pPr>
+            <a:r>
+              <a:rPr lang="en-US" sz="2200" b="1" dirty="0">
+                <a:solidFill>
+                  <a:srgbClr val="0B1F44"/>
+                </a:solidFill>
+                <a:latin typeface="Malgun Gothic" pitchFamily="34" charset="0"/>
+                <a:ea typeface="Malgun Gothic" pitchFamily="34" charset="-122"/>
+                <a:cs typeface="Malgun Gothic" pitchFamily="34" charset="-120"/>
+              </a:rPr>
+              <a:t>플리마켓 셀러 품목</a:t>
+            </a:r>
+            <a:endParaRPr lang="en-US" sz="2200" dirty="0"/>
+          </a:p>
+        </p:txBody>
+      </p:sp>
+      <p:sp>
+        <p:nvSpPr>
+          <p:cNvPr id="6" name="Text 4"/>
+          <p:cNvSpPr txBox="1"/>
+          <p:nvPr/>
+        </p:nvSpPr>
+        <p:spPr>
+          <a:xfrm>
+            <a:off x="6869887" y="603504"/>
+            <a:ext cx="4754880" cy="274320"/>
+          </a:xfrm>
+          <a:prstGeom prst="rect">
+            <a:avLst/>
+          </a:prstGeom>
+          <a:noFill/>
+          <a:ln/>
+        </p:spPr>
+        <p:txBody>
+          <a:bodyPr wrap="square" rtlCol="0" anchor="t"/>
+          <a:lstStyle/>
+          <a:p>
+            <a:pPr algn="r" indent="0" marL="0">
+              <a:buNone/>
+            </a:pPr>
+            <a:r>
+              <a:rPr lang="en-US" sz="950" dirty="0">
+                <a:solidFill>
+                  <a:srgbClr val="5A6B85"/>
+                </a:solidFill>
+                <a:latin typeface="Malgun Gothic" pitchFamily="34" charset="0"/>
+                <a:ea typeface="Malgun Gothic" pitchFamily="34" charset="-122"/>
+                <a:cs typeface="Malgun Gothic" pitchFamily="34" charset="-120"/>
+              </a:rPr>
+              <a:t>보유 셀러가 많은 순 30종</a:t>
+            </a:r>
+            <a:endParaRPr lang="en-US" sz="950" dirty="0"/>
+          </a:p>
+        </p:txBody>
+      </p:sp>
+      <p:sp>
+        <p:nvSpPr>
+          <p:cNvPr id="7" name="Text 5"/>
+          <p:cNvSpPr txBox="1"/>
+          <p:nvPr/>
+        </p:nvSpPr>
+        <p:spPr>
+          <a:xfrm>
+            <a:off x="6869887" y="384048"/>
+            <a:ext cx="4754880" cy="219456"/>
           </a:xfrm>
           <a:prstGeom prst="rect">
             <a:avLst/>
@@ -4865,7 +7465,7 @@
           <a:bodyPr wrap="square" rtlCol="0" anchor="ctr"/>
           <a:lstStyle/>
           <a:p>
-            <a:pPr algn="ctr" indent="0" marL="0">
+            <a:pPr algn="r" indent="0" marL="0">
               <a:buNone/>
             </a:pPr>
             <a:r>
@@ -4873,19 +7473,85 @@
                 <a:solidFill>
                   <a:srgbClr val="0B1F44"/>
                 </a:solidFill>
-                <a:latin typeface="Malgun Gothic" pitchFamily="34" charset="0"/>
-                <a:ea typeface="Malgun Gothic" pitchFamily="34" charset="-122"/>
-                <a:cs typeface="Malgun Gothic" pitchFamily="34" charset="-120"/>
-              </a:rPr>
-              <a:t>· 28 ~ 30 ·</a:t>
+                <a:latin typeface="Arial" pitchFamily="34" charset="0"/>
+                <a:ea typeface="Arial" pitchFamily="34" charset="-122"/>
+                <a:cs typeface="Arial" pitchFamily="34" charset="-120"/>
+              </a:rPr>
+              <a:t>04</a:t>
+            </a:r>
+            <a:pPr algn="r" indent="0" marL="0">
+              <a:buNone/>
+            </a:pPr>
+            <a:r>
+              <a:rPr lang="en-US" sz="900" dirty="0">
+                <a:solidFill>
+                  <a:srgbClr val="A3B0C4"/>
+                </a:solidFill>
+                <a:latin typeface="Arial" pitchFamily="34" charset="0"/>
+                <a:ea typeface="Arial" pitchFamily="34" charset="-122"/>
+                <a:cs typeface="Arial" pitchFamily="34" charset="-120"/>
+              </a:rPr>
+              <a:t> / 04</a:t>
             </a:r>
             <a:endParaRPr lang="en-US" sz="1100" dirty="0"/>
           </a:p>
         </p:txBody>
+      </p:sp>
+      <p:sp>
+        <p:nvSpPr>
+          <p:cNvPr id="8" name="Shape 6"/>
+          <p:cNvSpPr/>
+          <p:nvPr/>
+        </p:nvSpPr>
+        <p:spPr>
+          <a:xfrm>
+            <a:off x="566928" y="1152144"/>
+            <a:ext cx="11057839" cy="10973"/>
+          </a:xfrm>
+          <a:prstGeom prst="rect">
+            <a:avLst/>
+          </a:prstGeom>
+          <a:solidFill>
+            <a:srgbClr val="E4EBF5"/>
+          </a:solidFill>
+          <a:ln w="12700">
+            <a:solidFill>
+              <a:srgbClr val="E4EBF5"/>
+            </a:solidFill>
+            <a:prstDash val="solid"/>
+          </a:ln>
+        </p:spPr>
+      </p:sp>
+      <p:sp>
+        <p:nvSpPr>
+          <p:cNvPr id="9" name="Shape 7"/>
+          <p:cNvSpPr/>
+          <p:nvPr/>
+        </p:nvSpPr>
+        <p:spPr>
+          <a:xfrm>
+            <a:off x="566928" y="1426464"/>
+            <a:ext cx="3527450" cy="1530096"/>
+          </a:xfrm>
+          <a:prstGeom prst="roundRect">
+            <a:avLst>
+              <a:gd name="adj" fmla="val 2988"/>
+            </a:avLst>
+          </a:prstGeom>
+          <a:solidFill>
+            <a:srgbClr val="FBFCFE"/>
+          </a:solidFill>
+          <a:ln w="9525">
+            <a:solidFill>
+              <a:srgbClr val="E4EBF5"/>
+            </a:solidFill>
+            <a:prstDash val="solid"/>
+          </a:ln>
+        </p:spPr>
       </p:sp>
       <p:pic>
         <p:nvPicPr>
-          <p:cNvPr id="6" name="Image 0" descr="/home/user/Flitunion/docs/photos/seller-items/felt.jpg">    </p:cNvPr>
+          <p:cNvPr id="10" name="Image 0" descr="/home/user/Flitunion/docs/photos/seller-items/felt.jpg">    </p:cNvPr>
           <p:cNvPicPr>
             <a:picLocks noChangeAspect="1"/>
           </p:cNvPicPr>
@@ -4899,8 +7565,8 @@
         </p:blipFill>
         <p:spPr>
           <a:xfrm>
-            <a:off x="457200" y="1443228"/>
-            <a:ext cx="1417320" cy="1417320"/>
+            <a:off x="685800" y="1545336"/>
+            <a:ext cx="1292352" cy="1292352"/>
           </a:xfrm>
           <a:prstGeom prst="rect">
             <a:avLst/>
@@ -4909,14 +7575,53 @@
       </p:pic>
       <p:sp>
         <p:nvSpPr>
-          <p:cNvPr id="7" name="Text 4"/>
-          <p:cNvSpPr txBox="1"/>
-          <p:nvPr/>
-        </p:nvSpPr>
-        <p:spPr>
-          <a:xfrm>
-            <a:off x="2020824" y="1443228"/>
-            <a:ext cx="2012594" cy="292608"/>
+          <p:cNvPr id="11" name="Text 8"/>
+          <p:cNvSpPr txBox="1"/>
+          <p:nvPr/>
+        </p:nvSpPr>
+        <p:spPr>
+          <a:xfrm>
+            <a:off x="2142744" y="1563624"/>
+            <a:ext cx="1805330" cy="164592"/>
+          </a:xfrm>
+          <a:prstGeom prst="rect">
+            <a:avLst/>
+          </a:prstGeom>
+          <a:noFill/>
+          <a:ln/>
+        </p:spPr>
+        <p:txBody>
+          <a:bodyPr wrap="square" rtlCol="0" anchor="ctr"/>
+          <a:lstStyle/>
+          <a:p>
+            <a:pPr algn="l" indent="0" marL="0">
+              <a:buNone/>
+            </a:pPr>
+            <a:r>
+              <a:rPr lang="en-US" sz="750" b="1" spc="100" kern="0" dirty="0">
+                <a:solidFill>
+                  <a:srgbClr val="3182F6"/>
+                </a:solidFill>
+                <a:latin typeface="Arial" pitchFamily="34" charset="0"/>
+                <a:ea typeface="Arial" pitchFamily="34" charset="-122"/>
+                <a:cs typeface="Arial" pitchFamily="34" charset="-120"/>
+              </a:rPr>
+              <a:t>28</a:t>
+            </a:r>
+            <a:endParaRPr lang="en-US" sz="750" dirty="0"/>
+          </a:p>
+        </p:txBody>
+      </p:sp>
+      <p:sp>
+        <p:nvSpPr>
+          <p:cNvPr id="12" name="Text 9"/>
+          <p:cNvSpPr txBox="1"/>
+          <p:nvPr/>
+        </p:nvSpPr>
+        <p:spPr>
+          <a:xfrm>
+            <a:off x="2142744" y="1728216"/>
+            <a:ext cx="1805330" cy="274320"/>
           </a:xfrm>
           <a:prstGeom prst="rect">
             <a:avLst/>
@@ -4932,9 +7637,9 @@
               <a:buNone/>
             </a:pPr>
             <a:r>
-              <a:rPr lang="en-US" sz="1300" b="1" dirty="0">
-                <a:solidFill>
-                  <a:srgbClr val="0F172A"/>
+              <a:rPr lang="en-US" sz="1250" b="1" dirty="0">
+                <a:solidFill>
+                  <a:srgbClr val="101828"/>
                 </a:solidFill>
                 <a:latin typeface="Malgun Gothic" pitchFamily="34" charset="0"/>
                 <a:ea typeface="Malgun Gothic" pitchFamily="34" charset="-122"/>
@@ -4942,20 +7647,34 @@
               </a:rPr>
               <a:t>양모펠트</a:t>
             </a:r>
-            <a:endParaRPr lang="en-US" sz="1300" dirty="0"/>
-          </a:p>
-        </p:txBody>
-      </p:sp>
-      <p:sp>
-        <p:nvSpPr>
-          <p:cNvPr id="8" name="Text 5"/>
-          <p:cNvSpPr txBox="1"/>
-          <p:nvPr/>
-        </p:nvSpPr>
-        <p:spPr>
-          <a:xfrm>
-            <a:off x="2020824" y="1735836"/>
-            <a:ext cx="2012594" cy="1124712"/>
+            <a:pPr algn="l" indent="0" marL="0">
+              <a:buNone/>
+            </a:pPr>
+            <a:r>
+              <a:rPr lang="en-US" sz="800" b="1" dirty="0">
+                <a:solidFill>
+                  <a:srgbClr val="3182F6"/>
+                </a:solidFill>
+                <a:latin typeface="Malgun Gothic" pitchFamily="34" charset="0"/>
+                <a:ea typeface="Malgun Gothic" pitchFamily="34" charset="-122"/>
+                <a:cs typeface="Malgun Gothic" pitchFamily="34" charset="-120"/>
+              </a:rPr>
+              <a:t>   1곳</a:t>
+            </a:r>
+            <a:endParaRPr lang="en-US" sz="1250" dirty="0"/>
+          </a:p>
+        </p:txBody>
+      </p:sp>
+      <p:sp>
+        <p:nvSpPr>
+          <p:cNvPr id="13" name="Text 10"/>
+          <p:cNvSpPr txBox="1"/>
+          <p:nvPr/>
+        </p:nvSpPr>
+        <p:spPr>
+          <a:xfrm>
+            <a:off x="2142744" y="2020824"/>
+            <a:ext cx="1805330" cy="816864"/>
           </a:xfrm>
           <a:prstGeom prst="rect">
             <a:avLst/>
@@ -4969,28 +7688,55 @@
           <a:p>
             <a:pPr algn="l" indent="0" marL="0">
               <a:lnSpc>
-                <a:spcPct val="120000"/>
+                <a:spcPct val="122000"/>
               </a:lnSpc>
               <a:buNone/>
             </a:pPr>
             <a:r>
               <a:rPr lang="en-US" sz="800" dirty="0">
                 <a:solidFill>
-                  <a:srgbClr val="475569"/>
-                </a:solidFill>
-                <a:latin typeface="Malgun Gothic" pitchFamily="34" charset="0"/>
-                <a:ea typeface="Malgun Gothic" pitchFamily="34" charset="-122"/>
-                <a:cs typeface="Malgun Gothic" pitchFamily="34" charset="-120"/>
-              </a:rPr>
-              <a:t>1곳 — 양모를 찔러 굳혀 만드는 인형, 브로치</a:t>
+                  <a:srgbClr val="5A6B85"/>
+                </a:solidFill>
+                <a:latin typeface="Malgun Gothic" pitchFamily="34" charset="0"/>
+                <a:ea typeface="Malgun Gothic" pitchFamily="34" charset="-122"/>
+                <a:cs typeface="Malgun Gothic" pitchFamily="34" charset="-120"/>
+              </a:rPr>
+              <a:t>양모를 찔러 굳혀 만드는 인형, 브로치</a:t>
             </a:r>
             <a:endParaRPr lang="en-US" sz="800" dirty="0"/>
           </a:p>
         </p:txBody>
+      </p:sp>
+      <p:sp>
+        <p:nvSpPr>
+          <p:cNvPr id="14" name="Shape 11"/>
+          <p:cNvSpPr/>
+          <p:nvPr/>
+        </p:nvSpPr>
+        <p:spPr>
+          <a:xfrm>
+            <a:off x="4332122" y="1426464"/>
+            <a:ext cx="3527450" cy="1530096"/>
+          </a:xfrm>
+          <a:prstGeom prst="roundRect">
+            <a:avLst>
+              <a:gd name="adj" fmla="val 2988"/>
+            </a:avLst>
+          </a:prstGeom>
+          <a:solidFill>
+            <a:srgbClr val="FBFCFE"/>
+          </a:solidFill>
+          <a:ln w="9525">
+            <a:solidFill>
+              <a:srgbClr val="E4EBF5"/>
+            </a:solidFill>
+            <a:prstDash val="solid"/>
+          </a:ln>
+        </p:spPr>
       </p:sp>
       <p:pic>
         <p:nvPicPr>
-          <p:cNvPr id="9" name="Image 1" descr="/home/user/Flitunion/docs/photos/seller-items/tufting.jpg">    </p:cNvPr>
+          <p:cNvPr id="15" name="Image 1" descr="/home/user/Flitunion/docs/photos/seller-items/tufting.jpg">    </p:cNvPr>
           <p:cNvPicPr>
             <a:picLocks noChangeAspect="1"/>
           </p:cNvPicPr>
@@ -5004,8 +7750,8 @@
         </p:blipFill>
         <p:spPr>
           <a:xfrm>
-            <a:off x="4307738" y="1443228"/>
-            <a:ext cx="1417320" cy="1417320"/>
+            <a:off x="4450994" y="1545336"/>
+            <a:ext cx="1292352" cy="1292352"/>
           </a:xfrm>
           <a:prstGeom prst="rect">
             <a:avLst/>
@@ -5014,14 +7760,53 @@
       </p:pic>
       <p:sp>
         <p:nvSpPr>
-          <p:cNvPr id="10" name="Text 6"/>
-          <p:cNvSpPr txBox="1"/>
-          <p:nvPr/>
-        </p:nvSpPr>
-        <p:spPr>
-          <a:xfrm>
-            <a:off x="5871362" y="1443228"/>
-            <a:ext cx="2012594" cy="292608"/>
+          <p:cNvPr id="16" name="Text 12"/>
+          <p:cNvSpPr txBox="1"/>
+          <p:nvPr/>
+        </p:nvSpPr>
+        <p:spPr>
+          <a:xfrm>
+            <a:off x="5907938" y="1563624"/>
+            <a:ext cx="1805330" cy="164592"/>
+          </a:xfrm>
+          <a:prstGeom prst="rect">
+            <a:avLst/>
+          </a:prstGeom>
+          <a:noFill/>
+          <a:ln/>
+        </p:spPr>
+        <p:txBody>
+          <a:bodyPr wrap="square" rtlCol="0" anchor="ctr"/>
+          <a:lstStyle/>
+          <a:p>
+            <a:pPr algn="l" indent="0" marL="0">
+              <a:buNone/>
+            </a:pPr>
+            <a:r>
+              <a:rPr lang="en-US" sz="750" b="1" spc="100" kern="0" dirty="0">
+                <a:solidFill>
+                  <a:srgbClr val="3182F6"/>
+                </a:solidFill>
+                <a:latin typeface="Arial" pitchFamily="34" charset="0"/>
+                <a:ea typeface="Arial" pitchFamily="34" charset="-122"/>
+                <a:cs typeface="Arial" pitchFamily="34" charset="-120"/>
+              </a:rPr>
+              <a:t>29</a:t>
+            </a:r>
+            <a:endParaRPr lang="en-US" sz="750" dirty="0"/>
+          </a:p>
+        </p:txBody>
+      </p:sp>
+      <p:sp>
+        <p:nvSpPr>
+          <p:cNvPr id="17" name="Text 13"/>
+          <p:cNvSpPr txBox="1"/>
+          <p:nvPr/>
+        </p:nvSpPr>
+        <p:spPr>
+          <a:xfrm>
+            <a:off x="5907938" y="1728216"/>
+            <a:ext cx="1805330" cy="274320"/>
           </a:xfrm>
           <a:prstGeom prst="rect">
             <a:avLst/>
@@ -5037,9 +7822,9 @@
               <a:buNone/>
             </a:pPr>
             <a:r>
-              <a:rPr lang="en-US" sz="1300" b="1" dirty="0">
-                <a:solidFill>
-                  <a:srgbClr val="0F172A"/>
+              <a:rPr lang="en-US" sz="1250" b="1" dirty="0">
+                <a:solidFill>
+                  <a:srgbClr val="101828"/>
                 </a:solidFill>
                 <a:latin typeface="Malgun Gothic" pitchFamily="34" charset="0"/>
                 <a:ea typeface="Malgun Gothic" pitchFamily="34" charset="-122"/>
@@ -5047,20 +7832,34 @@
               </a:rPr>
               <a:t>터프팅</a:t>
             </a:r>
-            <a:endParaRPr lang="en-US" sz="1300" dirty="0"/>
-          </a:p>
-        </p:txBody>
-      </p:sp>
-      <p:sp>
-        <p:nvSpPr>
-          <p:cNvPr id="11" name="Text 7"/>
-          <p:cNvSpPr txBox="1"/>
-          <p:nvPr/>
-        </p:nvSpPr>
-        <p:spPr>
-          <a:xfrm>
-            <a:off x="5871362" y="1735836"/>
-            <a:ext cx="2012594" cy="1124712"/>
+            <a:pPr algn="l" indent="0" marL="0">
+              <a:buNone/>
+            </a:pPr>
+            <a:r>
+              <a:rPr lang="en-US" sz="800" b="1" dirty="0">
+                <a:solidFill>
+                  <a:srgbClr val="3182F6"/>
+                </a:solidFill>
+                <a:latin typeface="Malgun Gothic" pitchFamily="34" charset="0"/>
+                <a:ea typeface="Malgun Gothic" pitchFamily="34" charset="-122"/>
+                <a:cs typeface="Malgun Gothic" pitchFamily="34" charset="-120"/>
+              </a:rPr>
+              <a:t>   1곳</a:t>
+            </a:r>
+            <a:endParaRPr lang="en-US" sz="1250" dirty="0"/>
+          </a:p>
+        </p:txBody>
+      </p:sp>
+      <p:sp>
+        <p:nvSpPr>
+          <p:cNvPr id="18" name="Text 14"/>
+          <p:cNvSpPr txBox="1"/>
+          <p:nvPr/>
+        </p:nvSpPr>
+        <p:spPr>
+          <a:xfrm>
+            <a:off x="5907938" y="2020824"/>
+            <a:ext cx="1805330" cy="816864"/>
           </a:xfrm>
           <a:prstGeom prst="rect">
             <a:avLst/>
@@ -5074,28 +7873,55 @@
           <a:p>
             <a:pPr algn="l" indent="0" marL="0">
               <a:lnSpc>
-                <a:spcPct val="120000"/>
+                <a:spcPct val="122000"/>
               </a:lnSpc>
               <a:buNone/>
             </a:pPr>
             <a:r>
               <a:rPr lang="en-US" sz="800" dirty="0">
                 <a:solidFill>
-                  <a:srgbClr val="475569"/>
-                </a:solidFill>
-                <a:latin typeface="Malgun Gothic" pitchFamily="34" charset="0"/>
-                <a:ea typeface="Malgun Gothic" pitchFamily="34" charset="-122"/>
-                <a:cs typeface="Malgun Gothic" pitchFamily="34" charset="-120"/>
-              </a:rPr>
-              <a:t>1곳 — 러그 공예. 체류 시간이 길어 유입을 붙잡는 부스</a:t>
+                  <a:srgbClr val="5A6B85"/>
+                </a:solidFill>
+                <a:latin typeface="Malgun Gothic" pitchFamily="34" charset="0"/>
+                <a:ea typeface="Malgun Gothic" pitchFamily="34" charset="-122"/>
+                <a:cs typeface="Malgun Gothic" pitchFamily="34" charset="-120"/>
+              </a:rPr>
+              <a:t>러그 공예. 체류 시간이 길어 유입을 붙잡는 부스</a:t>
             </a:r>
             <a:endParaRPr lang="en-US" sz="800" dirty="0"/>
           </a:p>
         </p:txBody>
+      </p:sp>
+      <p:sp>
+        <p:nvSpPr>
+          <p:cNvPr id="19" name="Shape 15"/>
+          <p:cNvSpPr/>
+          <p:nvPr/>
+        </p:nvSpPr>
+        <p:spPr>
+          <a:xfrm>
+            <a:off x="8097317" y="1426464"/>
+            <a:ext cx="3527450" cy="1530096"/>
+          </a:xfrm>
+          <a:prstGeom prst="roundRect">
+            <a:avLst>
+              <a:gd name="adj" fmla="val 2988"/>
+            </a:avLst>
+          </a:prstGeom>
+          <a:solidFill>
+            <a:srgbClr val="FBFCFE"/>
+          </a:solidFill>
+          <a:ln w="9525">
+            <a:solidFill>
+              <a:srgbClr val="E4EBF5"/>
+            </a:solidFill>
+            <a:prstDash val="solid"/>
+          </a:ln>
+        </p:spPr>
       </p:sp>
       <p:pic>
         <p:nvPicPr>
-          <p:cNvPr id="12" name="Image 2" descr="/home/user/Flitunion/docs/photos/seller-items/reptile.jpg">    </p:cNvPr>
+          <p:cNvPr id="20" name="Image 2" descr="/home/user/Flitunion/docs/photos/seller-items/reptile.jpg">    </p:cNvPr>
           <p:cNvPicPr>
             <a:picLocks noChangeAspect="1"/>
           </p:cNvPicPr>
@@ -5109,8 +7935,8 @@
         </p:blipFill>
         <p:spPr>
           <a:xfrm>
-            <a:off x="8158277" y="1443228"/>
-            <a:ext cx="1417320" cy="1417320"/>
+            <a:off x="8216189" y="1545336"/>
+            <a:ext cx="1292352" cy="1292352"/>
           </a:xfrm>
           <a:prstGeom prst="rect">
             <a:avLst/>
@@ -5119,14 +7945,53 @@
       </p:pic>
       <p:sp>
         <p:nvSpPr>
-          <p:cNvPr id="13" name="Text 8"/>
-          <p:cNvSpPr txBox="1"/>
-          <p:nvPr/>
-        </p:nvSpPr>
-        <p:spPr>
-          <a:xfrm>
-            <a:off x="9721901" y="1443228"/>
-            <a:ext cx="2012594" cy="292608"/>
+          <p:cNvPr id="21" name="Text 16"/>
+          <p:cNvSpPr txBox="1"/>
+          <p:nvPr/>
+        </p:nvSpPr>
+        <p:spPr>
+          <a:xfrm>
+            <a:off x="9673133" y="1563624"/>
+            <a:ext cx="1805330" cy="164592"/>
+          </a:xfrm>
+          <a:prstGeom prst="rect">
+            <a:avLst/>
+          </a:prstGeom>
+          <a:noFill/>
+          <a:ln/>
+        </p:spPr>
+        <p:txBody>
+          <a:bodyPr wrap="square" rtlCol="0" anchor="ctr"/>
+          <a:lstStyle/>
+          <a:p>
+            <a:pPr algn="l" indent="0" marL="0">
+              <a:buNone/>
+            </a:pPr>
+            <a:r>
+              <a:rPr lang="en-US" sz="750" b="1" spc="100" kern="0" dirty="0">
+                <a:solidFill>
+                  <a:srgbClr val="3182F6"/>
+                </a:solidFill>
+                <a:latin typeface="Arial" pitchFamily="34" charset="0"/>
+                <a:ea typeface="Arial" pitchFamily="34" charset="-122"/>
+                <a:cs typeface="Arial" pitchFamily="34" charset="-120"/>
+              </a:rPr>
+              <a:t>30</a:t>
+            </a:r>
+            <a:endParaRPr lang="en-US" sz="750" dirty="0"/>
+          </a:p>
+        </p:txBody>
+      </p:sp>
+      <p:sp>
+        <p:nvSpPr>
+          <p:cNvPr id="22" name="Text 17"/>
+          <p:cNvSpPr txBox="1"/>
+          <p:nvPr/>
+        </p:nvSpPr>
+        <p:spPr>
+          <a:xfrm>
+            <a:off x="9673133" y="1728216"/>
+            <a:ext cx="1805330" cy="274320"/>
           </a:xfrm>
           <a:prstGeom prst="rect">
             <a:avLst/>
@@ -5142,9 +8007,9 @@
               <a:buNone/>
             </a:pPr>
             <a:r>
-              <a:rPr lang="en-US" sz="1300" b="1" dirty="0">
-                <a:solidFill>
-                  <a:srgbClr val="0F172A"/>
+              <a:rPr lang="en-US" sz="1250" b="1" dirty="0">
+                <a:solidFill>
+                  <a:srgbClr val="101828"/>
                 </a:solidFill>
                 <a:latin typeface="Malgun Gothic" pitchFamily="34" charset="0"/>
                 <a:ea typeface="Malgun Gothic" pitchFamily="34" charset="-122"/>
@@ -5152,20 +8017,34 @@
               </a:rPr>
               <a:t>파충류 체험</a:t>
             </a:r>
-            <a:endParaRPr lang="en-US" sz="1300" dirty="0"/>
-          </a:p>
-        </p:txBody>
-      </p:sp>
-      <p:sp>
-        <p:nvSpPr>
-          <p:cNvPr id="14" name="Text 9"/>
-          <p:cNvSpPr txBox="1"/>
-          <p:nvPr/>
-        </p:nvSpPr>
-        <p:spPr>
-          <a:xfrm>
-            <a:off x="9721901" y="1735836"/>
-            <a:ext cx="2012594" cy="1124712"/>
+            <a:pPr algn="l" indent="0" marL="0">
+              <a:buNone/>
+            </a:pPr>
+            <a:r>
+              <a:rPr lang="en-US" sz="800" b="1" dirty="0">
+                <a:solidFill>
+                  <a:srgbClr val="3182F6"/>
+                </a:solidFill>
+                <a:latin typeface="Malgun Gothic" pitchFamily="34" charset="0"/>
+                <a:ea typeface="Malgun Gothic" pitchFamily="34" charset="-122"/>
+                <a:cs typeface="Malgun Gothic" pitchFamily="34" charset="-120"/>
+              </a:rPr>
+              <a:t>   1곳</a:t>
+            </a:r>
+            <a:endParaRPr lang="en-US" sz="1250" dirty="0"/>
+          </a:p>
+        </p:txBody>
+      </p:sp>
+      <p:sp>
+        <p:nvSpPr>
+          <p:cNvPr id="23" name="Text 18"/>
+          <p:cNvSpPr txBox="1"/>
+          <p:nvPr/>
+        </p:nvSpPr>
+        <p:spPr>
+          <a:xfrm>
+            <a:off x="9673133" y="2020824"/>
+            <a:ext cx="1805330" cy="816864"/>
           </a:xfrm>
           <a:prstGeom prst="rect">
             <a:avLst/>
@@ -5179,20 +8058,20 @@
           <a:p>
             <a:pPr algn="l" indent="0" marL="0">
               <a:lnSpc>
-                <a:spcPct val="120000"/>
+                <a:spcPct val="122000"/>
               </a:lnSpc>
               <a:buNone/>
             </a:pPr>
             <a:r>
               <a:rPr lang="en-US" sz="800" dirty="0">
                 <a:solidFill>
-                  <a:srgbClr val="475569"/>
-                </a:solidFill>
-                <a:latin typeface="Malgun Gothic" pitchFamily="34" charset="0"/>
-                <a:ea typeface="Malgun Gothic" pitchFamily="34" charset="-122"/>
-                <a:cs typeface="Malgun Gothic" pitchFamily="34" charset="-120"/>
-              </a:rPr>
-              <a:t>1곳 — 크레스티드게코, 아프리카 식물. 다른 마켓에 없는 차별화 콘텐츠</a:t>
+                  <a:srgbClr val="5A6B85"/>
+                </a:solidFill>
+                <a:latin typeface="Malgun Gothic" pitchFamily="34" charset="0"/>
+                <a:ea typeface="Malgun Gothic" pitchFamily="34" charset="-122"/>
+                <a:cs typeface="Malgun Gothic" pitchFamily="34" charset="-120"/>
+              </a:rPr>
+              <a:t>크레스티드게코, 아프리카 식물. 다른 마켓에 없는 차별화 콘텐츠</a:t>
             </a:r>
             <a:endParaRPr lang="en-US" sz="800" dirty="0"/>
           </a:p>
@@ -5200,14 +8079,39 @@
       </p:sp>
       <p:sp>
         <p:nvSpPr>
-          <p:cNvPr id="15" name="Text 10"/>
-          <p:cNvSpPr txBox="1"/>
-          <p:nvPr/>
-        </p:nvSpPr>
-        <p:spPr>
-          <a:xfrm>
-            <a:off x="457200" y="6492240"/>
-            <a:ext cx="10637215" cy="274320"/>
+          <p:cNvPr id="24" name="Shape 19"/>
+          <p:cNvSpPr/>
+          <p:nvPr/>
+        </p:nvSpPr>
+        <p:spPr>
+          <a:xfrm>
+            <a:off x="566928" y="6400800"/>
+            <a:ext cx="11057839" cy="10973"/>
+          </a:xfrm>
+          <a:prstGeom prst="rect">
+            <a:avLst/>
+          </a:prstGeom>
+          <a:solidFill>
+            <a:srgbClr val="E4EBF5"/>
+          </a:solidFill>
+          <a:ln w="12700">
+            <a:solidFill>
+              <a:srgbClr val="E4EBF5"/>
+            </a:solidFill>
+            <a:prstDash val="solid"/>
+          </a:ln>
+        </p:spPr>
+      </p:sp>
+      <p:sp>
+        <p:nvSpPr>
+          <p:cNvPr id="25" name="Text 20"/>
+          <p:cNvSpPr txBox="1"/>
+          <p:nvPr/>
+        </p:nvSpPr>
+        <p:spPr>
+          <a:xfrm>
+            <a:off x="566928" y="6492240"/>
+            <a:ext cx="10234879" cy="256032"/>
           </a:xfrm>
           <a:prstGeom prst="rect">
             <a:avLst/>
@@ -5225,13 +8129,13 @@
             <a:r>
               <a:rPr lang="en-US" sz="750" dirty="0">
                 <a:solidFill>
-                  <a:srgbClr val="94A3B8"/>
-                </a:solidFill>
-                <a:latin typeface="Malgun Gothic" pitchFamily="34" charset="0"/>
-                <a:ea typeface="Malgun Gothic" pitchFamily="34" charset="-122"/>
-                <a:cs typeface="Malgun Gothic" pitchFamily="34" charset="-120"/>
-              </a:rPr>
-              <a:t>플릿 유니온 · www.flitunion.com   |   사진은 품목 이해를 돕기 위한 예시 이미지입니다 (자유 이용 라이선스). 실제 참여 셀러의 상품 사진이 아닙니다.</a:t>
+                  <a:srgbClr val="A3B0C4"/>
+                </a:solidFill>
+                <a:latin typeface="Malgun Gothic" pitchFamily="34" charset="0"/>
+                <a:ea typeface="Malgun Gothic" pitchFamily="34" charset="-122"/>
+                <a:cs typeface="Malgun Gothic" pitchFamily="34" charset="-120"/>
+              </a:rPr>
+              <a:t>사진은 품목 이해를 돕기 위한 예시 이미지입니다 (자유 이용 라이선스). 실제 참여 셀러의 상품 사진이 아닙니다.</a:t>
             </a:r>
             <a:endParaRPr lang="en-US" sz="750" dirty="0"/>
           </a:p>
@@ -5239,14 +8143,14 @@
       </p:sp>
       <p:sp>
         <p:nvSpPr>
-          <p:cNvPr id="16" name="Text 11"/>
-          <p:cNvSpPr txBox="1"/>
-          <p:nvPr/>
-        </p:nvSpPr>
-        <p:spPr>
-          <a:xfrm>
-            <a:off x="457200" y="6492240"/>
-            <a:ext cx="11277295" cy="274320"/>
+          <p:cNvPr id="26" name="Text 21"/>
+          <p:cNvSpPr txBox="1"/>
+          <p:nvPr/>
+        </p:nvSpPr>
+        <p:spPr>
+          <a:xfrm>
+            <a:off x="566928" y="6492240"/>
+            <a:ext cx="11057839" cy="256032"/>
           </a:xfrm>
           <a:prstGeom prst="rect">
             <a:avLst/>
@@ -5262,15 +8166,15 @@
               <a:buNone/>
             </a:pPr>
             <a:r>
-              <a:rPr lang="en-US" sz="750" dirty="0">
-                <a:solidFill>
-                  <a:srgbClr val="94A3B8"/>
-                </a:solidFill>
-                <a:latin typeface="Malgun Gothic" pitchFamily="34" charset="0"/>
-                <a:ea typeface="Malgun Gothic" pitchFamily="34" charset="-122"/>
-                <a:cs typeface="Malgun Gothic" pitchFamily="34" charset="-120"/>
-              </a:rPr>
-              <a:t>4 / 4</a:t>
+              <a:rPr lang="en-US" sz="750" b="1" spc="160" kern="0" dirty="0">
+                <a:solidFill>
+                  <a:srgbClr val="A3B0C4"/>
+                </a:solidFill>
+                <a:latin typeface="Arial" pitchFamily="34" charset="0"/>
+                <a:ea typeface="Arial" pitchFamily="34" charset="-122"/>
+                <a:cs typeface="Arial" pitchFamily="34" charset="-120"/>
+              </a:rPr>
+              <a:t>FLIT UNION</a:t>
             </a:r>
             <a:endParaRPr lang="en-US" sz="750" dirty="0"/>
           </a:p>

--- a/docs/flitunion-seller-catalog.pptx
+++ b/docs/flitunion-seller-catalog.pptx
@@ -8,10 +8,9 @@
     <p:sldId id="256" r:id="rId2"/>
     <p:sldId id="257" r:id="rId3"/>
     <p:sldId id="258" r:id="rId4"/>
-    <p:sldId id="259" r:id="rId5"/>
   </p:sldIdLst>
   <p:notesMasterIdLst>
-    <p:notesMasterId r:id="rId6"/>
+    <p:notesMasterId r:id="rId5"/>
   </p:notesMasterIdLst>
   <p:sldSz cx="12191695" cy="6858000"/>
   <p:notesSz cx="6858000" cy="12191695"/>
@@ -705,94 +704,6 @@
             <a:fld id="{F7021451-1387-4CA6-816F-3879F97B5CBC}" type="slidenum">
               <a:rPr lang="en-US"/>
               <a:t>3</a:t>
-            </a:fld>
-            <a:endParaRPr lang="en-US"/>
-          </a:p>
-        </p:txBody>
-      </p:sp>
-    </p:spTree>
-    <p:extLst>
-      <p:ext uri="{BB962C8B-B14F-4D97-AF65-F5344CB8AC3E}">
-        <p14:creationId xmlns:p14="http://schemas.microsoft.com/office/powerpoint/2010/main" val="1024086991"/>
-      </p:ext>
-    </p:extLst>
-  </p:cSld>
-  <p:clrMapOvr>
-    <a:masterClrMapping/>
-  </p:clrMapOvr>
-</p:notes>
-</file>
-
-<file path=ppt/notesSlides/notesSlide4.xml><?xml version="1.0" encoding="utf-8"?>
-<p:notes xmlns:a="http://schemas.openxmlformats.org/drawingml/2006/main" xmlns:r="http://schemas.openxmlformats.org/officeDocument/2006/relationships" xmlns:p="http://schemas.openxmlformats.org/presentationml/2006/main">
-  <p:cSld>
-    <p:spTree>
-      <p:nvGrpSpPr>
-        <p:cNvPr id="1" name=""/>
-        <p:cNvGrpSpPr/>
-        <p:nvPr/>
-      </p:nvGrpSpPr>
-      <p:grpSpPr>
-        <a:xfrm>
-          <a:off x="0" y="0"/>
-          <a:ext cx="0" cy="0"/>
-          <a:chOff x="0" y="0"/>
-          <a:chExt cx="0" cy="0"/>
-        </a:xfrm>
-      </p:grpSpPr>
-      <p:sp>
-        <p:nvSpPr>
-          <p:cNvPr id="2" name="Slide Image Placeholder 1"/>
-          <p:cNvSpPr>
-            <a:spLocks noGrp="1" noRot="1" noChangeAspect="1"/>
-          </p:cNvSpPr>
-          <p:nvPr>
-            <p:ph type="sldImg"/>
-          </p:nvPr>
-        </p:nvSpPr>
-        <p:spPr/>
-      </p:sp>
-      <p:sp>
-        <p:nvSpPr>
-          <p:cNvPr id="3" name="Notes Placeholder 2"/>
-          <p:cNvSpPr>
-            <a:spLocks noGrp="1"/>
-          </p:cNvSpPr>
-          <p:nvPr>
-            <p:ph type="body" idx="1"/>
-          </p:nvPr>
-        </p:nvSpPr>
-        <p:spPr/>
-        <p:txBody>
-          <a:bodyPr/>
-          <a:lstStyle/>
-          <a:p>
-            <a:r>
-              <a:rPr lang="en-US" dirty="0"/>
-              <a:t/>
-            </a:r>
-            <a:endParaRPr lang="en-US" dirty="0"/>
-          </a:p>
-        </p:txBody>
-      </p:sp>
-      <p:sp>
-        <p:nvSpPr>
-          <p:cNvPr id="4" name="Slide Number Placeholder 3"/>
-          <p:cNvSpPr>
-            <a:spLocks noGrp="1"/>
-          </p:cNvSpPr>
-          <p:nvPr>
-            <p:ph type="sldNum" sz="quarter" idx="10"/>
-          </p:nvPr>
-        </p:nvSpPr>
-        <p:spPr/>
-        <p:txBody>
-          <a:bodyPr/>
-          <a:lstStyle/>
-          <a:p>
-            <a:fld id="{F7021451-1387-4CA6-816F-3879F97B5CBC}" type="slidenum">
-              <a:rPr lang="en-US"/>
-              <a:t>4</a:t>
             </a:fld>
             <a:endParaRPr lang="en-US"/>
           </a:p>
@@ -1303,7 +1214,7 @@
                 <a:ea typeface="Malgun Gothic" pitchFamily="34" charset="-122"/>
                 <a:cs typeface="Malgun Gothic" pitchFamily="34" charset="-120"/>
               </a:rPr>
-              <a:t>보유 셀러가 많은 순 30종</a:t>
+              <a:t>보유 셀러가 많은 순 27종</a:t>
             </a:r>
             <a:endParaRPr lang="en-US" sz="950" dirty="0"/>
           </a:p>
@@ -1356,7 +1267,7 @@
                 <a:ea typeface="Arial" pitchFamily="34" charset="-122"/>
                 <a:cs typeface="Arial" pitchFamily="34" charset="-120"/>
               </a:rPr>
-              <a:t> / 04</a:t>
+              <a:t> / 03</a:t>
             </a:r>
             <a:endParaRPr lang="en-US" sz="1100" dirty="0"/>
           </a:p>
@@ -3348,7 +3259,7 @@
                 <a:ea typeface="Malgun Gothic" pitchFamily="34" charset="-122"/>
                 <a:cs typeface="Malgun Gothic" pitchFamily="34" charset="-120"/>
               </a:rPr>
-              <a:t>보유 셀러가 많은 순 30종</a:t>
+              <a:t>보유 셀러가 많은 순 27종</a:t>
             </a:r>
             <a:endParaRPr lang="en-US" sz="950" dirty="0"/>
           </a:p>
@@ -3401,7 +3312,7 @@
                 <a:ea typeface="Arial" pitchFamily="34" charset="-122"/>
                 <a:cs typeface="Arial" pitchFamily="34" charset="-120"/>
               </a:rPr>
-              <a:t> / 04</a:t>
+              <a:t> / 03</a:t>
             </a:r>
             <a:endParaRPr lang="en-US" sz="1100" dirty="0"/>
           </a:p>
@@ -4386,7 +4297,7 @@
       </p:sp>
       <p:pic>
         <p:nvPicPr>
-          <p:cNvPr id="35" name="Image 5" descr="/home/user/Flitunion/docs/photos/seller-items/ceramic.jpg">    </p:cNvPr>
+          <p:cNvPr id="35" name="Image 5" descr="/home/user/Flitunion/docs/photos/seller-items/henna.jpg">    </p:cNvPr>
           <p:cNvPicPr>
             <a:picLocks noChangeAspect="1"/>
           </p:cNvPicPr>
@@ -4480,7 +4391,7 @@
                 <a:ea typeface="Malgun Gothic" pitchFamily="34" charset="-122"/>
                 <a:cs typeface="Malgun Gothic" pitchFamily="34" charset="-120"/>
               </a:rPr>
-              <a:t>도자기</a:t>
+              <a:t>헤나 · 타투</a:t>
             </a:r>
             <a:pPr algn="l" indent="0" marL="0">
               <a:buNone/>
@@ -4536,7 +4447,7 @@
                 <a:ea typeface="Malgun Gothic" pitchFamily="34" charset="-122"/>
                 <a:cs typeface="Malgun Gothic" pitchFamily="34" charset="-120"/>
               </a:rPr>
-              <a:t>그릇, 미니어처 오브제, 리빙 소품, 페인팅 액자</a:t>
+              <a:t>헤나 타투, 페이스페인팅, 주문제작 타투 스티커. 아이 동반 행사 필수 부스</a:t>
             </a:r>
             <a:endParaRPr lang="en-US" sz="800" dirty="0"/>
           </a:p>
@@ -4571,7 +4482,7 @@
       </p:sp>
       <p:pic>
         <p:nvPicPr>
-          <p:cNvPr id="40" name="Image 6" descr="/home/user/Flitunion/docs/photos/seller-items/knit.jpg">    </p:cNvPr>
+          <p:cNvPr id="40" name="Image 6" descr="/home/user/Flitunion/docs/photos/seller-items/ceramic.jpg">    </p:cNvPr>
           <p:cNvPicPr>
             <a:picLocks noChangeAspect="1"/>
           </p:cNvPicPr>
@@ -4665,7 +4576,7 @@
                 <a:ea typeface="Malgun Gothic" pitchFamily="34" charset="-122"/>
                 <a:cs typeface="Malgun Gothic" pitchFamily="34" charset="-120"/>
               </a:rPr>
-              <a:t>뜨개 · 니팅</a:t>
+              <a:t>도자기</a:t>
             </a:r>
             <a:pPr algn="l" indent="0" marL="0">
               <a:buNone/>
@@ -4721,7 +4632,7 @@
                 <a:ea typeface="Malgun Gothic" pitchFamily="34" charset="-122"/>
                 <a:cs typeface="Malgun Gothic" pitchFamily="34" charset="-120"/>
               </a:rPr>
-              <a:t>손염색실, 뜨개 소품, 수세미, 니팅 제품</a:t>
+              <a:t>그릇, 미니어처 오브제, 리빙 소품, 페인팅 액자</a:t>
             </a:r>
             <a:endParaRPr lang="en-US" sz="800" dirty="0"/>
           </a:p>
@@ -4756,7 +4667,7 @@
       </p:sp>
       <p:pic>
         <p:nvPicPr>
-          <p:cNvPr id="45" name="Image 7" descr="/home/user/Flitunion/docs/photos/seller-items/caricature.jpg">    </p:cNvPr>
+          <p:cNvPr id="45" name="Image 7" descr="/home/user/Flitunion/docs/photos/seller-items/knit.jpg">    </p:cNvPr>
           <p:cNvPicPr>
             <a:picLocks noChangeAspect="1"/>
           </p:cNvPicPr>
@@ -4850,7 +4761,7 @@
                 <a:ea typeface="Malgun Gothic" pitchFamily="34" charset="-122"/>
                 <a:cs typeface="Malgun Gothic" pitchFamily="34" charset="-120"/>
               </a:rPr>
-              <a:t>캐리커처 · 초상화</a:t>
+              <a:t>뜨개 · 니팅</a:t>
             </a:r>
             <a:pPr algn="l" indent="0" marL="0">
               <a:buNone/>
@@ -4906,7 +4817,7 @@
                 <a:ea typeface="Malgun Gothic" pitchFamily="34" charset="-122"/>
                 <a:cs typeface="Malgun Gothic" pitchFamily="34" charset="-120"/>
               </a:rPr>
-              <a:t>현장 캐리커처, 수채 초상화, 거리 인물화. 3분 내외로 완성돼 회전이 빠름</a:t>
+              <a:t>손염색실, 뜨개 소품, 수세미, 니팅 제품</a:t>
             </a:r>
             <a:endParaRPr lang="en-US" sz="800" dirty="0"/>
           </a:p>
@@ -4941,7 +4852,7 @@
       </p:sp>
       <p:pic>
         <p:nvPicPr>
-          <p:cNvPr id="50" name="Image 8" descr="/home/user/Flitunion/docs/photos/seller-items/photo.jpg">    </p:cNvPr>
+          <p:cNvPr id="50" name="Image 8" descr="/home/user/Flitunion/docs/photos/seller-items/caricature.jpg">    </p:cNvPr>
           <p:cNvPicPr>
             <a:picLocks noChangeAspect="1"/>
           </p:cNvPicPr>
@@ -5035,7 +4946,7 @@
                 <a:ea typeface="Malgun Gothic" pitchFamily="34" charset="-122"/>
                 <a:cs typeface="Malgun Gothic" pitchFamily="34" charset="-120"/>
               </a:rPr>
-              <a:t>즉석사진</a:t>
+              <a:t>캐리커처 · 초상화</a:t>
             </a:r>
             <a:pPr algn="l" indent="0" marL="0">
               <a:buNone/>
@@ -5091,7 +5002,7 @@
                 <a:ea typeface="Malgun Gothic" pitchFamily="34" charset="-122"/>
                 <a:cs typeface="Malgun Gothic" pitchFamily="34" charset="-120"/>
               </a:rPr>
-              <a:t>현장 촬영 후 즉석 인화. 행사 기념품으로 남는 부스</a:t>
+              <a:t>현장 캐리커처, 수채 초상화, 거리 인물화. 3분 내외로 완성돼 회전이 빠름</a:t>
             </a:r>
             <a:endParaRPr lang="en-US" sz="800" dirty="0"/>
           </a:p>
@@ -5393,7 +5304,7 @@
                 <a:ea typeface="Malgun Gothic" pitchFamily="34" charset="-122"/>
                 <a:cs typeface="Malgun Gothic" pitchFamily="34" charset="-120"/>
               </a:rPr>
-              <a:t>보유 셀러가 많은 순 30종</a:t>
+              <a:t>보유 셀러가 많은 순 27종</a:t>
             </a:r>
             <a:endParaRPr lang="en-US" sz="950" dirty="0"/>
           </a:p>
@@ -5446,7 +5357,7 @@
                 <a:ea typeface="Arial" pitchFamily="34" charset="-122"/>
                 <a:cs typeface="Arial" pitchFamily="34" charset="-120"/>
               </a:rPr>
-              <a:t> / 04</a:t>
+              <a:t> / 03</a:t>
             </a:r>
             <a:endParaRPr lang="en-US" sz="1100" dirty="0"/>
           </a:p>
@@ -5506,7 +5417,7 @@
       </p:sp>
       <p:pic>
         <p:nvPicPr>
-          <p:cNvPr id="10" name="Image 0" descr="/home/user/Flitunion/docs/photos/seller-items/figure.jpg">    </p:cNvPr>
+          <p:cNvPr id="10" name="Image 0" descr="/home/user/Flitunion/docs/photos/seller-items/photo.jpg">    </p:cNvPr>
           <p:cNvPicPr>
             <a:picLocks noChangeAspect="1"/>
           </p:cNvPicPr>
@@ -5600,7 +5511,7 @@
                 <a:ea typeface="Malgun Gothic" pitchFamily="34" charset="-122"/>
                 <a:cs typeface="Malgun Gothic" pitchFamily="34" charset="-120"/>
               </a:rPr>
-              <a:t>피규어</a:t>
+              <a:t>즉석사진</a:t>
             </a:r>
             <a:pPr algn="l" indent="0" marL="0">
               <a:buNone/>
@@ -5614,7 +5525,7 @@
                 <a:ea typeface="Malgun Gothic" pitchFamily="34" charset="-122"/>
                 <a:cs typeface="Malgun Gothic" pitchFamily="34" charset="-120"/>
               </a:rPr>
-              <a:t>   3곳</a:t>
+              <a:t>   4곳</a:t>
             </a:r>
             <a:endParaRPr lang="en-US" sz="1250" dirty="0"/>
           </a:p>
@@ -5656,7 +5567,7 @@
                 <a:ea typeface="Malgun Gothic" pitchFamily="34" charset="-122"/>
                 <a:cs typeface="Malgun Gothic" pitchFamily="34" charset="-120"/>
               </a:rPr>
-              <a:t>3D 인물 피규어 제작, 캐릭터 피규어</a:t>
+              <a:t>현장 촬영 후 즉석 인화. 행사 기념품으로 남는 부스</a:t>
             </a:r>
             <a:endParaRPr lang="en-US" sz="800" dirty="0"/>
           </a:p>
@@ -5691,7 +5602,7 @@
       </p:sp>
       <p:pic>
         <p:nvPicPr>
-          <p:cNvPr id="15" name="Image 1" descr="/home/user/Flitunion/docs/photos/seller-items/maedeup.jpg">    </p:cNvPr>
+          <p:cNvPr id="15" name="Image 1" descr="/home/user/Flitunion/docs/photos/seller-items/figure.jpg">    </p:cNvPr>
           <p:cNvPicPr>
             <a:picLocks noChangeAspect="1"/>
           </p:cNvPicPr>
@@ -5785,7 +5696,7 @@
                 <a:ea typeface="Malgun Gothic" pitchFamily="34" charset="-122"/>
                 <a:cs typeface="Malgun Gothic" pitchFamily="34" charset="-120"/>
               </a:rPr>
-              <a:t>매듭 · 리본</a:t>
+              <a:t>피규어</a:t>
             </a:r>
             <a:pPr algn="l" indent="0" marL="0">
               <a:buNone/>
@@ -5841,7 +5752,7 @@
                 <a:ea typeface="Malgun Gothic" pitchFamily="34" charset="-122"/>
                 <a:cs typeface="Malgun Gothic" pitchFamily="34" charset="-120"/>
               </a:rPr>
-              <a:t>전통 매듭 팔찌·머리핀, 리본 공예</a:t>
+              <a:t>3D 인물 피규어 제작, 캐릭터 피규어</a:t>
             </a:r>
             <a:endParaRPr lang="en-US" sz="800" dirty="0"/>
           </a:p>
@@ -5876,7 +5787,7 @@
       </p:sp>
       <p:pic>
         <p:nvPicPr>
-          <p:cNvPr id="20" name="Image 2" descr="/home/user/Flitunion/docs/photos/seller-items/nail.jpg">    </p:cNvPr>
+          <p:cNvPr id="20" name="Image 2" descr="/home/user/Flitunion/docs/photos/seller-items/maedeup.jpg">    </p:cNvPr>
           <p:cNvPicPr>
             <a:picLocks noChangeAspect="1"/>
           </p:cNvPicPr>
@@ -5970,7 +5881,7 @@
                 <a:ea typeface="Malgun Gothic" pitchFamily="34" charset="-122"/>
                 <a:cs typeface="Malgun Gothic" pitchFamily="34" charset="-120"/>
               </a:rPr>
-              <a:t>네일 · 뷰티</a:t>
+              <a:t>매듭 · 리본</a:t>
             </a:r>
             <a:pPr algn="l" indent="0" marL="0">
               <a:buNone/>
@@ -6026,7 +5937,7 @@
                 <a:ea typeface="Malgun Gothic" pitchFamily="34" charset="-122"/>
                 <a:cs typeface="Malgun Gothic" pitchFamily="34" charset="-120"/>
               </a:rPr>
-              <a:t>수제 네일팁 주문제작, 더마·K뷰티 화장품</a:t>
+              <a:t>전통 매듭 팔찌·머리핀, 리본 공예</a:t>
             </a:r>
             <a:endParaRPr lang="en-US" sz="800" dirty="0"/>
           </a:p>
@@ -6061,7 +5972,7 @@
       </p:sp>
       <p:pic>
         <p:nvPicPr>
-          <p:cNvPr id="25" name="Image 3" descr="/home/user/Flitunion/docs/photos/seller-items/henna.jpg">    </p:cNvPr>
+          <p:cNvPr id="25" name="Image 3" descr="/home/user/Flitunion/docs/photos/seller-items/nail.jpg">    </p:cNvPr>
           <p:cNvPicPr>
             <a:picLocks noChangeAspect="1"/>
           </p:cNvPicPr>
@@ -6155,7 +6066,7 @@
                 <a:ea typeface="Malgun Gothic" pitchFamily="34" charset="-122"/>
                 <a:cs typeface="Malgun Gothic" pitchFamily="34" charset="-120"/>
               </a:rPr>
-              <a:t>헤나 · 페이스페인팅</a:t>
+              <a:t>네일 · 뷰티</a:t>
             </a:r>
             <a:pPr algn="l" indent="0" marL="0">
               <a:buNone/>
@@ -6169,7 +6080,7 @@
                 <a:ea typeface="Malgun Gothic" pitchFamily="34" charset="-122"/>
                 <a:cs typeface="Malgun Gothic" pitchFamily="34" charset="-120"/>
               </a:rPr>
-              <a:t>   2곳</a:t>
+              <a:t>   3곳</a:t>
             </a:r>
             <a:endParaRPr lang="en-US" sz="1250" dirty="0"/>
           </a:p>
@@ -6211,7 +6122,7 @@
                 <a:ea typeface="Malgun Gothic" pitchFamily="34" charset="-122"/>
                 <a:cs typeface="Malgun Gothic" pitchFamily="34" charset="-120"/>
               </a:rPr>
-              <a:t>헤나 타투와 페이스페인팅. 아이 동반 행사 필수 부스</a:t>
+              <a:t>수제 네일팁 주문제작, 더마·K뷰티 화장품</a:t>
             </a:r>
             <a:endParaRPr lang="en-US" sz="800" dirty="0"/>
           </a:p>
@@ -6246,7 +6157,7 @@
       </p:sp>
       <p:pic>
         <p:nvPicPr>
-          <p:cNvPr id="30" name="Image 4" descr="/home/user/Flitunion/docs/photos/seller-items/wood.jpg">    </p:cNvPr>
+          <p:cNvPr id="30" name="Image 4" descr="/home/user/Flitunion/docs/photos/seller-items/leather.jpg">    </p:cNvPr>
           <p:cNvPicPr>
             <a:picLocks noChangeAspect="1"/>
           </p:cNvPicPr>
@@ -6340,7 +6251,7 @@
                 <a:ea typeface="Malgun Gothic" pitchFamily="34" charset="-122"/>
                 <a:cs typeface="Malgun Gothic" pitchFamily="34" charset="-120"/>
               </a:rPr>
-              <a:t>목공예</a:t>
+              <a:t>가죽 · 라탄 · 펠트</a:t>
             </a:r>
             <a:pPr algn="l" indent="0" marL="0">
               <a:buNone/>
@@ -6354,7 +6265,7 @@
                 <a:ea typeface="Malgun Gothic" pitchFamily="34" charset="-122"/>
                 <a:cs typeface="Malgun Gothic" pitchFamily="34" charset="-120"/>
               </a:rPr>
-              <a:t>   2곳</a:t>
+              <a:t>   3곳</a:t>
             </a:r>
             <a:endParaRPr lang="en-US" sz="1250" dirty="0"/>
           </a:p>
@@ -6396,7 +6307,7 @@
                 <a:ea typeface="Malgun Gothic" pitchFamily="34" charset="-122"/>
                 <a:cs typeface="Malgun Gothic" pitchFamily="34" charset="-120"/>
               </a:rPr>
-              <a:t>원목 소품, 바느질 도구, 데스크 오거나이저</a:t>
+              <a:t>카드지갑·키링 DIY 가죽 체험, 라탄 바구니와 트레이, 양모펠트 인형과 브로치</a:t>
             </a:r>
             <a:endParaRPr lang="en-US" sz="800" dirty="0"/>
           </a:p>
@@ -6431,7 +6342,7 @@
       </p:sp>
       <p:pic>
         <p:nvPicPr>
-          <p:cNvPr id="35" name="Image 5" descr="/home/user/Flitunion/docs/photos/seller-items/badge.jpg">    </p:cNvPr>
+          <p:cNvPr id="35" name="Image 5" descr="/home/user/Flitunion/docs/photos/seller-items/wood.jpg">    </p:cNvPr>
           <p:cNvPicPr>
             <a:picLocks noChangeAspect="1"/>
           </p:cNvPicPr>
@@ -6525,7 +6436,7 @@
                 <a:ea typeface="Malgun Gothic" pitchFamily="34" charset="-122"/>
                 <a:cs typeface="Malgun Gothic" pitchFamily="34" charset="-120"/>
               </a:rPr>
-              <a:t>뱃지</a:t>
+              <a:t>목공예</a:t>
             </a:r>
             <a:pPr algn="l" indent="0" marL="0">
               <a:buNone/>
@@ -6581,7 +6492,7 @@
                 <a:ea typeface="Malgun Gothic" pitchFamily="34" charset="-122"/>
                 <a:cs typeface="Malgun Gothic" pitchFamily="34" charset="-120"/>
               </a:rPr>
-              <a:t>캘리그래피·그림 뱃지 제작</a:t>
+              <a:t>원목 소품, 바느질 도구, 데스크 오거나이저</a:t>
             </a:r>
             <a:endParaRPr lang="en-US" sz="800" dirty="0"/>
           </a:p>
@@ -6616,7 +6527,7 @@
       </p:sp>
       <p:pic>
         <p:nvPicPr>
-          <p:cNvPr id="40" name="Image 6" descr="/home/user/Flitunion/docs/photos/seller-items/tattoo.jpg">    </p:cNvPr>
+          <p:cNvPr id="40" name="Image 6" descr="/home/user/Flitunion/docs/photos/seller-items/badge.jpg">    </p:cNvPr>
           <p:cNvPicPr>
             <a:picLocks noChangeAspect="1"/>
           </p:cNvPicPr>
@@ -6710,7 +6621,7 @@
                 <a:ea typeface="Malgun Gothic" pitchFamily="34" charset="-122"/>
                 <a:cs typeface="Malgun Gothic" pitchFamily="34" charset="-120"/>
               </a:rPr>
-              <a:t>타투 스티커</a:t>
+              <a:t>뱃지</a:t>
             </a:r>
             <a:pPr algn="l" indent="0" marL="0">
               <a:buNone/>
@@ -6766,7 +6677,7 @@
                 <a:ea typeface="Malgun Gothic" pitchFamily="34" charset="-122"/>
                 <a:cs typeface="Malgun Gothic" pitchFamily="34" charset="-120"/>
               </a:rPr>
-              <a:t>주문제작 타투 스티커, 타투 아트 전시·체험</a:t>
+              <a:t>캘리그래피·그림 뱃지 제작</a:t>
             </a:r>
             <a:endParaRPr lang="en-US" sz="800" dirty="0"/>
           </a:p>
@@ -6801,7 +6712,7 @@
       </p:sp>
       <p:pic>
         <p:nvPicPr>
-          <p:cNvPr id="45" name="Image 7" descr="/home/user/Flitunion/docs/photos/seller-items/leather.jpg">    </p:cNvPr>
+          <p:cNvPr id="45" name="Image 7" descr="/home/user/Flitunion/docs/photos/seller-items/tufting.jpg">    </p:cNvPr>
           <p:cNvPicPr>
             <a:picLocks noChangeAspect="1"/>
           </p:cNvPicPr>
@@ -6895,7 +6806,7 @@
                 <a:ea typeface="Malgun Gothic" pitchFamily="34" charset="-122"/>
                 <a:cs typeface="Malgun Gothic" pitchFamily="34" charset="-120"/>
               </a:rPr>
-              <a:t>가죽공예</a:t>
+              <a:t>터프팅</a:t>
             </a:r>
             <a:pPr algn="l" indent="0" marL="0">
               <a:buNone/>
@@ -6951,7 +6862,7 @@
                 <a:ea typeface="Malgun Gothic" pitchFamily="34" charset="-122"/>
                 <a:cs typeface="Malgun Gothic" pitchFamily="34" charset="-120"/>
               </a:rPr>
-              <a:t>카드지갑, 키링 등 DIY 패키지 형태의 가죽 체험</a:t>
+              <a:t>러그 공예. 체류 시간이 길어 유입을 붙잡는 부스</a:t>
             </a:r>
             <a:endParaRPr lang="en-US" sz="800" dirty="0"/>
           </a:p>
@@ -6986,7 +6897,7 @@
       </p:sp>
       <p:pic>
         <p:nvPicPr>
-          <p:cNvPr id="50" name="Image 8" descr="/home/user/Flitunion/docs/photos/seller-items/rattan.jpg">    </p:cNvPr>
+          <p:cNvPr id="50" name="Image 8" descr="/home/user/Flitunion/docs/photos/seller-items/reptile.jpg">    </p:cNvPr>
           <p:cNvPicPr>
             <a:picLocks noChangeAspect="1"/>
           </p:cNvPicPr>
@@ -7080,7 +6991,7 @@
                 <a:ea typeface="Malgun Gothic" pitchFamily="34" charset="-122"/>
                 <a:cs typeface="Malgun Gothic" pitchFamily="34" charset="-120"/>
               </a:rPr>
-              <a:t>라탄 공예</a:t>
+              <a:t>파충류 체험</a:t>
             </a:r>
             <a:pPr algn="l" indent="0" marL="0">
               <a:buNone/>
@@ -7136,7 +7047,7 @@
                 <a:ea typeface="Malgun Gothic" pitchFamily="34" charset="-122"/>
                 <a:cs typeface="Malgun Gothic" pitchFamily="34" charset="-120"/>
               </a:rPr>
-              <a:t>라탄 바구니, 트레이, 소품</a:t>
+              <a:t>크레스티드게코, 아프리카 식물. 다른 마켓에 없는 차별화 콘텐츠</a:t>
             </a:r>
             <a:endParaRPr lang="en-US" sz="800" dirty="0"/>
           </a:p>
@@ -7209,941 +7120,6 @@
       <p:sp>
         <p:nvSpPr>
           <p:cNvPr id="56" name="Text 45"/>
-          <p:cNvSpPr txBox="1"/>
-          <p:nvPr/>
-        </p:nvSpPr>
-        <p:spPr>
-          <a:xfrm>
-            <a:off x="566928" y="6492240"/>
-            <a:ext cx="11057839" cy="256032"/>
-          </a:xfrm>
-          <a:prstGeom prst="rect">
-            <a:avLst/>
-          </a:prstGeom>
-          <a:noFill/>
-          <a:ln/>
-        </p:spPr>
-        <p:txBody>
-          <a:bodyPr wrap="square" rtlCol="0" anchor="ctr"/>
-          <a:lstStyle/>
-          <a:p>
-            <a:pPr algn="r" indent="0" marL="0">
-              <a:buNone/>
-            </a:pPr>
-            <a:r>
-              <a:rPr lang="en-US" sz="750" b="1" spc="160" kern="0" dirty="0">
-                <a:solidFill>
-                  <a:srgbClr val="A3B0C4"/>
-                </a:solidFill>
-                <a:latin typeface="Arial" pitchFamily="34" charset="0"/>
-                <a:ea typeface="Arial" pitchFamily="34" charset="-122"/>
-                <a:cs typeface="Arial" pitchFamily="34" charset="-120"/>
-              </a:rPr>
-              <a:t>FLIT UNION</a:t>
-            </a:r>
-            <a:endParaRPr lang="en-US" sz="750" dirty="0"/>
-          </a:p>
-        </p:txBody>
-      </p:sp>
-    </p:spTree>
-  </p:cSld>
-  <p:clrMapOvr>
-    <a:masterClrMapping/>
-  </p:clrMapOvr>
-</p:sld>
-</file>
-
-<file path=ppt/slides/slide4.xml><?xml version="1.0" encoding="utf-8"?>
-<p:sld xmlns:a="http://schemas.openxmlformats.org/drawingml/2006/main" xmlns:r="http://schemas.openxmlformats.org/officeDocument/2006/relationships" xmlns:p="http://schemas.openxmlformats.org/presentationml/2006/main">
-  <p:cSld name="Slide 4">
-    <p:bg>
-      <p:bgPr>
-        <a:solidFill>
-          <a:srgbClr val="FFFFFF"/>
-        </a:solidFill>
-      </p:bgPr>
-    </p:bg>
-    <p:spTree>
-      <p:nvGrpSpPr>
-        <p:cNvPr id="1" name=""/>
-        <p:cNvGrpSpPr/>
-        <p:nvPr/>
-      </p:nvGrpSpPr>
-      <p:grpSpPr>
-        <a:xfrm>
-          <a:off x="0" y="0"/>
-          <a:ext cx="0" cy="0"/>
-          <a:chOff x="0" y="0"/>
-          <a:chExt cx="0" cy="0"/>
-        </a:xfrm>
-      </p:grpSpPr>
-      <p:sp>
-        <p:nvSpPr>
-          <p:cNvPr id="2" name="Shape 0"/>
-          <p:cNvSpPr/>
-          <p:nvPr/>
-        </p:nvSpPr>
-        <p:spPr>
-          <a:xfrm>
-            <a:off x="0" y="0"/>
-            <a:ext cx="12191695" cy="68580"/>
-          </a:xfrm>
-          <a:prstGeom prst="rect">
-            <a:avLst/>
-          </a:prstGeom>
-          <a:solidFill>
-            <a:srgbClr val="0B1F44"/>
-          </a:solidFill>
-          <a:ln w="12700">
-            <a:solidFill>
-              <a:srgbClr val="0B1F44"/>
-            </a:solidFill>
-            <a:prstDash val="solid"/>
-          </a:ln>
-        </p:spPr>
-      </p:sp>
-      <p:sp>
-        <p:nvSpPr>
-          <p:cNvPr id="3" name="Shape 1"/>
-          <p:cNvSpPr/>
-          <p:nvPr/>
-        </p:nvSpPr>
-        <p:spPr>
-          <a:xfrm>
-            <a:off x="566928" y="457200"/>
-            <a:ext cx="50292" cy="420624"/>
-          </a:xfrm>
-          <a:prstGeom prst="rect">
-            <a:avLst/>
-          </a:prstGeom>
-          <a:solidFill>
-            <a:srgbClr val="3182F6"/>
-          </a:solidFill>
-          <a:ln w="12700">
-            <a:solidFill>
-              <a:srgbClr val="3182F6"/>
-            </a:solidFill>
-            <a:prstDash val="solid"/>
-          </a:ln>
-        </p:spPr>
-      </p:sp>
-      <p:sp>
-        <p:nvSpPr>
-          <p:cNvPr id="4" name="Text 2"/>
-          <p:cNvSpPr txBox="1"/>
-          <p:nvPr/>
-        </p:nvSpPr>
-        <p:spPr>
-          <a:xfrm>
-            <a:off x="749808" y="384048"/>
-            <a:ext cx="3657600" cy="201168"/>
-          </a:xfrm>
-          <a:prstGeom prst="rect">
-            <a:avLst/>
-          </a:prstGeom>
-          <a:noFill/>
-          <a:ln/>
-        </p:spPr>
-        <p:txBody>
-          <a:bodyPr wrap="square" rtlCol="0" anchor="ctr"/>
-          <a:lstStyle/>
-          <a:p>
-            <a:pPr algn="l" indent="0" marL="0">
-              <a:buNone/>
-            </a:pPr>
-            <a:r>
-              <a:rPr lang="en-US" sz="850" b="1" spc="240" kern="0" dirty="0">
-                <a:solidFill>
-                  <a:srgbClr val="3182F6"/>
-                </a:solidFill>
-                <a:latin typeface="Arial" pitchFamily="34" charset="0"/>
-                <a:ea typeface="Arial" pitchFamily="34" charset="-122"/>
-                <a:cs typeface="Arial" pitchFamily="34" charset="-120"/>
-              </a:rPr>
-              <a:t>FLIT UNION</a:t>
-            </a:r>
-            <a:endParaRPr lang="en-US" sz="850" dirty="0"/>
-          </a:p>
-        </p:txBody>
-      </p:sp>
-      <p:sp>
-        <p:nvSpPr>
-          <p:cNvPr id="5" name="Text 3"/>
-          <p:cNvSpPr txBox="1"/>
-          <p:nvPr/>
-        </p:nvSpPr>
-        <p:spPr>
-          <a:xfrm>
-            <a:off x="749808" y="548640"/>
-            <a:ext cx="6583680" cy="365760"/>
-          </a:xfrm>
-          <a:prstGeom prst="rect">
-            <a:avLst/>
-          </a:prstGeom>
-          <a:noFill/>
-          <a:ln/>
-        </p:spPr>
-        <p:txBody>
-          <a:bodyPr wrap="square" rtlCol="0" anchor="t"/>
-          <a:lstStyle/>
-          <a:p>
-            <a:pPr algn="l" indent="0" marL="0">
-              <a:buNone/>
-            </a:pPr>
-            <a:r>
-              <a:rPr lang="en-US" sz="2200" b="1" dirty="0">
-                <a:solidFill>
-                  <a:srgbClr val="0B1F44"/>
-                </a:solidFill>
-                <a:latin typeface="Malgun Gothic" pitchFamily="34" charset="0"/>
-                <a:ea typeface="Malgun Gothic" pitchFamily="34" charset="-122"/>
-                <a:cs typeface="Malgun Gothic" pitchFamily="34" charset="-120"/>
-              </a:rPr>
-              <a:t>플리마켓 셀러 품목</a:t>
-            </a:r>
-            <a:endParaRPr lang="en-US" sz="2200" dirty="0"/>
-          </a:p>
-        </p:txBody>
-      </p:sp>
-      <p:sp>
-        <p:nvSpPr>
-          <p:cNvPr id="6" name="Text 4"/>
-          <p:cNvSpPr txBox="1"/>
-          <p:nvPr/>
-        </p:nvSpPr>
-        <p:spPr>
-          <a:xfrm>
-            <a:off x="6869887" y="603504"/>
-            <a:ext cx="4754880" cy="274320"/>
-          </a:xfrm>
-          <a:prstGeom prst="rect">
-            <a:avLst/>
-          </a:prstGeom>
-          <a:noFill/>
-          <a:ln/>
-        </p:spPr>
-        <p:txBody>
-          <a:bodyPr wrap="square" rtlCol="0" anchor="t"/>
-          <a:lstStyle/>
-          <a:p>
-            <a:pPr algn="r" indent="0" marL="0">
-              <a:buNone/>
-            </a:pPr>
-            <a:r>
-              <a:rPr lang="en-US" sz="950" dirty="0">
-                <a:solidFill>
-                  <a:srgbClr val="5A6B85"/>
-                </a:solidFill>
-                <a:latin typeface="Malgun Gothic" pitchFamily="34" charset="0"/>
-                <a:ea typeface="Malgun Gothic" pitchFamily="34" charset="-122"/>
-                <a:cs typeface="Malgun Gothic" pitchFamily="34" charset="-120"/>
-              </a:rPr>
-              <a:t>보유 셀러가 많은 순 30종</a:t>
-            </a:r>
-            <a:endParaRPr lang="en-US" sz="950" dirty="0"/>
-          </a:p>
-        </p:txBody>
-      </p:sp>
-      <p:sp>
-        <p:nvSpPr>
-          <p:cNvPr id="7" name="Text 5"/>
-          <p:cNvSpPr txBox="1"/>
-          <p:nvPr/>
-        </p:nvSpPr>
-        <p:spPr>
-          <a:xfrm>
-            <a:off x="6869887" y="384048"/>
-            <a:ext cx="4754880" cy="219456"/>
-          </a:xfrm>
-          <a:prstGeom prst="rect">
-            <a:avLst/>
-          </a:prstGeom>
-          <a:noFill/>
-          <a:ln/>
-        </p:spPr>
-        <p:txBody>
-          <a:bodyPr wrap="square" rtlCol="0" anchor="ctr"/>
-          <a:lstStyle/>
-          <a:p>
-            <a:pPr algn="r" indent="0" marL="0">
-              <a:buNone/>
-            </a:pPr>
-            <a:r>
-              <a:rPr lang="en-US" sz="1100" b="1" dirty="0">
-                <a:solidFill>
-                  <a:srgbClr val="0B1F44"/>
-                </a:solidFill>
-                <a:latin typeface="Arial" pitchFamily="34" charset="0"/>
-                <a:ea typeface="Arial" pitchFamily="34" charset="-122"/>
-                <a:cs typeface="Arial" pitchFamily="34" charset="-120"/>
-              </a:rPr>
-              <a:t>04</a:t>
-            </a:r>
-            <a:pPr algn="r" indent="0" marL="0">
-              <a:buNone/>
-            </a:pPr>
-            <a:r>
-              <a:rPr lang="en-US" sz="900" dirty="0">
-                <a:solidFill>
-                  <a:srgbClr val="A3B0C4"/>
-                </a:solidFill>
-                <a:latin typeface="Arial" pitchFamily="34" charset="0"/>
-                <a:ea typeface="Arial" pitchFamily="34" charset="-122"/>
-                <a:cs typeface="Arial" pitchFamily="34" charset="-120"/>
-              </a:rPr>
-              <a:t> / 04</a:t>
-            </a:r>
-            <a:endParaRPr lang="en-US" sz="1100" dirty="0"/>
-          </a:p>
-        </p:txBody>
-      </p:sp>
-      <p:sp>
-        <p:nvSpPr>
-          <p:cNvPr id="8" name="Shape 6"/>
-          <p:cNvSpPr/>
-          <p:nvPr/>
-        </p:nvSpPr>
-        <p:spPr>
-          <a:xfrm>
-            <a:off x="566928" y="1152144"/>
-            <a:ext cx="11057839" cy="10973"/>
-          </a:xfrm>
-          <a:prstGeom prst="rect">
-            <a:avLst/>
-          </a:prstGeom>
-          <a:solidFill>
-            <a:srgbClr val="E4EBF5"/>
-          </a:solidFill>
-          <a:ln w="12700">
-            <a:solidFill>
-              <a:srgbClr val="E4EBF5"/>
-            </a:solidFill>
-            <a:prstDash val="solid"/>
-          </a:ln>
-        </p:spPr>
-      </p:sp>
-      <p:sp>
-        <p:nvSpPr>
-          <p:cNvPr id="9" name="Shape 7"/>
-          <p:cNvSpPr/>
-          <p:nvPr/>
-        </p:nvSpPr>
-        <p:spPr>
-          <a:xfrm>
-            <a:off x="566928" y="1426464"/>
-            <a:ext cx="3527450" cy="1530096"/>
-          </a:xfrm>
-          <a:prstGeom prst="roundRect">
-            <a:avLst>
-              <a:gd name="adj" fmla="val 2988"/>
-            </a:avLst>
-          </a:prstGeom>
-          <a:solidFill>
-            <a:srgbClr val="FBFCFE"/>
-          </a:solidFill>
-          <a:ln w="9525">
-            <a:solidFill>
-              <a:srgbClr val="E4EBF5"/>
-            </a:solidFill>
-            <a:prstDash val="solid"/>
-          </a:ln>
-        </p:spPr>
-      </p:sp>
-      <p:pic>
-        <p:nvPicPr>
-          <p:cNvPr id="10" name="Image 0" descr="/home/user/Flitunion/docs/photos/seller-items/felt.jpg">    </p:cNvPr>
-          <p:cNvPicPr>
-            <a:picLocks noChangeAspect="1"/>
-          </p:cNvPicPr>
-          <p:nvPr/>
-        </p:nvPicPr>
-        <p:blipFill>
-          <a:blip r:embed="rId1"/>
-          <a:stretch>
-            <a:fillRect/>
-          </a:stretch>
-        </p:blipFill>
-        <p:spPr>
-          <a:xfrm>
-            <a:off x="685800" y="1545336"/>
-            <a:ext cx="1292352" cy="1292352"/>
-          </a:xfrm>
-          <a:prstGeom prst="rect">
-            <a:avLst/>
-          </a:prstGeom>
-        </p:spPr>
-      </p:pic>
-      <p:sp>
-        <p:nvSpPr>
-          <p:cNvPr id="11" name="Text 8"/>
-          <p:cNvSpPr txBox="1"/>
-          <p:nvPr/>
-        </p:nvSpPr>
-        <p:spPr>
-          <a:xfrm>
-            <a:off x="2142744" y="1563624"/>
-            <a:ext cx="1805330" cy="164592"/>
-          </a:xfrm>
-          <a:prstGeom prst="rect">
-            <a:avLst/>
-          </a:prstGeom>
-          <a:noFill/>
-          <a:ln/>
-        </p:spPr>
-        <p:txBody>
-          <a:bodyPr wrap="square" rtlCol="0" anchor="ctr"/>
-          <a:lstStyle/>
-          <a:p>
-            <a:pPr algn="l" indent="0" marL="0">
-              <a:buNone/>
-            </a:pPr>
-            <a:r>
-              <a:rPr lang="en-US" sz="750" b="1" spc="100" kern="0" dirty="0">
-                <a:solidFill>
-                  <a:srgbClr val="3182F6"/>
-                </a:solidFill>
-                <a:latin typeface="Arial" pitchFamily="34" charset="0"/>
-                <a:ea typeface="Arial" pitchFamily="34" charset="-122"/>
-                <a:cs typeface="Arial" pitchFamily="34" charset="-120"/>
-              </a:rPr>
-              <a:t>28</a:t>
-            </a:r>
-            <a:endParaRPr lang="en-US" sz="750" dirty="0"/>
-          </a:p>
-        </p:txBody>
-      </p:sp>
-      <p:sp>
-        <p:nvSpPr>
-          <p:cNvPr id="12" name="Text 9"/>
-          <p:cNvSpPr txBox="1"/>
-          <p:nvPr/>
-        </p:nvSpPr>
-        <p:spPr>
-          <a:xfrm>
-            <a:off x="2142744" y="1728216"/>
-            <a:ext cx="1805330" cy="274320"/>
-          </a:xfrm>
-          <a:prstGeom prst="rect">
-            <a:avLst/>
-          </a:prstGeom>
-          <a:noFill/>
-          <a:ln/>
-        </p:spPr>
-        <p:txBody>
-          <a:bodyPr wrap="square" rtlCol="0" anchor="t"/>
-          <a:lstStyle/>
-          <a:p>
-            <a:pPr algn="l" indent="0" marL="0">
-              <a:buNone/>
-            </a:pPr>
-            <a:r>
-              <a:rPr lang="en-US" sz="1250" b="1" dirty="0">
-                <a:solidFill>
-                  <a:srgbClr val="101828"/>
-                </a:solidFill>
-                <a:latin typeface="Malgun Gothic" pitchFamily="34" charset="0"/>
-                <a:ea typeface="Malgun Gothic" pitchFamily="34" charset="-122"/>
-                <a:cs typeface="Malgun Gothic" pitchFamily="34" charset="-120"/>
-              </a:rPr>
-              <a:t>양모펠트</a:t>
-            </a:r>
-            <a:pPr algn="l" indent="0" marL="0">
-              <a:buNone/>
-            </a:pPr>
-            <a:r>
-              <a:rPr lang="en-US" sz="800" b="1" dirty="0">
-                <a:solidFill>
-                  <a:srgbClr val="3182F6"/>
-                </a:solidFill>
-                <a:latin typeface="Malgun Gothic" pitchFamily="34" charset="0"/>
-                <a:ea typeface="Malgun Gothic" pitchFamily="34" charset="-122"/>
-                <a:cs typeface="Malgun Gothic" pitchFamily="34" charset="-120"/>
-              </a:rPr>
-              <a:t>   1곳</a:t>
-            </a:r>
-            <a:endParaRPr lang="en-US" sz="1250" dirty="0"/>
-          </a:p>
-        </p:txBody>
-      </p:sp>
-      <p:sp>
-        <p:nvSpPr>
-          <p:cNvPr id="13" name="Text 10"/>
-          <p:cNvSpPr txBox="1"/>
-          <p:nvPr/>
-        </p:nvSpPr>
-        <p:spPr>
-          <a:xfrm>
-            <a:off x="2142744" y="2020824"/>
-            <a:ext cx="1805330" cy="816864"/>
-          </a:xfrm>
-          <a:prstGeom prst="rect">
-            <a:avLst/>
-          </a:prstGeom>
-          <a:noFill/>
-          <a:ln/>
-        </p:spPr>
-        <p:txBody>
-          <a:bodyPr wrap="square" rtlCol="0" anchor="t"/>
-          <a:lstStyle/>
-          <a:p>
-            <a:pPr algn="l" indent="0" marL="0">
-              <a:lnSpc>
-                <a:spcPct val="122000"/>
-              </a:lnSpc>
-              <a:buNone/>
-            </a:pPr>
-            <a:r>
-              <a:rPr lang="en-US" sz="800" dirty="0">
-                <a:solidFill>
-                  <a:srgbClr val="5A6B85"/>
-                </a:solidFill>
-                <a:latin typeface="Malgun Gothic" pitchFamily="34" charset="0"/>
-                <a:ea typeface="Malgun Gothic" pitchFamily="34" charset="-122"/>
-                <a:cs typeface="Malgun Gothic" pitchFamily="34" charset="-120"/>
-              </a:rPr>
-              <a:t>양모를 찔러 굳혀 만드는 인형, 브로치</a:t>
-            </a:r>
-            <a:endParaRPr lang="en-US" sz="800" dirty="0"/>
-          </a:p>
-        </p:txBody>
-      </p:sp>
-      <p:sp>
-        <p:nvSpPr>
-          <p:cNvPr id="14" name="Shape 11"/>
-          <p:cNvSpPr/>
-          <p:nvPr/>
-        </p:nvSpPr>
-        <p:spPr>
-          <a:xfrm>
-            <a:off x="4332122" y="1426464"/>
-            <a:ext cx="3527450" cy="1530096"/>
-          </a:xfrm>
-          <a:prstGeom prst="roundRect">
-            <a:avLst>
-              <a:gd name="adj" fmla="val 2988"/>
-            </a:avLst>
-          </a:prstGeom>
-          <a:solidFill>
-            <a:srgbClr val="FBFCFE"/>
-          </a:solidFill>
-          <a:ln w="9525">
-            <a:solidFill>
-              <a:srgbClr val="E4EBF5"/>
-            </a:solidFill>
-            <a:prstDash val="solid"/>
-          </a:ln>
-        </p:spPr>
-      </p:sp>
-      <p:pic>
-        <p:nvPicPr>
-          <p:cNvPr id="15" name="Image 1" descr="/home/user/Flitunion/docs/photos/seller-items/tufting.jpg">    </p:cNvPr>
-          <p:cNvPicPr>
-            <a:picLocks noChangeAspect="1"/>
-          </p:cNvPicPr>
-          <p:nvPr/>
-        </p:nvPicPr>
-        <p:blipFill>
-          <a:blip r:embed="rId2"/>
-          <a:stretch>
-            <a:fillRect/>
-          </a:stretch>
-        </p:blipFill>
-        <p:spPr>
-          <a:xfrm>
-            <a:off x="4450994" y="1545336"/>
-            <a:ext cx="1292352" cy="1292352"/>
-          </a:xfrm>
-          <a:prstGeom prst="rect">
-            <a:avLst/>
-          </a:prstGeom>
-        </p:spPr>
-      </p:pic>
-      <p:sp>
-        <p:nvSpPr>
-          <p:cNvPr id="16" name="Text 12"/>
-          <p:cNvSpPr txBox="1"/>
-          <p:nvPr/>
-        </p:nvSpPr>
-        <p:spPr>
-          <a:xfrm>
-            <a:off x="5907938" y="1563624"/>
-            <a:ext cx="1805330" cy="164592"/>
-          </a:xfrm>
-          <a:prstGeom prst="rect">
-            <a:avLst/>
-          </a:prstGeom>
-          <a:noFill/>
-          <a:ln/>
-        </p:spPr>
-        <p:txBody>
-          <a:bodyPr wrap="square" rtlCol="0" anchor="ctr"/>
-          <a:lstStyle/>
-          <a:p>
-            <a:pPr algn="l" indent="0" marL="0">
-              <a:buNone/>
-            </a:pPr>
-            <a:r>
-              <a:rPr lang="en-US" sz="750" b="1" spc="100" kern="0" dirty="0">
-                <a:solidFill>
-                  <a:srgbClr val="3182F6"/>
-                </a:solidFill>
-                <a:latin typeface="Arial" pitchFamily="34" charset="0"/>
-                <a:ea typeface="Arial" pitchFamily="34" charset="-122"/>
-                <a:cs typeface="Arial" pitchFamily="34" charset="-120"/>
-              </a:rPr>
-              <a:t>29</a:t>
-            </a:r>
-            <a:endParaRPr lang="en-US" sz="750" dirty="0"/>
-          </a:p>
-        </p:txBody>
-      </p:sp>
-      <p:sp>
-        <p:nvSpPr>
-          <p:cNvPr id="17" name="Text 13"/>
-          <p:cNvSpPr txBox="1"/>
-          <p:nvPr/>
-        </p:nvSpPr>
-        <p:spPr>
-          <a:xfrm>
-            <a:off x="5907938" y="1728216"/>
-            <a:ext cx="1805330" cy="274320"/>
-          </a:xfrm>
-          <a:prstGeom prst="rect">
-            <a:avLst/>
-          </a:prstGeom>
-          <a:noFill/>
-          <a:ln/>
-        </p:spPr>
-        <p:txBody>
-          <a:bodyPr wrap="square" rtlCol="0" anchor="t"/>
-          <a:lstStyle/>
-          <a:p>
-            <a:pPr algn="l" indent="0" marL="0">
-              <a:buNone/>
-            </a:pPr>
-            <a:r>
-              <a:rPr lang="en-US" sz="1250" b="1" dirty="0">
-                <a:solidFill>
-                  <a:srgbClr val="101828"/>
-                </a:solidFill>
-                <a:latin typeface="Malgun Gothic" pitchFamily="34" charset="0"/>
-                <a:ea typeface="Malgun Gothic" pitchFamily="34" charset="-122"/>
-                <a:cs typeface="Malgun Gothic" pitchFamily="34" charset="-120"/>
-              </a:rPr>
-              <a:t>터프팅</a:t>
-            </a:r>
-            <a:pPr algn="l" indent="0" marL="0">
-              <a:buNone/>
-            </a:pPr>
-            <a:r>
-              <a:rPr lang="en-US" sz="800" b="1" dirty="0">
-                <a:solidFill>
-                  <a:srgbClr val="3182F6"/>
-                </a:solidFill>
-                <a:latin typeface="Malgun Gothic" pitchFamily="34" charset="0"/>
-                <a:ea typeface="Malgun Gothic" pitchFamily="34" charset="-122"/>
-                <a:cs typeface="Malgun Gothic" pitchFamily="34" charset="-120"/>
-              </a:rPr>
-              <a:t>   1곳</a:t>
-            </a:r>
-            <a:endParaRPr lang="en-US" sz="1250" dirty="0"/>
-          </a:p>
-        </p:txBody>
-      </p:sp>
-      <p:sp>
-        <p:nvSpPr>
-          <p:cNvPr id="18" name="Text 14"/>
-          <p:cNvSpPr txBox="1"/>
-          <p:nvPr/>
-        </p:nvSpPr>
-        <p:spPr>
-          <a:xfrm>
-            <a:off x="5907938" y="2020824"/>
-            <a:ext cx="1805330" cy="816864"/>
-          </a:xfrm>
-          <a:prstGeom prst="rect">
-            <a:avLst/>
-          </a:prstGeom>
-          <a:noFill/>
-          <a:ln/>
-        </p:spPr>
-        <p:txBody>
-          <a:bodyPr wrap="square" rtlCol="0" anchor="t"/>
-          <a:lstStyle/>
-          <a:p>
-            <a:pPr algn="l" indent="0" marL="0">
-              <a:lnSpc>
-                <a:spcPct val="122000"/>
-              </a:lnSpc>
-              <a:buNone/>
-            </a:pPr>
-            <a:r>
-              <a:rPr lang="en-US" sz="800" dirty="0">
-                <a:solidFill>
-                  <a:srgbClr val="5A6B85"/>
-                </a:solidFill>
-                <a:latin typeface="Malgun Gothic" pitchFamily="34" charset="0"/>
-                <a:ea typeface="Malgun Gothic" pitchFamily="34" charset="-122"/>
-                <a:cs typeface="Malgun Gothic" pitchFamily="34" charset="-120"/>
-              </a:rPr>
-              <a:t>러그 공예. 체류 시간이 길어 유입을 붙잡는 부스</a:t>
-            </a:r>
-            <a:endParaRPr lang="en-US" sz="800" dirty="0"/>
-          </a:p>
-        </p:txBody>
-      </p:sp>
-      <p:sp>
-        <p:nvSpPr>
-          <p:cNvPr id="19" name="Shape 15"/>
-          <p:cNvSpPr/>
-          <p:nvPr/>
-        </p:nvSpPr>
-        <p:spPr>
-          <a:xfrm>
-            <a:off x="8097317" y="1426464"/>
-            <a:ext cx="3527450" cy="1530096"/>
-          </a:xfrm>
-          <a:prstGeom prst="roundRect">
-            <a:avLst>
-              <a:gd name="adj" fmla="val 2988"/>
-            </a:avLst>
-          </a:prstGeom>
-          <a:solidFill>
-            <a:srgbClr val="FBFCFE"/>
-          </a:solidFill>
-          <a:ln w="9525">
-            <a:solidFill>
-              <a:srgbClr val="E4EBF5"/>
-            </a:solidFill>
-            <a:prstDash val="solid"/>
-          </a:ln>
-        </p:spPr>
-      </p:sp>
-      <p:pic>
-        <p:nvPicPr>
-          <p:cNvPr id="20" name="Image 2" descr="/home/user/Flitunion/docs/photos/seller-items/reptile.jpg">    </p:cNvPr>
-          <p:cNvPicPr>
-            <a:picLocks noChangeAspect="1"/>
-          </p:cNvPicPr>
-          <p:nvPr/>
-        </p:nvPicPr>
-        <p:blipFill>
-          <a:blip r:embed="rId3"/>
-          <a:stretch>
-            <a:fillRect/>
-          </a:stretch>
-        </p:blipFill>
-        <p:spPr>
-          <a:xfrm>
-            <a:off x="8216189" y="1545336"/>
-            <a:ext cx="1292352" cy="1292352"/>
-          </a:xfrm>
-          <a:prstGeom prst="rect">
-            <a:avLst/>
-          </a:prstGeom>
-        </p:spPr>
-      </p:pic>
-      <p:sp>
-        <p:nvSpPr>
-          <p:cNvPr id="21" name="Text 16"/>
-          <p:cNvSpPr txBox="1"/>
-          <p:nvPr/>
-        </p:nvSpPr>
-        <p:spPr>
-          <a:xfrm>
-            <a:off x="9673133" y="1563624"/>
-            <a:ext cx="1805330" cy="164592"/>
-          </a:xfrm>
-          <a:prstGeom prst="rect">
-            <a:avLst/>
-          </a:prstGeom>
-          <a:noFill/>
-          <a:ln/>
-        </p:spPr>
-        <p:txBody>
-          <a:bodyPr wrap="square" rtlCol="0" anchor="ctr"/>
-          <a:lstStyle/>
-          <a:p>
-            <a:pPr algn="l" indent="0" marL="0">
-              <a:buNone/>
-            </a:pPr>
-            <a:r>
-              <a:rPr lang="en-US" sz="750" b="1" spc="100" kern="0" dirty="0">
-                <a:solidFill>
-                  <a:srgbClr val="3182F6"/>
-                </a:solidFill>
-                <a:latin typeface="Arial" pitchFamily="34" charset="0"/>
-                <a:ea typeface="Arial" pitchFamily="34" charset="-122"/>
-                <a:cs typeface="Arial" pitchFamily="34" charset="-120"/>
-              </a:rPr>
-              <a:t>30</a:t>
-            </a:r>
-            <a:endParaRPr lang="en-US" sz="750" dirty="0"/>
-          </a:p>
-        </p:txBody>
-      </p:sp>
-      <p:sp>
-        <p:nvSpPr>
-          <p:cNvPr id="22" name="Text 17"/>
-          <p:cNvSpPr txBox="1"/>
-          <p:nvPr/>
-        </p:nvSpPr>
-        <p:spPr>
-          <a:xfrm>
-            <a:off x="9673133" y="1728216"/>
-            <a:ext cx="1805330" cy="274320"/>
-          </a:xfrm>
-          <a:prstGeom prst="rect">
-            <a:avLst/>
-          </a:prstGeom>
-          <a:noFill/>
-          <a:ln/>
-        </p:spPr>
-        <p:txBody>
-          <a:bodyPr wrap="square" rtlCol="0" anchor="t"/>
-          <a:lstStyle/>
-          <a:p>
-            <a:pPr algn="l" indent="0" marL="0">
-              <a:buNone/>
-            </a:pPr>
-            <a:r>
-              <a:rPr lang="en-US" sz="1250" b="1" dirty="0">
-                <a:solidFill>
-                  <a:srgbClr val="101828"/>
-                </a:solidFill>
-                <a:latin typeface="Malgun Gothic" pitchFamily="34" charset="0"/>
-                <a:ea typeface="Malgun Gothic" pitchFamily="34" charset="-122"/>
-                <a:cs typeface="Malgun Gothic" pitchFamily="34" charset="-120"/>
-              </a:rPr>
-              <a:t>파충류 체험</a:t>
-            </a:r>
-            <a:pPr algn="l" indent="0" marL="0">
-              <a:buNone/>
-            </a:pPr>
-            <a:r>
-              <a:rPr lang="en-US" sz="800" b="1" dirty="0">
-                <a:solidFill>
-                  <a:srgbClr val="3182F6"/>
-                </a:solidFill>
-                <a:latin typeface="Malgun Gothic" pitchFamily="34" charset="0"/>
-                <a:ea typeface="Malgun Gothic" pitchFamily="34" charset="-122"/>
-                <a:cs typeface="Malgun Gothic" pitchFamily="34" charset="-120"/>
-              </a:rPr>
-              <a:t>   1곳</a:t>
-            </a:r>
-            <a:endParaRPr lang="en-US" sz="1250" dirty="0"/>
-          </a:p>
-        </p:txBody>
-      </p:sp>
-      <p:sp>
-        <p:nvSpPr>
-          <p:cNvPr id="23" name="Text 18"/>
-          <p:cNvSpPr txBox="1"/>
-          <p:nvPr/>
-        </p:nvSpPr>
-        <p:spPr>
-          <a:xfrm>
-            <a:off x="9673133" y="2020824"/>
-            <a:ext cx="1805330" cy="816864"/>
-          </a:xfrm>
-          <a:prstGeom prst="rect">
-            <a:avLst/>
-          </a:prstGeom>
-          <a:noFill/>
-          <a:ln/>
-        </p:spPr>
-        <p:txBody>
-          <a:bodyPr wrap="square" rtlCol="0" anchor="t"/>
-          <a:lstStyle/>
-          <a:p>
-            <a:pPr algn="l" indent="0" marL="0">
-              <a:lnSpc>
-                <a:spcPct val="122000"/>
-              </a:lnSpc>
-              <a:buNone/>
-            </a:pPr>
-            <a:r>
-              <a:rPr lang="en-US" sz="800" dirty="0">
-                <a:solidFill>
-                  <a:srgbClr val="5A6B85"/>
-                </a:solidFill>
-                <a:latin typeface="Malgun Gothic" pitchFamily="34" charset="0"/>
-                <a:ea typeface="Malgun Gothic" pitchFamily="34" charset="-122"/>
-                <a:cs typeface="Malgun Gothic" pitchFamily="34" charset="-120"/>
-              </a:rPr>
-              <a:t>크레스티드게코, 아프리카 식물. 다른 마켓에 없는 차별화 콘텐츠</a:t>
-            </a:r>
-            <a:endParaRPr lang="en-US" sz="800" dirty="0"/>
-          </a:p>
-        </p:txBody>
-      </p:sp>
-      <p:sp>
-        <p:nvSpPr>
-          <p:cNvPr id="24" name="Shape 19"/>
-          <p:cNvSpPr/>
-          <p:nvPr/>
-        </p:nvSpPr>
-        <p:spPr>
-          <a:xfrm>
-            <a:off x="566928" y="6400800"/>
-            <a:ext cx="11057839" cy="10973"/>
-          </a:xfrm>
-          <a:prstGeom prst="rect">
-            <a:avLst/>
-          </a:prstGeom>
-          <a:solidFill>
-            <a:srgbClr val="E4EBF5"/>
-          </a:solidFill>
-          <a:ln w="12700">
-            <a:solidFill>
-              <a:srgbClr val="E4EBF5"/>
-            </a:solidFill>
-            <a:prstDash val="solid"/>
-          </a:ln>
-        </p:spPr>
-      </p:sp>
-      <p:sp>
-        <p:nvSpPr>
-          <p:cNvPr id="25" name="Text 20"/>
-          <p:cNvSpPr txBox="1"/>
-          <p:nvPr/>
-        </p:nvSpPr>
-        <p:spPr>
-          <a:xfrm>
-            <a:off x="566928" y="6492240"/>
-            <a:ext cx="10234879" cy="256032"/>
-          </a:xfrm>
-          <a:prstGeom prst="rect">
-            <a:avLst/>
-          </a:prstGeom>
-          <a:noFill/>
-          <a:ln/>
-        </p:spPr>
-        <p:txBody>
-          <a:bodyPr wrap="square" rtlCol="0" anchor="t"/>
-          <a:lstStyle/>
-          <a:p>
-            <a:pPr algn="l" indent="0" marL="0">
-              <a:buNone/>
-            </a:pPr>
-            <a:r>
-              <a:rPr lang="en-US" sz="750" dirty="0">
-                <a:solidFill>
-                  <a:srgbClr val="A3B0C4"/>
-                </a:solidFill>
-                <a:latin typeface="Malgun Gothic" pitchFamily="34" charset="0"/>
-                <a:ea typeface="Malgun Gothic" pitchFamily="34" charset="-122"/>
-                <a:cs typeface="Malgun Gothic" pitchFamily="34" charset="-120"/>
-              </a:rPr>
-              <a:t>사진은 품목 이해를 돕기 위한 예시 이미지입니다 (자유 이용 라이선스). 실제 참여 셀러의 상품 사진이 아닙니다.</a:t>
-            </a:r>
-            <a:endParaRPr lang="en-US" sz="750" dirty="0"/>
-          </a:p>
-        </p:txBody>
-      </p:sp>
-      <p:sp>
-        <p:nvSpPr>
-          <p:cNvPr id="26" name="Text 21"/>
           <p:cNvSpPr txBox="1"/>
           <p:nvPr/>
         </p:nvSpPr>
